--- a/week5task/task07_cs231n_assignment1/results/week5_cs231n_assignment1_report.pptx
+++ b/week5task/task07_cs231n_assignment1/results/week5_cs231n_assignment1_report.pptx
@@ -1,26 +1,27 @@
 
 <file path=ppt/presentation.xml><?xml version="1.0" encoding="utf-8"?>
-<p:presentation xmlns:a="http://schemas.openxmlformats.org/drawingml/2006/main" xmlns:r="http://schemas.openxmlformats.org/officeDocument/2006/relationships" xmlns:p="http://schemas.openxmlformats.org/presentationml/2006/main" saveSubsetFonts="1" autoCompressPictures="0">
+<p:presentation xmlns:a="http://schemas.openxmlformats.org/drawingml/2006/main" xmlns:r="http://schemas.openxmlformats.org/officeDocument/2006/relationships" xmlns:p="http://schemas.openxmlformats.org/presentationml/2006/main" autoCompressPictures="0">
   <p:sldMasterIdLst>
     <p:sldMasterId id="2147483648" r:id="rId1"/>
   </p:sldMasterIdLst>
   <p:sldIdLst>
-    <p:sldId id="256" r:id="rId7"/>
-    <p:sldId id="257" r:id="rId8"/>
-    <p:sldId id="258" r:id="rId9"/>
-    <p:sldId id="259" r:id="rId10"/>
-    <p:sldId id="260" r:id="rId11"/>
-    <p:sldId id="261" r:id="rId12"/>
-    <p:sldId id="262" r:id="rId13"/>
-    <p:sldId id="263" r:id="rId14"/>
-    <p:sldId id="264" r:id="rId15"/>
-    <p:sldId id="265" r:id="rId16"/>
-    <p:sldId id="266" r:id="rId17"/>
-    <p:sldId id="267" r:id="rId18"/>
-    <p:sldId id="268" r:id="rId19"/>
-    <p:sldId id="269" r:id="rId20"/>
+    <p:sldId id="256" r:id="rId3"/>
+    <p:sldId id="258" r:id="rId4"/>
+    <p:sldId id="259" r:id="rId5"/>
+    <p:sldId id="260" r:id="rId6"/>
+    <p:sldId id="261" r:id="rId7"/>
+    <p:sldId id="262" r:id="rId8"/>
+    <p:sldId id="263" r:id="rId9"/>
+    <p:sldId id="264" r:id="rId10"/>
+    <p:sldId id="265" r:id="rId11"/>
+    <p:sldId id="266" r:id="rId12"/>
+    <p:sldId id="267" r:id="rId13"/>
+    <p:sldId id="268" r:id="rId14"/>
+    <p:sldId id="269" r:id="rId18"/>
+    <p:sldId id="270" r:id="rId19"/>
+    <p:sldId id="271" r:id="rId20"/>
   </p:sldIdLst>
-  <p:sldSz cx="12191695" cy="6858000" type="screen4x3"/>
+  <p:sldSz cx="12191365" cy="6858000" type="screen4x3"/>
   <p:notesSz cx="6858000" cy="9144000"/>
   <p:defaultTextStyle>
     <a:defPPr>
@@ -117,6 +118,22 @@
       </a:defRPr>
     </a:lvl9pPr>
   </p:defaultTextStyle>
+  <p:extLst>
+    <p:ext uri="{EFAFB233-063F-42B5-8137-9DF3F51BA10A}">
+      <p15:sldGuideLst xmlns:p15="http://schemas.microsoft.com/office/powerpoint/2012/main">
+        <p15:guide id="1" orient="horz" pos="2160" userDrawn="1">
+          <p15:clr>
+            <a:srgbClr val="A4A3A4"/>
+          </p15:clr>
+        </p15:guide>
+        <p15:guide id="2" pos="2880" userDrawn="1">
+          <p15:clr>
+            <a:srgbClr val="A4A3A4"/>
+          </p15:clr>
+        </p15:guide>
+      </p15:sldGuideLst>
+    </p:ext>
+  </p:extLst>
 </p:presentation>
 </file>
 
@@ -301,7 +318,6 @@
           <a:p>
             <a:fld id="{5BCAD085-E8A6-8845-BD4E-CB4CCA059FC4}" type="datetimeFigureOut">
               <a:rPr lang="en-US" smtClean="0"/>
-              <a:t>1/27/13</a:t>
             </a:fld>
             <a:endParaRPr lang="en-US"/>
           </a:p>
@@ -343,18 +359,12 @@
           <a:p>
             <a:fld id="{C1FF6DA9-008F-8B48-92A6-B652298478BF}" type="slidenum">
               <a:rPr lang="en-US" smtClean="0"/>
-              <a:t>‹#›</a:t>
             </a:fld>
             <a:endParaRPr lang="en-US"/>
           </a:p>
         </p:txBody>
       </p:sp>
     </p:spTree>
-    <p:extLst>
-      <p:ext uri="{BB962C8B-B14F-4D97-AF65-F5344CB8AC3E}">
-        <p14:creationId xmlns:p14="http://schemas.microsoft.com/office/powerpoint/2010/main" val="3168075583"/>
-      </p:ext>
-    </p:extLst>
   </p:cSld>
   <p:clrMapOvr>
     <a:masterClrMapping/>
@@ -422,6 +432,7 @@
               <a:rPr lang="en-US" smtClean="0"/>
               <a:t>Click to edit Master text styles</a:t>
             </a:r>
+            <a:endParaRPr lang="en-US" smtClean="0"/>
           </a:p>
           <a:p>
             <a:pPr lvl="1"/>
@@ -429,6 +440,7 @@
               <a:rPr lang="en-US" smtClean="0"/>
               <a:t>Second level</a:t>
             </a:r>
+            <a:endParaRPr lang="en-US" smtClean="0"/>
           </a:p>
           <a:p>
             <a:pPr lvl="2"/>
@@ -436,6 +448,7 @@
               <a:rPr lang="en-US" smtClean="0"/>
               <a:t>Third level</a:t>
             </a:r>
+            <a:endParaRPr lang="en-US" smtClean="0"/>
           </a:p>
           <a:p>
             <a:pPr lvl="3"/>
@@ -443,6 +456,7 @@
               <a:rPr lang="en-US" smtClean="0"/>
               <a:t>Fourth level</a:t>
             </a:r>
+            <a:endParaRPr lang="en-US" smtClean="0"/>
           </a:p>
           <a:p>
             <a:pPr lvl="4"/>
@@ -471,7 +485,6 @@
           <a:p>
             <a:fld id="{5BCAD085-E8A6-8845-BD4E-CB4CCA059FC4}" type="datetimeFigureOut">
               <a:rPr lang="en-US" smtClean="0"/>
-              <a:t>1/27/13</a:t>
             </a:fld>
             <a:endParaRPr lang="en-US"/>
           </a:p>
@@ -513,18 +526,12 @@
           <a:p>
             <a:fld id="{C1FF6DA9-008F-8B48-92A6-B652298478BF}" type="slidenum">
               <a:rPr lang="en-US" smtClean="0"/>
-              <a:t>‹#›</a:t>
             </a:fld>
             <a:endParaRPr lang="en-US"/>
           </a:p>
         </p:txBody>
       </p:sp>
     </p:spTree>
-    <p:extLst>
-      <p:ext uri="{BB962C8B-B14F-4D97-AF65-F5344CB8AC3E}">
-        <p14:creationId xmlns:p14="http://schemas.microsoft.com/office/powerpoint/2010/main" val="2910927964"/>
-      </p:ext>
-    </p:extLst>
   </p:cSld>
   <p:clrMapOvr>
     <a:masterClrMapping/>
@@ -602,6 +609,7 @@
               <a:rPr lang="en-US" smtClean="0"/>
               <a:t>Click to edit Master text styles</a:t>
             </a:r>
+            <a:endParaRPr lang="en-US" smtClean="0"/>
           </a:p>
           <a:p>
             <a:pPr lvl="1"/>
@@ -609,6 +617,7 @@
               <a:rPr lang="en-US" smtClean="0"/>
               <a:t>Second level</a:t>
             </a:r>
+            <a:endParaRPr lang="en-US" smtClean="0"/>
           </a:p>
           <a:p>
             <a:pPr lvl="2"/>
@@ -616,6 +625,7 @@
               <a:rPr lang="en-US" smtClean="0"/>
               <a:t>Third level</a:t>
             </a:r>
+            <a:endParaRPr lang="en-US" smtClean="0"/>
           </a:p>
           <a:p>
             <a:pPr lvl="3"/>
@@ -623,6 +633,7 @@
               <a:rPr lang="en-US" smtClean="0"/>
               <a:t>Fourth level</a:t>
             </a:r>
+            <a:endParaRPr lang="en-US" smtClean="0"/>
           </a:p>
           <a:p>
             <a:pPr lvl="4"/>
@@ -651,7 +662,6 @@
           <a:p>
             <a:fld id="{5BCAD085-E8A6-8845-BD4E-CB4CCA059FC4}" type="datetimeFigureOut">
               <a:rPr lang="en-US" smtClean="0"/>
-              <a:t>1/27/13</a:t>
             </a:fld>
             <a:endParaRPr lang="en-US"/>
           </a:p>
@@ -693,18 +703,12 @@
           <a:p>
             <a:fld id="{C1FF6DA9-008F-8B48-92A6-B652298478BF}" type="slidenum">
               <a:rPr lang="en-US" smtClean="0"/>
-              <a:t>‹#›</a:t>
             </a:fld>
             <a:endParaRPr lang="en-US"/>
           </a:p>
         </p:txBody>
       </p:sp>
     </p:spTree>
-    <p:extLst>
-      <p:ext uri="{BB962C8B-B14F-4D97-AF65-F5344CB8AC3E}">
-        <p14:creationId xmlns:p14="http://schemas.microsoft.com/office/powerpoint/2010/main" val="3612223792"/>
-      </p:ext>
-    </p:extLst>
   </p:cSld>
   <p:clrMapOvr>
     <a:masterClrMapping/>
@@ -772,6 +776,7 @@
               <a:rPr lang="en-US" smtClean="0"/>
               <a:t>Click to edit Master text styles</a:t>
             </a:r>
+            <a:endParaRPr lang="en-US" smtClean="0"/>
           </a:p>
           <a:p>
             <a:pPr lvl="1"/>
@@ -779,6 +784,7 @@
               <a:rPr lang="en-US" smtClean="0"/>
               <a:t>Second level</a:t>
             </a:r>
+            <a:endParaRPr lang="en-US" smtClean="0"/>
           </a:p>
           <a:p>
             <a:pPr lvl="2"/>
@@ -786,6 +792,7 @@
               <a:rPr lang="en-US" smtClean="0"/>
               <a:t>Third level</a:t>
             </a:r>
+            <a:endParaRPr lang="en-US" smtClean="0"/>
           </a:p>
           <a:p>
             <a:pPr lvl="3"/>
@@ -793,6 +800,7 @@
               <a:rPr lang="en-US" smtClean="0"/>
               <a:t>Fourth level</a:t>
             </a:r>
+            <a:endParaRPr lang="en-US" smtClean="0"/>
           </a:p>
           <a:p>
             <a:pPr lvl="4"/>
@@ -821,7 +829,6 @@
           <a:p>
             <a:fld id="{5BCAD085-E8A6-8845-BD4E-CB4CCA059FC4}" type="datetimeFigureOut">
               <a:rPr lang="en-US" smtClean="0"/>
-              <a:t>1/27/13</a:t>
             </a:fld>
             <a:endParaRPr lang="en-US"/>
           </a:p>
@@ -863,18 +870,12 @@
           <a:p>
             <a:fld id="{C1FF6DA9-008F-8B48-92A6-B652298478BF}" type="slidenum">
               <a:rPr lang="en-US" smtClean="0"/>
-              <a:t>‹#›</a:t>
             </a:fld>
             <a:endParaRPr lang="en-US"/>
           </a:p>
         </p:txBody>
       </p:sp>
     </p:spTree>
-    <p:extLst>
-      <p:ext uri="{BB962C8B-B14F-4D97-AF65-F5344CB8AC3E}">
-        <p14:creationId xmlns:p14="http://schemas.microsoft.com/office/powerpoint/2010/main" val="2614314258"/>
-      </p:ext>
-    </p:extLst>
   </p:cSld>
   <p:clrMapOvr>
     <a:masterClrMapping/>
@@ -1047,6 +1048,7 @@
               <a:rPr lang="en-US" smtClean="0"/>
               <a:t>Click to edit Master text styles</a:t>
             </a:r>
+            <a:endParaRPr lang="en-US" smtClean="0"/>
           </a:p>
         </p:txBody>
       </p:sp>
@@ -1067,7 +1069,6 @@
           <a:p>
             <a:fld id="{5BCAD085-E8A6-8845-BD4E-CB4CCA059FC4}" type="datetimeFigureOut">
               <a:rPr lang="en-US" smtClean="0"/>
-              <a:t>1/27/13</a:t>
             </a:fld>
             <a:endParaRPr lang="en-US"/>
           </a:p>
@@ -1109,18 +1110,12 @@
           <a:p>
             <a:fld id="{C1FF6DA9-008F-8B48-92A6-B652298478BF}" type="slidenum">
               <a:rPr lang="en-US" smtClean="0"/>
-              <a:t>‹#›</a:t>
             </a:fld>
             <a:endParaRPr lang="en-US"/>
           </a:p>
         </p:txBody>
       </p:sp>
     </p:spTree>
-    <p:extLst>
-      <p:ext uri="{BB962C8B-B14F-4D97-AF65-F5344CB8AC3E}">
-        <p14:creationId xmlns:p14="http://schemas.microsoft.com/office/powerpoint/2010/main" val="960648375"/>
-      </p:ext>
-    </p:extLst>
   </p:cSld>
   <p:clrMapOvr>
     <a:masterClrMapping/>
@@ -1221,6 +1216,7 @@
               <a:rPr lang="en-US" smtClean="0"/>
               <a:t>Click to edit Master text styles</a:t>
             </a:r>
+            <a:endParaRPr lang="en-US" smtClean="0"/>
           </a:p>
           <a:p>
             <a:pPr lvl="1"/>
@@ -1228,6 +1224,7 @@
               <a:rPr lang="en-US" smtClean="0"/>
               <a:t>Second level</a:t>
             </a:r>
+            <a:endParaRPr lang="en-US" smtClean="0"/>
           </a:p>
           <a:p>
             <a:pPr lvl="2"/>
@@ -1235,6 +1232,7 @@
               <a:rPr lang="en-US" smtClean="0"/>
               <a:t>Third level</a:t>
             </a:r>
+            <a:endParaRPr lang="en-US" smtClean="0"/>
           </a:p>
           <a:p>
             <a:pPr lvl="3"/>
@@ -1242,6 +1240,7 @@
               <a:rPr lang="en-US" smtClean="0"/>
               <a:t>Fourth level</a:t>
             </a:r>
+            <a:endParaRPr lang="en-US" smtClean="0"/>
           </a:p>
           <a:p>
             <a:pPr lvl="4"/>
@@ -1306,6 +1305,7 @@
               <a:rPr lang="en-US" smtClean="0"/>
               <a:t>Click to edit Master text styles</a:t>
             </a:r>
+            <a:endParaRPr lang="en-US" smtClean="0"/>
           </a:p>
           <a:p>
             <a:pPr lvl="1"/>
@@ -1313,6 +1313,7 @@
               <a:rPr lang="en-US" smtClean="0"/>
               <a:t>Second level</a:t>
             </a:r>
+            <a:endParaRPr lang="en-US" smtClean="0"/>
           </a:p>
           <a:p>
             <a:pPr lvl="2"/>
@@ -1320,6 +1321,7 @@
               <a:rPr lang="en-US" smtClean="0"/>
               <a:t>Third level</a:t>
             </a:r>
+            <a:endParaRPr lang="en-US" smtClean="0"/>
           </a:p>
           <a:p>
             <a:pPr lvl="3"/>
@@ -1327,6 +1329,7 @@
               <a:rPr lang="en-US" smtClean="0"/>
               <a:t>Fourth level</a:t>
             </a:r>
+            <a:endParaRPr lang="en-US" smtClean="0"/>
           </a:p>
           <a:p>
             <a:pPr lvl="4"/>
@@ -1355,7 +1358,6 @@
           <a:p>
             <a:fld id="{5BCAD085-E8A6-8845-BD4E-CB4CCA059FC4}" type="datetimeFigureOut">
               <a:rPr lang="en-US" smtClean="0"/>
-              <a:t>1/27/13</a:t>
             </a:fld>
             <a:endParaRPr lang="en-US"/>
           </a:p>
@@ -1397,18 +1399,12 @@
           <a:p>
             <a:fld id="{C1FF6DA9-008F-8B48-92A6-B652298478BF}" type="slidenum">
               <a:rPr lang="en-US" smtClean="0"/>
-              <a:t>‹#›</a:t>
             </a:fld>
             <a:endParaRPr lang="en-US"/>
           </a:p>
         </p:txBody>
       </p:sp>
     </p:spTree>
-    <p:extLst>
-      <p:ext uri="{BB962C8B-B14F-4D97-AF65-F5344CB8AC3E}">
-        <p14:creationId xmlns:p14="http://schemas.microsoft.com/office/powerpoint/2010/main" val="2782244947"/>
-      </p:ext>
-    </p:extLst>
   </p:cSld>
   <p:clrMapOvr>
     <a:masterClrMapping/>
@@ -1522,6 +1518,7 @@
               <a:rPr lang="en-US" smtClean="0"/>
               <a:t>Click to edit Master text styles</a:t>
             </a:r>
+            <a:endParaRPr lang="en-US" smtClean="0"/>
           </a:p>
         </p:txBody>
       </p:sp>
@@ -1578,6 +1575,7 @@
               <a:rPr lang="en-US" smtClean="0"/>
               <a:t>Click to edit Master text styles</a:t>
             </a:r>
+            <a:endParaRPr lang="en-US" smtClean="0"/>
           </a:p>
           <a:p>
             <a:pPr lvl="1"/>
@@ -1585,6 +1583,7 @@
               <a:rPr lang="en-US" smtClean="0"/>
               <a:t>Second level</a:t>
             </a:r>
+            <a:endParaRPr lang="en-US" smtClean="0"/>
           </a:p>
           <a:p>
             <a:pPr lvl="2"/>
@@ -1592,6 +1591,7 @@
               <a:rPr lang="en-US" smtClean="0"/>
               <a:t>Third level</a:t>
             </a:r>
+            <a:endParaRPr lang="en-US" smtClean="0"/>
           </a:p>
           <a:p>
             <a:pPr lvl="3"/>
@@ -1599,6 +1599,7 @@
               <a:rPr lang="en-US" smtClean="0"/>
               <a:t>Fourth level</a:t>
             </a:r>
+            <a:endParaRPr lang="en-US" smtClean="0"/>
           </a:p>
           <a:p>
             <a:pPr lvl="4"/>
@@ -1672,6 +1673,7 @@
               <a:rPr lang="en-US" smtClean="0"/>
               <a:t>Click to edit Master text styles</a:t>
             </a:r>
+            <a:endParaRPr lang="en-US" smtClean="0"/>
           </a:p>
         </p:txBody>
       </p:sp>
@@ -1728,6 +1730,7 @@
               <a:rPr lang="en-US" smtClean="0"/>
               <a:t>Click to edit Master text styles</a:t>
             </a:r>
+            <a:endParaRPr lang="en-US" smtClean="0"/>
           </a:p>
           <a:p>
             <a:pPr lvl="1"/>
@@ -1735,6 +1738,7 @@
               <a:rPr lang="en-US" smtClean="0"/>
               <a:t>Second level</a:t>
             </a:r>
+            <a:endParaRPr lang="en-US" smtClean="0"/>
           </a:p>
           <a:p>
             <a:pPr lvl="2"/>
@@ -1742,6 +1746,7 @@
               <a:rPr lang="en-US" smtClean="0"/>
               <a:t>Third level</a:t>
             </a:r>
+            <a:endParaRPr lang="en-US" smtClean="0"/>
           </a:p>
           <a:p>
             <a:pPr lvl="3"/>
@@ -1749,6 +1754,7 @@
               <a:rPr lang="en-US" smtClean="0"/>
               <a:t>Fourth level</a:t>
             </a:r>
+            <a:endParaRPr lang="en-US" smtClean="0"/>
           </a:p>
           <a:p>
             <a:pPr lvl="4"/>
@@ -1777,7 +1783,6 @@
           <a:p>
             <a:fld id="{5BCAD085-E8A6-8845-BD4E-CB4CCA059FC4}" type="datetimeFigureOut">
               <a:rPr lang="en-US" smtClean="0"/>
-              <a:t>1/27/13</a:t>
             </a:fld>
             <a:endParaRPr lang="en-US"/>
           </a:p>
@@ -1819,18 +1824,12 @@
           <a:p>
             <a:fld id="{C1FF6DA9-008F-8B48-92A6-B652298478BF}" type="slidenum">
               <a:rPr lang="en-US" smtClean="0"/>
-              <a:t>‹#›</a:t>
             </a:fld>
             <a:endParaRPr lang="en-US"/>
           </a:p>
         </p:txBody>
       </p:sp>
     </p:spTree>
-    <p:extLst>
-      <p:ext uri="{BB962C8B-B14F-4D97-AF65-F5344CB8AC3E}">
-        <p14:creationId xmlns:p14="http://schemas.microsoft.com/office/powerpoint/2010/main" val="990158736"/>
-      </p:ext>
-    </p:extLst>
   </p:cSld>
   <p:clrMapOvr>
     <a:masterClrMapping/>
@@ -1895,7 +1894,6 @@
           <a:p>
             <a:fld id="{5BCAD085-E8A6-8845-BD4E-CB4CCA059FC4}" type="datetimeFigureOut">
               <a:rPr lang="en-US" smtClean="0"/>
-              <a:t>1/27/13</a:t>
             </a:fld>
             <a:endParaRPr lang="en-US"/>
           </a:p>
@@ -1937,18 +1935,12 @@
           <a:p>
             <a:fld id="{C1FF6DA9-008F-8B48-92A6-B652298478BF}" type="slidenum">
               <a:rPr lang="en-US" smtClean="0"/>
-              <a:t>‹#›</a:t>
             </a:fld>
             <a:endParaRPr lang="en-US"/>
           </a:p>
         </p:txBody>
       </p:sp>
     </p:spTree>
-    <p:extLst>
-      <p:ext uri="{BB962C8B-B14F-4D97-AF65-F5344CB8AC3E}">
-        <p14:creationId xmlns:p14="http://schemas.microsoft.com/office/powerpoint/2010/main" val="727027711"/>
-      </p:ext>
-    </p:extLst>
   </p:cSld>
   <p:clrMapOvr>
     <a:masterClrMapping/>
@@ -1990,7 +1982,6 @@
           <a:p>
             <a:fld id="{5BCAD085-E8A6-8845-BD4E-CB4CCA059FC4}" type="datetimeFigureOut">
               <a:rPr lang="en-US" smtClean="0"/>
-              <a:t>1/27/13</a:t>
             </a:fld>
             <a:endParaRPr lang="en-US"/>
           </a:p>
@@ -2032,18 +2023,12 @@
           <a:p>
             <a:fld id="{C1FF6DA9-008F-8B48-92A6-B652298478BF}" type="slidenum">
               <a:rPr lang="en-US" smtClean="0"/>
-              <a:t>‹#›</a:t>
             </a:fld>
             <a:endParaRPr lang="en-US"/>
           </a:p>
         </p:txBody>
       </p:sp>
     </p:spTree>
-    <p:extLst>
-      <p:ext uri="{BB962C8B-B14F-4D97-AF65-F5344CB8AC3E}">
-        <p14:creationId xmlns:p14="http://schemas.microsoft.com/office/powerpoint/2010/main" val="1212999818"/>
-      </p:ext>
-    </p:extLst>
   </p:cSld>
   <p:clrMapOvr>
     <a:masterClrMapping/>
@@ -2153,6 +2138,7 @@
               <a:rPr lang="en-US" smtClean="0"/>
               <a:t>Click to edit Master text styles</a:t>
             </a:r>
+            <a:endParaRPr lang="en-US" smtClean="0"/>
           </a:p>
           <a:p>
             <a:pPr lvl="1"/>
@@ -2160,6 +2146,7 @@
               <a:rPr lang="en-US" smtClean="0"/>
               <a:t>Second level</a:t>
             </a:r>
+            <a:endParaRPr lang="en-US" smtClean="0"/>
           </a:p>
           <a:p>
             <a:pPr lvl="2"/>
@@ -2167,6 +2154,7 @@
               <a:rPr lang="en-US" smtClean="0"/>
               <a:t>Third level</a:t>
             </a:r>
+            <a:endParaRPr lang="en-US" smtClean="0"/>
           </a:p>
           <a:p>
             <a:pPr lvl="3"/>
@@ -2174,6 +2162,7 @@
               <a:rPr lang="en-US" smtClean="0"/>
               <a:t>Fourth level</a:t>
             </a:r>
+            <a:endParaRPr lang="en-US" smtClean="0"/>
           </a:p>
           <a:p>
             <a:pPr lvl="4"/>
@@ -2247,6 +2236,7 @@
               <a:rPr lang="en-US" smtClean="0"/>
               <a:t>Click to edit Master text styles</a:t>
             </a:r>
+            <a:endParaRPr lang="en-US" smtClean="0"/>
           </a:p>
         </p:txBody>
       </p:sp>
@@ -2267,7 +2257,6 @@
           <a:p>
             <a:fld id="{5BCAD085-E8A6-8845-BD4E-CB4CCA059FC4}" type="datetimeFigureOut">
               <a:rPr lang="en-US" smtClean="0"/>
-              <a:t>1/27/13</a:t>
             </a:fld>
             <a:endParaRPr lang="en-US"/>
           </a:p>
@@ -2309,18 +2298,12 @@
           <a:p>
             <a:fld id="{C1FF6DA9-008F-8B48-92A6-B652298478BF}" type="slidenum">
               <a:rPr lang="en-US" smtClean="0"/>
-              <a:t>‹#›</a:t>
             </a:fld>
             <a:endParaRPr lang="en-US"/>
           </a:p>
         </p:txBody>
       </p:sp>
     </p:spTree>
-    <p:extLst>
-      <p:ext uri="{BB962C8B-B14F-4D97-AF65-F5344CB8AC3E}">
-        <p14:creationId xmlns:p14="http://schemas.microsoft.com/office/powerpoint/2010/main" val="1840726560"/>
-      </p:ext>
-    </p:extLst>
   </p:cSld>
   <p:clrMapOvr>
     <a:masterClrMapping/>
@@ -2500,6 +2483,7 @@
               <a:rPr lang="en-US" smtClean="0"/>
               <a:t>Click to edit Master text styles</a:t>
             </a:r>
+            <a:endParaRPr lang="en-US" smtClean="0"/>
           </a:p>
         </p:txBody>
       </p:sp>
@@ -2520,7 +2504,6 @@
           <a:p>
             <a:fld id="{5BCAD085-E8A6-8845-BD4E-CB4CCA059FC4}" type="datetimeFigureOut">
               <a:rPr lang="en-US" smtClean="0"/>
-              <a:t>1/27/13</a:t>
             </a:fld>
             <a:endParaRPr lang="en-US"/>
           </a:p>
@@ -2562,18 +2545,12 @@
           <a:p>
             <a:fld id="{C1FF6DA9-008F-8B48-92A6-B652298478BF}" type="slidenum">
               <a:rPr lang="en-US" smtClean="0"/>
-              <a:t>‹#›</a:t>
             </a:fld>
             <a:endParaRPr lang="en-US"/>
           </a:p>
         </p:txBody>
       </p:sp>
     </p:spTree>
-    <p:extLst>
-      <p:ext uri="{BB962C8B-B14F-4D97-AF65-F5344CB8AC3E}">
-        <p14:creationId xmlns:p14="http://schemas.microsoft.com/office/powerpoint/2010/main" val="3889236939"/>
-      </p:ext>
-    </p:extLst>
   </p:cSld>
   <p:clrMapOvr>
     <a:masterClrMapping/>
@@ -2666,6 +2643,7 @@
               <a:rPr lang="en-US" smtClean="0"/>
               <a:t>Click to edit Master text styles</a:t>
             </a:r>
+            <a:endParaRPr lang="en-US" smtClean="0"/>
           </a:p>
           <a:p>
             <a:pPr lvl="1"/>
@@ -2673,6 +2651,7 @@
               <a:rPr lang="en-US" smtClean="0"/>
               <a:t>Second level</a:t>
             </a:r>
+            <a:endParaRPr lang="en-US" smtClean="0"/>
           </a:p>
           <a:p>
             <a:pPr lvl="2"/>
@@ -2680,6 +2659,7 @@
               <a:rPr lang="en-US" smtClean="0"/>
               <a:t>Third level</a:t>
             </a:r>
+            <a:endParaRPr lang="en-US" smtClean="0"/>
           </a:p>
           <a:p>
             <a:pPr lvl="3"/>
@@ -2687,6 +2667,7 @@
               <a:rPr lang="en-US" smtClean="0"/>
               <a:t>Fourth level</a:t>
             </a:r>
+            <a:endParaRPr lang="en-US" smtClean="0"/>
           </a:p>
           <a:p>
             <a:pPr lvl="4"/>
@@ -2733,7 +2714,6 @@
           <a:p>
             <a:fld id="{5BCAD085-E8A6-8845-BD4E-CB4CCA059FC4}" type="datetimeFigureOut">
               <a:rPr lang="en-US" smtClean="0"/>
-              <a:t>1/27/13</a:t>
             </a:fld>
             <a:endParaRPr lang="en-US"/>
           </a:p>
@@ -2811,18 +2791,12 @@
           <a:p>
             <a:fld id="{C1FF6DA9-008F-8B48-92A6-B652298478BF}" type="slidenum">
               <a:rPr lang="en-US" smtClean="0"/>
-              <a:t>‹#›</a:t>
             </a:fld>
             <a:endParaRPr lang="en-US"/>
           </a:p>
         </p:txBody>
       </p:sp>
     </p:spTree>
-    <p:extLst>
-      <p:ext uri="{BB962C8B-B14F-4D97-AF65-F5344CB8AC3E}">
-        <p14:creationId xmlns:p14="http://schemas.microsoft.com/office/powerpoint/2010/main" val="2209977519"/>
-      </p:ext>
-    </p:extLst>
   </p:cSld>
   <p:clrMap bg1="lt1" tx1="dk1" bg2="lt2" tx2="dk2" accent1="accent1" accent2="accent2" accent3="accent3" accent4="accent4" accent5="accent5" accent6="accent6" hlink="hlink" folHlink="folHlink"/>
   <p:sldLayoutIdLst>
@@ -2860,7 +2834,7 @@
         <a:spcBef>
           <a:spcPct val="20000"/>
         </a:spcBef>
-        <a:buFont typeface="Arial"/>
+        <a:buFont typeface="Arial" panose="020B0604020202020204"/>
         <a:buChar char="•"/>
         <a:defRPr sz="3200" kern="1200">
           <a:solidFill>
@@ -2875,7 +2849,7 @@
         <a:spcBef>
           <a:spcPct val="20000"/>
         </a:spcBef>
-        <a:buFont typeface="Arial"/>
+        <a:buFont typeface="Arial" panose="020B0604020202020204"/>
         <a:buChar char="–"/>
         <a:defRPr sz="2800" kern="1200">
           <a:solidFill>
@@ -2890,7 +2864,7 @@
         <a:spcBef>
           <a:spcPct val="20000"/>
         </a:spcBef>
-        <a:buFont typeface="Arial"/>
+        <a:buFont typeface="Arial" panose="020B0604020202020204"/>
         <a:buChar char="•"/>
         <a:defRPr sz="2400" kern="1200">
           <a:solidFill>
@@ -2905,7 +2879,7 @@
         <a:spcBef>
           <a:spcPct val="20000"/>
         </a:spcBef>
-        <a:buFont typeface="Arial"/>
+        <a:buFont typeface="Arial" panose="020B0604020202020204"/>
         <a:buChar char="–"/>
         <a:defRPr sz="2000" kern="1200">
           <a:solidFill>
@@ -2920,7 +2894,7 @@
         <a:spcBef>
           <a:spcPct val="20000"/>
         </a:spcBef>
-        <a:buFont typeface="Arial"/>
+        <a:buFont typeface="Arial" panose="020B0604020202020204"/>
         <a:buChar char="»"/>
         <a:defRPr sz="2000" kern="1200">
           <a:solidFill>
@@ -2935,7 +2909,7 @@
         <a:spcBef>
           <a:spcPct val="20000"/>
         </a:spcBef>
-        <a:buFont typeface="Arial"/>
+        <a:buFont typeface="Arial" panose="020B0604020202020204"/>
         <a:buChar char="•"/>
         <a:defRPr sz="2000" kern="1200">
           <a:solidFill>
@@ -2950,7 +2924,7 @@
         <a:spcBef>
           <a:spcPct val="20000"/>
         </a:spcBef>
-        <a:buFont typeface="Arial"/>
+        <a:buFont typeface="Arial" panose="020B0604020202020204"/>
         <a:buChar char="•"/>
         <a:defRPr sz="2000" kern="1200">
           <a:solidFill>
@@ -2965,7 +2939,7 @@
         <a:spcBef>
           <a:spcPct val="20000"/>
         </a:spcBef>
-        <a:buFont typeface="Arial"/>
+        <a:buFont typeface="Arial" panose="020B0604020202020204"/>
         <a:buChar char="•"/>
         <a:defRPr sz="2000" kern="1200">
           <a:solidFill>
@@ -2980,7 +2954,7 @@
         <a:spcBef>
           <a:spcPct val="20000"/>
         </a:spcBef>
-        <a:buFont typeface="Arial"/>
+        <a:buFont typeface="Arial" panose="020B0604020202020204"/>
         <a:buChar char="•"/>
         <a:defRPr sz="2000" kern="1200">
           <a:solidFill>
@@ -3092,7 +3066,7 @@
 </file>
 
 <file path=ppt/slides/slide1.xml><?xml version="1.0" encoding="utf-8"?>
-<p:sld xmlns:a="http://schemas.openxmlformats.org/drawingml/2006/main" xmlns:p="http://schemas.openxmlformats.org/presentationml/2006/main" xmlns:r="http://schemas.openxmlformats.org/officeDocument/2006/relationships">
+<p:sld xmlns:a="http://schemas.openxmlformats.org/drawingml/2006/main" xmlns:r="http://schemas.openxmlformats.org/officeDocument/2006/relationships" xmlns:p="http://schemas.openxmlformats.org/presentationml/2006/main">
   <p:cSld>
     <p:bg>
       <p:bgPr>
@@ -3136,10 +3110,16 @@
                 <a:solidFill>
                   <a:srgbClr val="2A2E34"/>
                 </a:solidFill>
-                <a:latin typeface="Microsoft YaHei"/>
+                <a:latin typeface="微软雅黑" panose="020B0503020204020204" charset="-122"/>
               </a:rPr>
               <a:t>Week5 CS231n Assignment 1</a:t>
             </a:r>
+            <a:endParaRPr sz="3400" b="1">
+              <a:solidFill>
+                <a:srgbClr val="2A2E34"/>
+              </a:solidFill>
+              <a:latin typeface="微软雅黑" panose="020B0503020204020204" charset="-122"/>
+            </a:endParaRPr>
           </a:p>
         </p:txBody>
       </p:sp>
@@ -3170,10 +3150,16 @@
                 <a:solidFill>
                   <a:srgbClr val="2A2E34"/>
                 </a:solidFill>
-                <a:latin typeface="Microsoft YaHei"/>
+                <a:latin typeface="微软雅黑" panose="020B0503020204020204" charset="-122"/>
               </a:rPr>
               <a:t>CIFAR-10 图像分类本地复现实验：kNN、Softmax、TwoLayerNet</a:t>
             </a:r>
+            <a:endParaRPr sz="1800" b="0">
+              <a:solidFill>
+                <a:srgbClr val="2A2E34"/>
+              </a:solidFill>
+              <a:latin typeface="微软雅黑" panose="020B0503020204020204" charset="-122"/>
+            </a:endParaRPr>
           </a:p>
         </p:txBody>
       </p:sp>
@@ -3204,10 +3190,16 @@
                 <a:solidFill>
                   <a:srgbClr val="4F8968"/>
                 </a:solidFill>
-                <a:latin typeface="Microsoft YaHei"/>
+                <a:latin typeface="微软雅黑" panose="020B0503020204020204" charset="-122"/>
               </a:rPr>
               <a:t>最佳测试准确率：TwoLayerNet / N49000 / 0.493</a:t>
             </a:r>
+            <a:endParaRPr sz="2000" b="1">
+              <a:solidFill>
+                <a:srgbClr val="4F8968"/>
+              </a:solidFill>
+              <a:latin typeface="微软雅黑" panose="020B0503020204020204" charset="-122"/>
+            </a:endParaRPr>
           </a:p>
         </p:txBody>
       </p:sp>
@@ -3238,10 +3230,88 @@
                 <a:solidFill>
                   <a:srgbClr val="2A2E34"/>
                 </a:solidFill>
-                <a:latin typeface="Microsoft YaHei"/>
+                <a:latin typeface="微软雅黑" panose="020B0503020204020204" charset="-122"/>
               </a:rPr>
               <a:t>数据规模：10k / 20k / 49k 训练样本；验证与测试各 1k</a:t>
             </a:r>
+            <a:endParaRPr sz="1500" b="0">
+              <a:solidFill>
+                <a:srgbClr val="2A2E34"/>
+              </a:solidFill>
+              <a:latin typeface="微软雅黑" panose="020B0503020204020204" charset="-122"/>
+            </a:endParaRPr>
+          </a:p>
+        </p:txBody>
+      </p:sp>
+      <p:sp>
+        <p:nvSpPr>
+          <p:cNvPr id="6" name="TextBox 3"/>
+          <p:cNvSpPr txBox="1"/>
+          <p:nvPr/>
+        </p:nvSpPr>
+        <p:spPr>
+          <a:xfrm>
+            <a:off x="658495" y="3931920"/>
+            <a:ext cx="7809230" cy="1383665"/>
+          </a:xfrm>
+          <a:prstGeom prst="rect">
+            <a:avLst/>
+          </a:prstGeom>
+          <a:noFill/>
+        </p:spPr>
+        <p:txBody>
+          <a:bodyPr wrap="none">
+            <a:spAutoFit/>
+          </a:bodyPr>
+          <a:lstStyle/>
+          <a:p>
+            <a:pPr>
+              <a:spcAft>
+                <a:spcPts val="800"/>
+              </a:spcAft>
+              <a:defRPr sz="1600">
+                <a:latin typeface="微软雅黑" panose="020B0503020204020204" charset="-122"/>
+              </a:defRPr>
+            </a:pPr>
+            <a:r>
+              <a:t>CS231n A1 关注图像分类的完整工程链路</a:t>
+            </a:r>
+          </a:p>
+          <a:p>
+            <a:pPr>
+              <a:spcAft>
+                <a:spcPts val="800"/>
+              </a:spcAft>
+              <a:defRPr sz="1600">
+                <a:latin typeface="微软雅黑" panose="020B0503020204020204" charset="-122"/>
+              </a:defRPr>
+            </a:pPr>
+            <a:r>
+              <a:t>从 kNN 到 Softmax，再到两层神经网络</a:t>
+            </a:r>
+          </a:p>
+          <a:p>
+            <a:pPr>
+              <a:spcAft>
+                <a:spcPts val="800"/>
+              </a:spcAft>
+              <a:defRPr sz="1600">
+                <a:latin typeface="微软雅黑" panose="020B0503020204020204" charset="-122"/>
+              </a:defRPr>
+            </a:pPr>
+            <a:r>
+              <a:t>核心学习点：数据划分、loss、gradient、regularization、hyperparameter tuning</a:t>
+            </a:r>
+          </a:p>
+          <a:p>
+            <a:pPr>
+              <a:spcAft>
+                <a:spcPts val="800"/>
+              </a:spcAft>
+              <a:defRPr sz="1600">
+                <a:latin typeface="微软雅黑" panose="020B0503020204020204" charset="-122"/>
+              </a:defRPr>
+            </a:pPr>
           </a:p>
         </p:txBody>
       </p:sp>
@@ -3254,7 +3324,7 @@
 </file>
 
 <file path=ppt/slides/slide10.xml><?xml version="1.0" encoding="utf-8"?>
-<p:sld xmlns:a="http://schemas.openxmlformats.org/drawingml/2006/main" xmlns:p="http://schemas.openxmlformats.org/presentationml/2006/main" xmlns:r="http://schemas.openxmlformats.org/officeDocument/2006/relationships">
+<p:sld xmlns:a="http://schemas.openxmlformats.org/drawingml/2006/main" xmlns:r="http://schemas.openxmlformats.org/officeDocument/2006/relationships" xmlns:p="http://schemas.openxmlformats.org/presentationml/2006/main">
   <p:cSld>
     <p:bg>
       <p:bgPr>
@@ -3298,10 +3368,16 @@
                 <a:solidFill>
                   <a:srgbClr val="5F6F82"/>
                 </a:solidFill>
-                <a:latin typeface="Microsoft YaHei"/>
+                <a:latin typeface="微软雅黑" panose="020B0503020204020204" charset="-122"/>
               </a:rPr>
-              <a:t>DIAGNOSTICS</a:t>
-            </a:r>
+              <a:t>BEST MODEL</a:t>
+            </a:r>
+            <a:endParaRPr sz="900" b="1">
+              <a:solidFill>
+                <a:srgbClr val="5F6F82"/>
+              </a:solidFill>
+              <a:latin typeface="微软雅黑" panose="020B0503020204020204" charset="-122"/>
+            </a:endParaRPr>
           </a:p>
         </p:txBody>
       </p:sp>
@@ -3332,61 +3408,94 @@
                 <a:solidFill>
                   <a:srgbClr val="1E2328"/>
                 </a:solidFill>
-                <a:latin typeface="Microsoft YaHei"/>
+                <a:latin typeface="微软雅黑" panose="020B0503020204020204" charset="-122"/>
               </a:rPr>
-              <a:t>诊断图：loss 下降与类别混淆</a:t>
-            </a:r>
-          </a:p>
-        </p:txBody>
-      </p:sp>
-      <p:pic>
-        <p:nvPicPr>
-          <p:cNvPr id="4" name="Picture 3" descr="two_layer_loss_curve.png"/>
-          <p:cNvPicPr>
-            <a:picLocks noChangeAspect="1"/>
-          </p:cNvPicPr>
+              <a:t>最佳模型：TwoLayerNet 是本轮复现的主结果</a:t>
+            </a:r>
+            <a:endParaRPr sz="2400" b="1">
+              <a:solidFill>
+                <a:srgbClr val="1E2328"/>
+              </a:solidFill>
+              <a:latin typeface="微软雅黑" panose="020B0503020204020204" charset="-122"/>
+            </a:endParaRPr>
+          </a:p>
+        </p:txBody>
+      </p:sp>
+      <p:sp>
+        <p:nvSpPr>
+          <p:cNvPr id="4" name="TextBox 3"/>
+          <p:cNvSpPr txBox="1"/>
           <p:nvPr/>
-        </p:nvPicPr>
-        <p:blipFill>
-          <a:blip r:embed="rId2"/>
-          <a:stretch>
-            <a:fillRect/>
-          </a:stretch>
-        </p:blipFill>
-        <p:spPr>
-          <a:xfrm>
-            <a:off x="685800" y="1051560"/>
-            <a:ext cx="5120640" cy="2971800"/>
+        </p:nvSpPr>
+        <p:spPr>
+          <a:xfrm>
+            <a:off x="685800" y="1234440"/>
+            <a:ext cx="10424160" cy="4389120"/>
           </a:xfrm>
           <a:prstGeom prst="rect">
             <a:avLst/>
           </a:prstGeom>
-        </p:spPr>
-      </p:pic>
-      <p:pic>
-        <p:nvPicPr>
-          <p:cNvPr id="5" name="Picture 4" descr="confusion_matrix_best_model.png"/>
-          <p:cNvPicPr>
-            <a:picLocks noChangeAspect="1"/>
-          </p:cNvPicPr>
-          <p:nvPr/>
-        </p:nvPicPr>
-        <p:blipFill>
-          <a:blip r:embed="rId3"/>
-          <a:stretch>
-            <a:fillRect/>
-          </a:stretch>
-        </p:blipFill>
-        <p:spPr>
-          <a:xfrm>
-            <a:off x="6126480" y="914400"/>
-            <a:ext cx="5029200" cy="4297680"/>
-          </a:xfrm>
-          <a:prstGeom prst="rect">
-            <a:avLst/>
-          </a:prstGeom>
-        </p:spPr>
-      </p:pic>
+          <a:noFill/>
+        </p:spPr>
+        <p:txBody>
+          <a:bodyPr wrap="none">
+            <a:spAutoFit/>
+          </a:bodyPr>
+          <a:lstStyle/>
+          <a:p>
+            <a:pPr>
+              <a:spcAft>
+                <a:spcPts val="800"/>
+              </a:spcAft>
+              <a:defRPr sz="1600">
+                <a:latin typeface="微软雅黑" panose="020B0503020204020204" charset="-122"/>
+              </a:defRPr>
+            </a:pPr>
+            <a:r>
+              <a:t>按 validation：N49000 TwoLayerNet cfg4，val=0.515, test=0.493</a:t>
+            </a:r>
+          </a:p>
+          <a:p>
+            <a:pPr>
+              <a:spcAft>
+                <a:spcPts val="800"/>
+              </a:spcAft>
+              <a:defRPr sz="1600">
+                <a:latin typeface="微软雅黑" panose="020B0503020204020204" charset="-122"/>
+              </a:defRPr>
+            </a:pPr>
+            <a:r>
+              <a:t>按 test：部分配置测试准确率可到 0.510，但应以验证集选模</a:t>
+            </a:r>
+          </a:p>
+          <a:p>
+            <a:pPr>
+              <a:spcAft>
+                <a:spcPts val="800"/>
+              </a:spcAft>
+              <a:defRPr sz="1600">
+                <a:latin typeface="微软雅黑" panose="020B0503020204020204" charset="-122"/>
+              </a:defRPr>
+            </a:pPr>
+            <a:r>
+              <a:t>Softmax 最佳 test=0.359</a:t>
+            </a:r>
+          </a:p>
+          <a:p>
+            <a:pPr>
+              <a:spcAft>
+                <a:spcPts val="800"/>
+              </a:spcAft>
+              <a:defRPr sz="1600">
+                <a:latin typeface="微软雅黑" panose="020B0503020204020204" charset="-122"/>
+              </a:defRPr>
+            </a:pPr>
+            <a:r>
+              <a:t>kNN 最佳 test=0.348</a:t>
+            </a:r>
+          </a:p>
+        </p:txBody>
+      </p:sp>
     </p:spTree>
   </p:cSld>
   <p:clrMapOvr>
@@ -3396,7 +3505,7 @@
 </file>
 
 <file path=ppt/slides/slide11.xml><?xml version="1.0" encoding="utf-8"?>
-<p:sld xmlns:a="http://schemas.openxmlformats.org/drawingml/2006/main" xmlns:p="http://schemas.openxmlformats.org/presentationml/2006/main" xmlns:r="http://schemas.openxmlformats.org/officeDocument/2006/relationships">
+<p:sld xmlns:a="http://schemas.openxmlformats.org/drawingml/2006/main" xmlns:r="http://schemas.openxmlformats.org/officeDocument/2006/relationships" xmlns:p="http://schemas.openxmlformats.org/presentationml/2006/main">
   <p:cSld>
     <p:bg>
       <p:bgPr>
@@ -3440,10 +3549,16 @@
                 <a:solidFill>
                   <a:srgbClr val="5F6F82"/>
                 </a:solidFill>
-                <a:latin typeface="Microsoft YaHei"/>
+                <a:latin typeface="微软雅黑" panose="020B0503020204020204" charset="-122"/>
               </a:rPr>
-              <a:t>BEST MODEL</a:t>
-            </a:r>
+              <a:t>TAKEAWAYS</a:t>
+            </a:r>
+            <a:endParaRPr sz="900" b="1">
+              <a:solidFill>
+                <a:srgbClr val="5F6F82"/>
+              </a:solidFill>
+              <a:latin typeface="微软雅黑" panose="020B0503020204020204" charset="-122"/>
+            </a:endParaRPr>
           </a:p>
         </p:txBody>
       </p:sp>
@@ -3474,10 +3589,16 @@
                 <a:solidFill>
                   <a:srgbClr val="1E2328"/>
                 </a:solidFill>
-                <a:latin typeface="Microsoft YaHei"/>
+                <a:latin typeface="微软雅黑" panose="020B0503020204020204" charset="-122"/>
               </a:rPr>
-              <a:t>最佳模型：TwoLayerNet 是本轮复现的主结果</a:t>
-            </a:r>
+              <a:t>关键学习收获</a:t>
+            </a:r>
+            <a:endParaRPr sz="2400" b="1">
+              <a:solidFill>
+                <a:srgbClr val="1E2328"/>
+              </a:solidFill>
+              <a:latin typeface="微软雅黑" panose="020B0503020204020204" charset="-122"/>
+            </a:endParaRPr>
           </a:p>
         </p:txBody>
       </p:sp>
@@ -3508,11 +3629,11 @@
                 <a:spcPts val="800"/>
               </a:spcAft>
               <a:defRPr sz="1600">
-                <a:latin typeface="Microsoft YaHei"/>
+                <a:latin typeface="微软雅黑" panose="020B0503020204020204" charset="-122"/>
               </a:defRPr>
             </a:pPr>
             <a:r>
-              <a:t>按 validation：N49000 TwoLayerNet cfg4，val=0.515, test=0.493</a:t>
+              <a:t>图像分类 pipeline 的核心是数据划分 + 训练 + 验证调参 + 测试评估</a:t>
             </a:r>
           </a:p>
           <a:p>
@@ -3521,11 +3642,11 @@
                 <a:spcPts val="800"/>
               </a:spcAft>
               <a:defRPr sz="1600">
-                <a:latin typeface="Microsoft YaHei"/>
+                <a:latin typeface="微软雅黑" panose="020B0503020204020204" charset="-122"/>
               </a:defRPr>
             </a:pPr>
             <a:r>
-              <a:t>按 test：部分配置测试准确率可到 0.510，但应以验证集选模</a:t>
+              <a:t>向量化 NumPy 实现决定了实验能否高效运行</a:t>
             </a:r>
           </a:p>
           <a:p>
@@ -3534,11 +3655,11 @@
                 <a:spcPts val="800"/>
               </a:spcAft>
               <a:defRPr sz="1600">
-                <a:latin typeface="Microsoft YaHei"/>
+                <a:latin typeface="微软雅黑" panose="020B0503020204020204" charset="-122"/>
               </a:defRPr>
             </a:pPr>
             <a:r>
-              <a:t>Softmax 最佳 test=0.359</a:t>
+              <a:t>正则化和学习率会直接决定泛化性能</a:t>
             </a:r>
           </a:p>
           <a:p>
@@ -3547,11 +3668,24 @@
                 <a:spcPts val="800"/>
               </a:spcAft>
               <a:defRPr sz="1600">
-                <a:latin typeface="Microsoft YaHei"/>
+                <a:latin typeface="微软雅黑" panose="020B0503020204020204" charset="-122"/>
               </a:defRPr>
             </a:pPr>
             <a:r>
-              <a:t>kNN 最佳 test=0.348</a:t>
+              <a:t>raw pixels 能跑通流程，但不是好的视觉表示</a:t>
+            </a:r>
+          </a:p>
+          <a:p>
+            <a:pPr>
+              <a:spcAft>
+                <a:spcPts val="800"/>
+              </a:spcAft>
+              <a:defRPr sz="1600">
+                <a:latin typeface="微软雅黑" panose="020B0503020204020204" charset="-122"/>
+              </a:defRPr>
+            </a:pPr>
+            <a:r>
+              <a:t>非线性模型明显优于线性模型，但还不是 CNN</a:t>
             </a:r>
           </a:p>
         </p:txBody>
@@ -3565,7 +3699,7 @@
 </file>
 
 <file path=ppt/slides/slide12.xml><?xml version="1.0" encoding="utf-8"?>
-<p:sld xmlns:a="http://schemas.openxmlformats.org/drawingml/2006/main" xmlns:p="http://schemas.openxmlformats.org/presentationml/2006/main" xmlns:r="http://schemas.openxmlformats.org/officeDocument/2006/relationships">
+<p:sld xmlns:a="http://schemas.openxmlformats.org/drawingml/2006/main" xmlns:r="http://schemas.openxmlformats.org/officeDocument/2006/relationships" xmlns:p="http://schemas.openxmlformats.org/presentationml/2006/main">
   <p:cSld>
     <p:bg>
       <p:bgPr>
@@ -3609,10 +3743,16 @@
                 <a:solidFill>
                   <a:srgbClr val="5F6F82"/>
                 </a:solidFill>
-                <a:latin typeface="Microsoft YaHei"/>
+                <a:latin typeface="微软雅黑" panose="020B0503020204020204" charset="-122"/>
               </a:rPr>
-              <a:t>TAKEAWAYS</a:t>
-            </a:r>
+              <a:t>LIMITS</a:t>
+            </a:r>
+            <a:endParaRPr sz="900" b="1">
+              <a:solidFill>
+                <a:srgbClr val="5F6F82"/>
+              </a:solidFill>
+              <a:latin typeface="微软雅黑" panose="020B0503020204020204" charset="-122"/>
+            </a:endParaRPr>
           </a:p>
         </p:txBody>
       </p:sp>
@@ -3625,7 +3765,7 @@
         <p:spPr>
           <a:xfrm>
             <a:off x="502920" y="502920"/>
-            <a:ext cx="10424160" cy="502920"/>
+            <a:ext cx="9230995" cy="460375"/>
           </a:xfrm>
           <a:prstGeom prst="rect">
             <a:avLst/>
@@ -3643,10 +3783,52 @@
                 <a:solidFill>
                   <a:srgbClr val="1E2328"/>
                 </a:solidFill>
-                <a:latin typeface="Microsoft YaHei"/>
+                <a:latin typeface="微软雅黑" panose="020B0503020204020204" charset="-122"/>
               </a:rPr>
-              <a:t>关键学习收获</a:t>
-            </a:r>
+              <a:t>当前局限：还没有进入真正强的图像表示</a:t>
+            </a:r>
+            <a:r>
+              <a:rPr lang="zh-CN" sz="2400" b="1">
+                <a:solidFill>
+                  <a:srgbClr val="1E2328"/>
+                </a:solidFill>
+                <a:latin typeface="微软雅黑" panose="020B0503020204020204" charset="-122"/>
+              </a:rPr>
+              <a:t>（</a:t>
+            </a:r>
+            <a:r>
+              <a:rPr lang="en-US" altLang="zh-CN" sz="2400" b="1">
+                <a:solidFill>
+                  <a:srgbClr val="1E2328"/>
+                </a:solidFill>
+                <a:latin typeface="微软雅黑" panose="020B0503020204020204" charset="-122"/>
+              </a:rPr>
+              <a:t>ASSIGNMENT2</a:t>
+            </a:r>
+            <a:r>
+              <a:rPr lang="zh-CN" altLang="en-US" sz="2400" b="1">
+                <a:solidFill>
+                  <a:srgbClr val="1E2328"/>
+                </a:solidFill>
+                <a:latin typeface="微软雅黑" panose="020B0503020204020204" charset="-122"/>
+              </a:rPr>
+              <a:t>作业</a:t>
+            </a:r>
+            <a:r>
+              <a:rPr lang="zh-CN" sz="2400" b="1">
+                <a:solidFill>
+                  <a:srgbClr val="1E2328"/>
+                </a:solidFill>
+                <a:latin typeface="微软雅黑" panose="020B0503020204020204" charset="-122"/>
+              </a:rPr>
+              <a:t>）</a:t>
+            </a:r>
+            <a:endParaRPr lang="zh-CN" sz="2400" b="1">
+              <a:solidFill>
+                <a:srgbClr val="1E2328"/>
+              </a:solidFill>
+              <a:latin typeface="微软雅黑" panose="020B0503020204020204" charset="-122"/>
+            </a:endParaRPr>
           </a:p>
         </p:txBody>
       </p:sp>
@@ -3677,11 +3859,11 @@
                 <a:spcPts val="800"/>
               </a:spcAft>
               <a:defRPr sz="1600">
-                <a:latin typeface="Microsoft YaHei"/>
+                <a:latin typeface="微软雅黑" panose="020B0503020204020204" charset="-122"/>
               </a:defRPr>
             </a:pPr>
             <a:r>
-              <a:t>图像分类 pipeline 的核心是数据划分 + 训练 + 验证调参 + 测试评估</a:t>
+              <a:t>已补跑 HOG / color histogram features</a:t>
             </a:r>
           </a:p>
           <a:p>
@@ -3690,11 +3872,11 @@
                 <a:spcPts val="800"/>
               </a:spcAft>
               <a:defRPr sz="1600">
-                <a:latin typeface="Microsoft YaHei"/>
+                <a:latin typeface="微软雅黑" panose="020B0503020204020204" charset="-122"/>
               </a:defRPr>
             </a:pPr>
             <a:r>
-              <a:t>向量化 NumPy 实现决定了实验能否高效运行</a:t>
+              <a:t>FullyConnectedNet 的 dropout / batch normalization 还未展开</a:t>
             </a:r>
           </a:p>
           <a:p>
@@ -3703,11 +3885,11 @@
                 <a:spcPts val="800"/>
               </a:spcAft>
               <a:defRPr sz="1600">
-                <a:latin typeface="Microsoft YaHei"/>
+                <a:latin typeface="微软雅黑" panose="020B0503020204020204" charset="-122"/>
               </a:defRPr>
             </a:pPr>
             <a:r>
-              <a:t>正则化和学习率会直接决定泛化性能</a:t>
+              <a:t>测试集使用 1,000 张快速评估，后续可扩到完整 10,000 张</a:t>
             </a:r>
           </a:p>
           <a:p>
@@ -3716,25 +3898,150 @@
                 <a:spcPts val="800"/>
               </a:spcAft>
               <a:defRPr sz="1600">
-                <a:latin typeface="Microsoft YaHei"/>
+                <a:latin typeface="微软雅黑" panose="020B0503020204020204" charset="-122"/>
               </a:defRPr>
             </a:pPr>
             <a:r>
-              <a:t>raw pixels 能跑通流程，但不是好的视觉表示</a:t>
-            </a:r>
-          </a:p>
+              <a:t>未使用 CNN，因此没有利用图像局部空间结构</a:t>
+            </a:r>
+          </a:p>
+        </p:txBody>
+      </p:sp>
+      <p:sp>
+        <p:nvSpPr>
+          <p:cNvPr id="5" name="文本框 4"/>
+          <p:cNvSpPr txBox="1"/>
+          <p:nvPr/>
+        </p:nvSpPr>
+        <p:spPr>
+          <a:xfrm>
+            <a:off x="685800" y="3804285"/>
+            <a:ext cx="6096000" cy="1630045"/>
+          </a:xfrm>
+          <a:prstGeom prst="rect">
+            <a:avLst/>
+          </a:prstGeom>
+          <a:noFill/>
+        </p:spPr>
+        <p:txBody>
+          <a:bodyPr wrap="square" rtlCol="0" anchor="t">
+            <a:spAutoFit/>
+          </a:bodyPr>
           <a:p>
             <a:pPr>
               <a:spcAft>
                 <a:spcPts val="800"/>
               </a:spcAft>
               <a:defRPr sz="1600">
-                <a:latin typeface="Microsoft YaHei"/>
+                <a:latin typeface="微软雅黑" panose="020B0503020204020204" charset="-122"/>
               </a:defRPr>
             </a:pPr>
             <a:r>
-              <a:t>非线性模型明显优于线性模型，但还不是 CNN</a:t>
-            </a:r>
+              <a:rPr>
+                <a:sym typeface="+mn-ea"/>
+              </a:rPr>
+              <a:t>1. features.ipynb 已补跑：HOG + color histogram</a:t>
+            </a:r>
+            <a:endParaRPr>
+              <a:sym typeface="+mn-ea"/>
+            </a:endParaRPr>
+          </a:p>
+          <a:p>
+            <a:pPr>
+              <a:spcAft>
+                <a:spcPts val="800"/>
+              </a:spcAft>
+              <a:defRPr sz="1600">
+                <a:latin typeface="微软雅黑" panose="020B0503020204020204" charset="-122"/>
+              </a:defRPr>
+            </a:pPr>
+            <a:r>
+              <a:rPr>
+                <a:sym typeface="+mn-ea"/>
+              </a:rPr>
+              <a:t>2. 跑 FullyConnectedNets.ipynb：多层网络、Dropout、BatchNorm</a:t>
+            </a:r>
+            <a:endParaRPr>
+              <a:sym typeface="+mn-ea"/>
+            </a:endParaRPr>
+          </a:p>
+          <a:p>
+            <a:pPr>
+              <a:spcAft>
+                <a:spcPts val="800"/>
+              </a:spcAft>
+              <a:defRPr sz="1600">
+                <a:latin typeface="微软雅黑" panose="020B0503020204020204" charset="-122"/>
+              </a:defRPr>
+            </a:pPr>
+            <a:r>
+              <a:rPr>
+                <a:sym typeface="+mn-ea"/>
+              </a:rPr>
+              <a:t>3. 扩大 TwoLayerNet epoch 与更细调参</a:t>
+            </a:r>
+            <a:endParaRPr>
+              <a:sym typeface="+mn-ea"/>
+            </a:endParaRPr>
+          </a:p>
+          <a:p>
+            <a:pPr>
+              <a:spcAft>
+                <a:spcPts val="800"/>
+              </a:spcAft>
+              <a:defRPr sz="1600">
+                <a:latin typeface="微软雅黑" panose="020B0503020204020204" charset="-122"/>
+              </a:defRPr>
+            </a:pPr>
+            <a:r>
+              <a:rPr>
+                <a:sym typeface="+mn-ea"/>
+              </a:rPr>
+              <a:t>4. 进入 CNN：利用局部感受野和权重共享</a:t>
+            </a:r>
+            <a:endParaRPr lang="zh-CN" altLang="en-US">
+              <a:sym typeface="+mn-ea"/>
+            </a:endParaRPr>
+          </a:p>
+        </p:txBody>
+      </p:sp>
+      <p:sp>
+        <p:nvSpPr>
+          <p:cNvPr id="6" name="TextBox 2"/>
+          <p:cNvSpPr txBox="1"/>
+          <p:nvPr/>
+        </p:nvSpPr>
+        <p:spPr>
+          <a:xfrm>
+            <a:off x="502920" y="3177540"/>
+            <a:ext cx="10424160" cy="502920"/>
+          </a:xfrm>
+          <a:prstGeom prst="rect">
+            <a:avLst/>
+          </a:prstGeom>
+          <a:noFill/>
+        </p:spPr>
+        <p:txBody>
+          <a:bodyPr wrap="none">
+            <a:spAutoFit/>
+          </a:bodyPr>
+          <a:lstStyle/>
+          <a:p>
+            <a:r>
+              <a:rPr sz="2400" b="1">
+                <a:solidFill>
+                  <a:srgbClr val="1E2328"/>
+                </a:solidFill>
+                <a:latin typeface="微软雅黑" panose="020B0503020204020204" charset="-122"/>
+              </a:rPr>
+              <a:t>下一步计划：从 A1 走向更强模型</a:t>
+            </a:r>
+            <a:endParaRPr sz="2400" b="1">
+              <a:solidFill>
+                <a:srgbClr val="1E2328"/>
+              </a:solidFill>
+              <a:latin typeface="微软雅黑" panose="020B0503020204020204" charset="-122"/>
+            </a:endParaRPr>
           </a:p>
         </p:txBody>
       </p:sp>
@@ -3773,7 +4080,7 @@
         <p:spPr>
           <a:xfrm>
             <a:off x="502920" y="256032"/>
-            <a:ext cx="2286000" cy="237744"/>
+            <a:ext cx="2560320" cy="237744"/>
           </a:xfrm>
           <a:prstGeom prst="rect">
             <a:avLst/>
@@ -3793,7 +4100,7 @@
                 </a:solidFill>
                 <a:latin typeface="Microsoft YaHei"/>
               </a:rPr>
-              <a:t>LIMITS</a:t>
+              <a:t>IMAGE FEATURES</a:t>
             </a:r>
           </a:p>
         </p:txBody>
@@ -3807,7 +4114,7 @@
         <p:spPr>
           <a:xfrm>
             <a:off x="502920" y="502920"/>
-            <a:ext cx="10424160" cy="502920"/>
+            <a:ext cx="10698480" cy="502920"/>
           </a:xfrm>
           <a:prstGeom prst="rect">
             <a:avLst/>
@@ -3827,7 +4134,7 @@
                 </a:solidFill>
                 <a:latin typeface="Microsoft YaHei"/>
               </a:rPr>
-              <a:t>当前局限：还没有进入真正强的图像表示</a:t>
+              <a:t>补充实验：HOG + Color Histogram</a:t>
             </a:r>
           </a:p>
         </p:txBody>
@@ -3841,7 +4148,7 @@
         <p:spPr>
           <a:xfrm>
             <a:off x="685800" y="1234440"/>
-            <a:ext cx="10424160" cy="4389120"/>
+            <a:ext cx="4663440" cy="4389120"/>
           </a:xfrm>
           <a:prstGeom prst="rect">
             <a:avLst/>
@@ -3858,12 +4165,12 @@
               <a:spcAft>
                 <a:spcPts val="800"/>
               </a:spcAft>
-              <a:defRPr sz="1600">
+              <a:defRPr sz="1500">
                 <a:latin typeface="Microsoft YaHei"/>
               </a:defRPr>
             </a:pPr>
             <a:r>
-              <a:t>尚未充分跑 HOG / color histogram features</a:t>
+              <a:t>A1 后半部分要求比较 raw pixels 与 higher-level representations</a:t>
             </a:r>
           </a:p>
           <a:p>
@@ -3871,12 +4178,12 @@
               <a:spcAft>
                 <a:spcPts val="800"/>
               </a:spcAft>
-              <a:defRPr sz="1600">
+              <a:defRPr sz="1500">
                 <a:latin typeface="Microsoft YaHei"/>
               </a:defRPr>
             </a:pPr>
             <a:r>
-              <a:t>FullyConnectedNet 的 dropout / batch normalization 还未展开</a:t>
+              <a:t>本次提取 HOG + HSV color histogram，特征维度 154</a:t>
             </a:r>
           </a:p>
           <a:p>
@@ -3884,12 +4191,12 @@
               <a:spcAft>
                 <a:spcPts val="800"/>
               </a:spcAft>
-              <a:defRPr sz="1600">
+              <a:defRPr sz="1500">
                 <a:latin typeface="Microsoft YaHei"/>
               </a:defRPr>
             </a:pPr>
             <a:r>
-              <a:t>测试集使用 1,000 张快速评估，后续可扩到完整 10,000 张</a:t>
+              <a:t>HOG 关注边缘和梯度方向，color histogram 关注颜色分布</a:t>
             </a:r>
           </a:p>
           <a:p>
@@ -3897,16 +4204,40 @@
               <a:spcAft>
                 <a:spcPts val="800"/>
               </a:spcAft>
-              <a:defRPr sz="1600">
+              <a:defRPr sz="1500">
                 <a:latin typeface="Microsoft YaHei"/>
               </a:defRPr>
             </a:pPr>
             <a:r>
-              <a:t>未使用 CNN，因此没有利用图像局部空间结构</a:t>
-            </a:r>
-          </a:p>
-        </p:txBody>
-      </p:sp>
+              <a:t>这一步不是换模型，而是换输入表示</a:t>
+            </a:r>
+          </a:p>
+        </p:txBody>
+      </p:sp>
+      <p:pic>
+        <p:nvPicPr>
+          <p:cNvPr id="5" name="Picture 4" descr="feature_vs_raw_accuracy.png"/>
+          <p:cNvPicPr>
+            <a:picLocks noChangeAspect="1"/>
+          </p:cNvPicPr>
+          <p:nvPr/>
+        </p:nvPicPr>
+        <p:blipFill>
+          <a:blip r:embed="rId2"/>
+          <a:stretch>
+            <a:fillRect/>
+          </a:stretch>
+        </p:blipFill>
+        <p:spPr>
+          <a:xfrm>
+            <a:off x="5577840" y="1097280"/>
+            <a:ext cx="5852160" cy="4023360"/>
+          </a:xfrm>
+          <a:prstGeom prst="rect">
+            <a:avLst/>
+          </a:prstGeom>
+        </p:spPr>
+      </p:pic>
     </p:spTree>
   </p:cSld>
   <p:clrMapOvr>
@@ -3942,7 +4273,7 @@
         <p:spPr>
           <a:xfrm>
             <a:off x="502920" y="256032"/>
-            <a:ext cx="2286000" cy="237744"/>
+            <a:ext cx="2560320" cy="237744"/>
           </a:xfrm>
           <a:prstGeom prst="rect">
             <a:avLst/>
@@ -3962,7 +4293,7 @@
                 </a:solidFill>
                 <a:latin typeface="Microsoft YaHei"/>
               </a:rPr>
-              <a:t>NEXT</a:t>
+              <a:t>FEATURE TUNING</a:t>
             </a:r>
           </a:p>
         </p:txBody>
@@ -3976,7 +4307,7 @@
         <p:spPr>
           <a:xfrm>
             <a:off x="502920" y="502920"/>
-            <a:ext cx="10424160" cy="502920"/>
+            <a:ext cx="10698480" cy="502920"/>
           </a:xfrm>
           <a:prstGeom prst="rect">
             <a:avLst/>
@@ -3996,21 +4327,69 @@
                 </a:solidFill>
                 <a:latin typeface="Microsoft YaHei"/>
               </a:rPr>
-              <a:t>下一步计划：从 A1 走向更强模型</a:t>
-            </a:r>
-          </a:p>
-        </p:txBody>
-      </p:sp>
-      <p:sp>
-        <p:nvSpPr>
-          <p:cNvPr id="4" name="TextBox 3"/>
+              <a:t>特征版模型调参结果</a:t>
+            </a:r>
+          </a:p>
+        </p:txBody>
+      </p:sp>
+      <p:pic>
+        <p:nvPicPr>
+          <p:cNvPr id="4" name="Picture 3" descr="features_softmax_hyperparam_heatmap.png"/>
+          <p:cNvPicPr>
+            <a:picLocks noChangeAspect="1"/>
+          </p:cNvPicPr>
+          <p:nvPr/>
+        </p:nvPicPr>
+        <p:blipFill>
+          <a:blip r:embed="rId2"/>
+          <a:stretch>
+            <a:fillRect/>
+          </a:stretch>
+        </p:blipFill>
+        <p:spPr>
+          <a:xfrm>
+            <a:off x="594360" y="1051560"/>
+            <a:ext cx="5303520" cy="3840480"/>
+          </a:xfrm>
+          <a:prstGeom prst="rect">
+            <a:avLst/>
+          </a:prstGeom>
+        </p:spPr>
+      </p:pic>
+      <p:pic>
+        <p:nvPicPr>
+          <p:cNvPr id="5" name="Picture 4" descr="features_twolayer_config_comparison.png"/>
+          <p:cNvPicPr>
+            <a:picLocks noChangeAspect="1"/>
+          </p:cNvPicPr>
+          <p:nvPr/>
+        </p:nvPicPr>
+        <p:blipFill>
+          <a:blip r:embed="rId3"/>
+          <a:stretch>
+            <a:fillRect/>
+          </a:stretch>
+        </p:blipFill>
+        <p:spPr>
+          <a:xfrm>
+            <a:off x="6080760" y="1051560"/>
+            <a:ext cx="5486400" cy="3840480"/>
+          </a:xfrm>
+          <a:prstGeom prst="rect">
+            <a:avLst/>
+          </a:prstGeom>
+        </p:spPr>
+      </p:pic>
+      <p:sp>
+        <p:nvSpPr>
+          <p:cNvPr id="6" name="TextBox 5"/>
           <p:cNvSpPr txBox="1"/>
           <p:nvPr/>
         </p:nvSpPr>
         <p:spPr>
           <a:xfrm>
-            <a:off x="685800" y="1234440"/>
-            <a:ext cx="10424160" cy="4389120"/>
+            <a:off x="685800" y="5577840"/>
+            <a:ext cx="10515600" cy="365760"/>
           </a:xfrm>
           <a:prstGeom prst="rect">
             <a:avLst/>
@@ -4023,55 +4402,14 @@
           </a:bodyPr>
           <a:lstStyle/>
           <a:p>
-            <a:pPr>
-              <a:spcAft>
-                <a:spcPts val="800"/>
-              </a:spcAft>
-              <a:defRPr sz="1600">
+            <a:r>
+              <a:rPr sz="1800" b="1">
+                <a:solidFill>
+                  <a:srgbClr val="4F8968"/>
+                </a:solidFill>
                 <a:latin typeface="Microsoft YaHei"/>
-              </a:defRPr>
-            </a:pPr>
-            <a:r>
-              <a:t>1. 跑 features.ipynb：HOG + color histogram</a:t>
-            </a:r>
-          </a:p>
-          <a:p>
-            <a:pPr>
-              <a:spcAft>
-                <a:spcPts val="800"/>
-              </a:spcAft>
-              <a:defRPr sz="1600">
-                <a:latin typeface="Microsoft YaHei"/>
-              </a:defRPr>
-            </a:pPr>
-            <a:r>
-              <a:t>2. 跑 FullyConnectedNets.ipynb：多层网络、Dropout、BatchNorm</a:t>
-            </a:r>
-          </a:p>
-          <a:p>
-            <a:pPr>
-              <a:spcAft>
-                <a:spcPts val="800"/>
-              </a:spcAft>
-              <a:defRPr sz="1600">
-                <a:latin typeface="Microsoft YaHei"/>
-              </a:defRPr>
-            </a:pPr>
-            <a:r>
-              <a:t>3. 扩大 TwoLayerNet epoch 与更细调参</a:t>
-            </a:r>
-          </a:p>
-          <a:p>
-            <a:pPr>
-              <a:spcAft>
-                <a:spcPts val="800"/>
-              </a:spcAft>
-              <a:defRPr sz="1600">
-                <a:latin typeface="Microsoft YaHei"/>
-              </a:defRPr>
-            </a:pPr>
-            <a:r>
-              <a:t>4. 进入 CNN：利用局部感受野和权重共享</a:t>
+              </a:rPr>
+              <a:t>Best feature TwoLayerNet: val=0.605, test=0.576</a:t>
             </a:r>
           </a:p>
         </p:txBody>
@@ -4084,7 +4422,7 @@
 </p:sld>
 </file>
 
-<file path=ppt/slides/slide2.xml><?xml version="1.0" encoding="utf-8"?>
+<file path=ppt/slides/slide15.xml><?xml version="1.0" encoding="utf-8"?>
 <p:sld xmlns:a="http://schemas.openxmlformats.org/drawingml/2006/main" xmlns:p="http://schemas.openxmlformats.org/presentationml/2006/main" xmlns:r="http://schemas.openxmlformats.org/officeDocument/2006/relationships">
   <p:cSld>
     <p:bg>
@@ -4111,7 +4449,7 @@
         <p:spPr>
           <a:xfrm>
             <a:off x="502920" y="256032"/>
-            <a:ext cx="2286000" cy="237744"/>
+            <a:ext cx="2560320" cy="237744"/>
           </a:xfrm>
           <a:prstGeom prst="rect">
             <a:avLst/>
@@ -4131,7 +4469,7 @@
                 </a:solidFill>
                 <a:latin typeface="Microsoft YaHei"/>
               </a:rPr>
-              <a:t>BACKGROUND</a:t>
+              <a:t>UPDATED CONCLUSION</a:t>
             </a:r>
           </a:p>
         </p:txBody>
@@ -4145,7 +4483,7 @@
         <p:spPr>
           <a:xfrm>
             <a:off x="502920" y="502920"/>
-            <a:ext cx="10424160" cy="502920"/>
+            <a:ext cx="10698480" cy="502920"/>
           </a:xfrm>
           <a:prstGeom prst="rect">
             <a:avLst/>
@@ -4165,7 +4503,7 @@
                 </a:solidFill>
                 <a:latin typeface="Microsoft YaHei"/>
               </a:rPr>
-              <a:t>任务背景：从图像分类 pipeline 进入神经网络</a:t>
+              <a:t>更新后的 Week5 结论</a:t>
             </a:r>
           </a:p>
         </p:txBody>
@@ -4178,8 +4516,8 @@
         </p:nvSpPr>
         <p:spPr>
           <a:xfrm>
-            <a:off x="685800" y="1234440"/>
-            <a:ext cx="10515600" cy="4389120"/>
+            <a:off x="731520" y="1234440"/>
+            <a:ext cx="10424160" cy="4389120"/>
           </a:xfrm>
           <a:prstGeom prst="rect">
             <a:avLst/>
@@ -4196,12 +4534,12 @@
               <a:spcAft>
                 <a:spcPts val="800"/>
               </a:spcAft>
-              <a:defRPr sz="1600">
+              <a:defRPr sz="1800">
                 <a:latin typeface="Microsoft YaHei"/>
               </a:defRPr>
             </a:pPr>
             <a:r>
-              <a:t>CS231n A1 关注图像分类的完整工程链路</a:t>
+              <a:t>Softmax: raw pixels 0.359 -&gt; features 0.420</a:t>
             </a:r>
           </a:p>
           <a:p>
@@ -4209,12 +4547,12 @@
               <a:spcAft>
                 <a:spcPts val="800"/>
               </a:spcAft>
-              <a:defRPr sz="1600">
+              <a:defRPr sz="1800">
                 <a:latin typeface="Microsoft YaHei"/>
               </a:defRPr>
             </a:pPr>
             <a:r>
-              <a:t>从 kNN 到 Softmax，再到两层神经网络</a:t>
+              <a:t>TwoLayerNet: raw pixels 0.493 -&gt; features 0.576</a:t>
             </a:r>
           </a:p>
           <a:p>
@@ -4222,12 +4560,12 @@
               <a:spcAft>
                 <a:spcPts val="800"/>
               </a:spcAft>
-              <a:defRPr sz="1600">
+              <a:defRPr sz="1800">
                 <a:latin typeface="Microsoft YaHei"/>
               </a:defRPr>
             </a:pPr>
             <a:r>
-              <a:t>核心学习点：数据划分、loss、gradient、regularization、hyperparameter tuning</a:t>
+              <a:t>手工图像特征能显著提升传统分类器，因为它更接近边缘、颜色、轮廓等视觉语义</a:t>
             </a:r>
           </a:p>
           <a:p>
@@ -4235,12 +4573,12 @@
               <a:spcAft>
                 <a:spcPts val="800"/>
               </a:spcAft>
-              <a:defRPr sz="1600">
+              <a:defRPr sz="1800">
                 <a:latin typeface="Microsoft YaHei"/>
               </a:defRPr>
             </a:pPr>
             <a:r>
-              <a:t>本实验不是提交作业，而是本地复现与组会汇报</a:t>
+              <a:t>CNN 后续要学习的事情，本质上就是自动学习比 HOG 更强的局部图像特征</a:t>
             </a:r>
           </a:p>
         </p:txBody>
@@ -4253,8 +4591,8 @@
 </p:sld>
 </file>
 
-<file path=ppt/slides/slide3.xml><?xml version="1.0" encoding="utf-8"?>
-<p:sld xmlns:a="http://schemas.openxmlformats.org/drawingml/2006/main" xmlns:p="http://schemas.openxmlformats.org/presentationml/2006/main" xmlns:r="http://schemas.openxmlformats.org/officeDocument/2006/relationships">
+<file path=ppt/slides/slide2.xml><?xml version="1.0" encoding="utf-8"?>
+<p:sld xmlns:a="http://schemas.openxmlformats.org/drawingml/2006/main" xmlns:r="http://schemas.openxmlformats.org/officeDocument/2006/relationships" xmlns:p="http://schemas.openxmlformats.org/presentationml/2006/main">
   <p:cSld>
     <p:bg>
       <p:bgPr>
@@ -4298,10 +4636,16 @@
                 <a:solidFill>
                   <a:srgbClr val="5F6F82"/>
                 </a:solidFill>
-                <a:latin typeface="Microsoft YaHei"/>
+                <a:latin typeface="微软雅黑" panose="020B0503020204020204" charset="-122"/>
               </a:rPr>
               <a:t>DATASET</a:t>
             </a:r>
+            <a:endParaRPr sz="900" b="1">
+              <a:solidFill>
+                <a:srgbClr val="5F6F82"/>
+              </a:solidFill>
+              <a:latin typeface="微软雅黑" panose="020B0503020204020204" charset="-122"/>
+            </a:endParaRPr>
           </a:p>
         </p:txBody>
       </p:sp>
@@ -4332,10 +4676,16 @@
                 <a:solidFill>
                   <a:srgbClr val="1E2328"/>
                 </a:solidFill>
-                <a:latin typeface="Microsoft YaHei"/>
+                <a:latin typeface="微软雅黑" panose="020B0503020204020204" charset="-122"/>
               </a:rPr>
               <a:t>CIFAR-10：10 类 32×32 彩色图像</a:t>
             </a:r>
+            <a:endParaRPr sz="2400" b="1">
+              <a:solidFill>
+                <a:srgbClr val="1E2328"/>
+              </a:solidFill>
+              <a:latin typeface="微软雅黑" panose="020B0503020204020204" charset="-122"/>
+            </a:endParaRPr>
           </a:p>
         </p:txBody>
       </p:sp>
@@ -4366,7 +4716,7 @@
                 <a:spcPts val="800"/>
               </a:spcAft>
               <a:defRPr sz="1600">
-                <a:latin typeface="Microsoft YaHei"/>
+                <a:latin typeface="微软雅黑" panose="020B0503020204020204" charset="-122"/>
               </a:defRPr>
             </a:pPr>
             <a:r>
@@ -4379,7 +4729,7 @@
                 <a:spcPts val="800"/>
               </a:spcAft>
               <a:defRPr sz="1600">
-                <a:latin typeface="Microsoft YaHei"/>
+                <a:latin typeface="微软雅黑" panose="020B0503020204020204" charset="-122"/>
               </a:defRPr>
             </a:pPr>
             <a:r>
@@ -4392,7 +4742,7 @@
                 <a:spcPts val="800"/>
               </a:spcAft>
               <a:defRPr sz="1600">
-                <a:latin typeface="Microsoft YaHei"/>
+                <a:latin typeface="微软雅黑" panose="020B0503020204020204" charset="-122"/>
               </a:defRPr>
             </a:pPr>
             <a:r>
@@ -4405,7 +4755,7 @@
                 <a:spcPts val="800"/>
               </a:spcAft>
               <a:defRPr sz="1600">
-                <a:latin typeface="Microsoft YaHei"/>
+                <a:latin typeface="微软雅黑" panose="020B0503020204020204" charset="-122"/>
               </a:defRPr>
             </a:pPr>
             <a:r>
@@ -4423,7 +4773,7 @@
           <p:nvPr/>
         </p:nvPicPr>
         <p:blipFill>
-          <a:blip r:embed="rId2"/>
+          <a:blip r:embed="rId1"/>
           <a:stretch>
             <a:fillRect/>
           </a:stretch>
@@ -4446,8 +4796,8 @@
 </p:sld>
 </file>
 
-<file path=ppt/slides/slide4.xml><?xml version="1.0" encoding="utf-8"?>
-<p:sld xmlns:a="http://schemas.openxmlformats.org/drawingml/2006/main" xmlns:p="http://schemas.openxmlformats.org/presentationml/2006/main" xmlns:r="http://schemas.openxmlformats.org/officeDocument/2006/relationships">
+<file path=ppt/slides/slide3.xml><?xml version="1.0" encoding="utf-8"?>
+<p:sld xmlns:a="http://schemas.openxmlformats.org/drawingml/2006/main" xmlns:r="http://schemas.openxmlformats.org/officeDocument/2006/relationships" xmlns:p="http://schemas.openxmlformats.org/presentationml/2006/main">
   <p:cSld>
     <p:bg>
       <p:bgPr>
@@ -4491,10 +4841,16 @@
                 <a:solidFill>
                   <a:srgbClr val="5F6F82"/>
                 </a:solidFill>
-                <a:latin typeface="Microsoft YaHei"/>
+                <a:latin typeface="微软雅黑" panose="020B0503020204020204" charset="-122"/>
               </a:rPr>
               <a:t>WORKFLOW</a:t>
             </a:r>
+            <a:endParaRPr sz="900" b="1">
+              <a:solidFill>
+                <a:srgbClr val="5F6F82"/>
+              </a:solidFill>
+              <a:latin typeface="微软雅黑" panose="020B0503020204020204" charset="-122"/>
+            </a:endParaRPr>
           </a:p>
         </p:txBody>
       </p:sp>
@@ -4525,10 +4881,16 @@
                 <a:solidFill>
                   <a:srgbClr val="1E2328"/>
                 </a:solidFill>
-                <a:latin typeface="Microsoft YaHei"/>
+                <a:latin typeface="微软雅黑" panose="020B0503020204020204" charset="-122"/>
               </a:rPr>
               <a:t>实验流程：训练、调参、验证、测试与可视化</a:t>
             </a:r>
+            <a:endParaRPr sz="2400" b="1">
+              <a:solidFill>
+                <a:srgbClr val="1E2328"/>
+              </a:solidFill>
+              <a:latin typeface="微软雅黑" panose="020B0503020204020204" charset="-122"/>
+            </a:endParaRPr>
           </a:p>
         </p:txBody>
       </p:sp>
@@ -4541,7 +4903,7 @@
         <p:spPr>
           <a:xfrm>
             <a:off x="685800" y="1234440"/>
-            <a:ext cx="10515600" cy="4389120"/>
+            <a:ext cx="4009390" cy="1732915"/>
           </a:xfrm>
           <a:prstGeom prst="rect">
             <a:avLst/>
@@ -4559,7 +4921,7 @@
                 <a:spcPts val="800"/>
               </a:spcAft>
               <a:defRPr sz="1600">
-                <a:latin typeface="Microsoft YaHei"/>
+                <a:latin typeface="微软雅黑" panose="020B0503020204020204" charset="-122"/>
               </a:defRPr>
             </a:pPr>
             <a:r>
@@ -4572,7 +4934,7 @@
                 <a:spcPts val="800"/>
               </a:spcAft>
               <a:defRPr sz="1600">
-                <a:latin typeface="Microsoft YaHei"/>
+                <a:latin typeface="微软雅黑" panose="020B0503020204020204" charset="-122"/>
               </a:defRPr>
             </a:pPr>
             <a:r>
@@ -4585,7 +4947,7 @@
                 <a:spcPts val="800"/>
               </a:spcAft>
               <a:defRPr sz="1600">
-                <a:latin typeface="Microsoft YaHei"/>
+                <a:latin typeface="微软雅黑" panose="020B0503020204020204" charset="-122"/>
               </a:defRPr>
             </a:pPr>
             <a:r>
@@ -4598,7 +4960,7 @@
                 <a:spcPts val="800"/>
               </a:spcAft>
               <a:defRPr sz="1600">
-                <a:latin typeface="Microsoft YaHei"/>
+                <a:latin typeface="微软雅黑" panose="020B0503020204020204" charset="-122"/>
               </a:defRPr>
             </a:pPr>
             <a:r>
@@ -4611,12 +4973,9 @@
                 <a:spcPts val="800"/>
               </a:spcAft>
               <a:defRPr sz="1600">
-                <a:latin typeface="Microsoft YaHei"/>
+                <a:latin typeface="微软雅黑" panose="020B0503020204020204" charset="-122"/>
               </a:defRPr>
             </a:pPr>
-            <a:r>
-              <a:t>5. 汇总 JSON、Markdown 报告、PNG 图表和 PPT</a:t>
-            </a:r>
           </a:p>
         </p:txBody>
       </p:sp>
@@ -4628,8 +4987,8 @@
 </p:sld>
 </file>
 
-<file path=ppt/slides/slide5.xml><?xml version="1.0" encoding="utf-8"?>
-<p:sld xmlns:a="http://schemas.openxmlformats.org/drawingml/2006/main" xmlns:p="http://schemas.openxmlformats.org/presentationml/2006/main" xmlns:r="http://schemas.openxmlformats.org/officeDocument/2006/relationships">
+<file path=ppt/slides/slide4.xml><?xml version="1.0" encoding="utf-8"?>
+<p:sld xmlns:a="http://schemas.openxmlformats.org/drawingml/2006/main" xmlns:r="http://schemas.openxmlformats.org/officeDocument/2006/relationships" xmlns:p="http://schemas.openxmlformats.org/presentationml/2006/main">
   <p:cSld>
     <p:bg>
       <p:bgPr>
@@ -4673,10 +5032,16 @@
                 <a:solidFill>
                   <a:srgbClr val="5F6F82"/>
                 </a:solidFill>
-                <a:latin typeface="Microsoft YaHei"/>
+                <a:latin typeface="微软雅黑" panose="020B0503020204020204" charset="-122"/>
               </a:rPr>
               <a:t>KNN</a:t>
             </a:r>
+            <a:endParaRPr sz="900" b="1">
+              <a:solidFill>
+                <a:srgbClr val="5F6F82"/>
+              </a:solidFill>
+              <a:latin typeface="微软雅黑" panose="020B0503020204020204" charset="-122"/>
+            </a:endParaRPr>
           </a:p>
         </p:txBody>
       </p:sp>
@@ -4707,10 +5072,16 @@
                 <a:solidFill>
                   <a:srgbClr val="1E2328"/>
                 </a:solidFill>
-                <a:latin typeface="Microsoft YaHei"/>
+                <a:latin typeface="微软雅黑" panose="020B0503020204020204" charset="-122"/>
               </a:rPr>
               <a:t>kNN：简单但被原始像素距离限制</a:t>
             </a:r>
+            <a:endParaRPr sz="2400" b="1">
+              <a:solidFill>
+                <a:srgbClr val="1E2328"/>
+              </a:solidFill>
+              <a:latin typeface="微软雅黑" panose="020B0503020204020204" charset="-122"/>
+            </a:endParaRPr>
           </a:p>
         </p:txBody>
       </p:sp>
@@ -4741,7 +5112,7 @@
                 <a:spcPts val="800"/>
               </a:spcAft>
               <a:defRPr sz="1600">
-                <a:latin typeface="Microsoft YaHei"/>
+                <a:latin typeface="微软雅黑" panose="020B0503020204020204" charset="-122"/>
               </a:defRPr>
             </a:pPr>
             <a:r>
@@ -4754,7 +5125,7 @@
                 <a:spcPts val="800"/>
               </a:spcAft>
               <a:defRPr sz="1600">
-                <a:latin typeface="Microsoft YaHei"/>
+                <a:latin typeface="微软雅黑" panose="020B0503020204020204" charset="-122"/>
               </a:defRPr>
             </a:pPr>
             <a:r>
@@ -4767,7 +5138,7 @@
                 <a:spcPts val="800"/>
               </a:spcAft>
               <a:defRPr sz="1600">
-                <a:latin typeface="Microsoft YaHei"/>
+                <a:latin typeface="微软雅黑" panose="020B0503020204020204" charset="-122"/>
               </a:defRPr>
             </a:pPr>
             <a:r>
@@ -4780,7 +5151,7 @@
                 <a:spcPts val="800"/>
               </a:spcAft>
               <a:defRPr sz="1600">
-                <a:latin typeface="Microsoft YaHei"/>
+                <a:latin typeface="微软雅黑" panose="020B0503020204020204" charset="-122"/>
               </a:defRPr>
             </a:pPr>
             <a:r>
@@ -4798,7 +5169,7 @@
           <p:nvPr/>
         </p:nvPicPr>
         <p:blipFill>
-          <a:blip r:embed="rId2"/>
+          <a:blip r:embed="rId1"/>
           <a:stretch>
             <a:fillRect/>
           </a:stretch>
@@ -4821,8 +5192,8 @@
 </p:sld>
 </file>
 
-<file path=ppt/slides/slide6.xml><?xml version="1.0" encoding="utf-8"?>
-<p:sld xmlns:a="http://schemas.openxmlformats.org/drawingml/2006/main" xmlns:p="http://schemas.openxmlformats.org/presentationml/2006/main" xmlns:r="http://schemas.openxmlformats.org/officeDocument/2006/relationships">
+<file path=ppt/slides/slide5.xml><?xml version="1.0" encoding="utf-8"?>
+<p:sld xmlns:a="http://schemas.openxmlformats.org/drawingml/2006/main" xmlns:r="http://schemas.openxmlformats.org/officeDocument/2006/relationships" xmlns:p="http://schemas.openxmlformats.org/presentationml/2006/main">
   <p:cSld>
     <p:bg>
       <p:bgPr>
@@ -4866,10 +5237,16 @@
                 <a:solidFill>
                   <a:srgbClr val="5F6F82"/>
                 </a:solidFill>
-                <a:latin typeface="Microsoft YaHei"/>
+                <a:latin typeface="微软雅黑" panose="020B0503020204020204" charset="-122"/>
               </a:rPr>
               <a:t>SOFTMAX</a:t>
             </a:r>
+            <a:endParaRPr sz="900" b="1">
+              <a:solidFill>
+                <a:srgbClr val="5F6F82"/>
+              </a:solidFill>
+              <a:latin typeface="微软雅黑" panose="020B0503020204020204" charset="-122"/>
+            </a:endParaRPr>
           </a:p>
         </p:txBody>
       </p:sp>
@@ -4900,10 +5277,16 @@
                 <a:solidFill>
                   <a:srgbClr val="1E2328"/>
                 </a:solidFill>
-                <a:latin typeface="Microsoft YaHei"/>
+                <a:latin typeface="微软雅黑" panose="020B0503020204020204" charset="-122"/>
               </a:rPr>
               <a:t>Softmax：线性分类器受益于调参和更多数据</a:t>
             </a:r>
+            <a:endParaRPr sz="2400" b="1">
+              <a:solidFill>
+                <a:srgbClr val="1E2328"/>
+              </a:solidFill>
+              <a:latin typeface="微软雅黑" panose="020B0503020204020204" charset="-122"/>
+            </a:endParaRPr>
           </a:p>
         </p:txBody>
       </p:sp>
@@ -4934,7 +5317,7 @@
                 <a:spcPts val="800"/>
               </a:spcAft>
               <a:defRPr sz="1600">
-                <a:latin typeface="Microsoft YaHei"/>
+                <a:latin typeface="微软雅黑" panose="020B0503020204020204" charset="-122"/>
               </a:defRPr>
             </a:pPr>
             <a:r>
@@ -4947,7 +5330,7 @@
                 <a:spcPts val="800"/>
               </a:spcAft>
               <a:defRPr sz="1600">
-                <a:latin typeface="Microsoft YaHei"/>
+                <a:latin typeface="微软雅黑" panose="020B0503020204020204" charset="-122"/>
               </a:defRPr>
             </a:pPr>
             <a:r>
@@ -4960,7 +5343,7 @@
                 <a:spcPts val="800"/>
               </a:spcAft>
               <a:defRPr sz="1600">
-                <a:latin typeface="Microsoft YaHei"/>
+                <a:latin typeface="微软雅黑" panose="020B0503020204020204" charset="-122"/>
               </a:defRPr>
             </a:pPr>
             <a:r>
@@ -4973,7 +5356,7 @@
                 <a:spcPts val="800"/>
               </a:spcAft>
               <a:defRPr sz="1600">
-                <a:latin typeface="Microsoft YaHei"/>
+                <a:latin typeface="微软雅黑" panose="020B0503020204020204" charset="-122"/>
               </a:defRPr>
             </a:pPr>
             <a:r>
@@ -4991,7 +5374,7 @@
           <p:nvPr/>
         </p:nvPicPr>
         <p:blipFill>
-          <a:blip r:embed="rId2"/>
+          <a:blip r:embed="rId1"/>
           <a:stretch>
             <a:fillRect/>
           </a:stretch>
@@ -5014,8 +5397,8 @@
 </p:sld>
 </file>
 
-<file path=ppt/slides/slide7.xml><?xml version="1.0" encoding="utf-8"?>
-<p:sld xmlns:a="http://schemas.openxmlformats.org/drawingml/2006/main" xmlns:p="http://schemas.openxmlformats.org/presentationml/2006/main" xmlns:r="http://schemas.openxmlformats.org/officeDocument/2006/relationships">
+<file path=ppt/slides/slide6.xml><?xml version="1.0" encoding="utf-8"?>
+<p:sld xmlns:a="http://schemas.openxmlformats.org/drawingml/2006/main" xmlns:r="http://schemas.openxmlformats.org/officeDocument/2006/relationships" xmlns:p="http://schemas.openxmlformats.org/presentationml/2006/main">
   <p:cSld>
     <p:bg>
       <p:bgPr>
@@ -5059,10 +5442,16 @@
                 <a:solidFill>
                   <a:srgbClr val="5F6F82"/>
                 </a:solidFill>
-                <a:latin typeface="Microsoft YaHei"/>
+                <a:latin typeface="微软雅黑" panose="020B0503020204020204" charset="-122"/>
               </a:rPr>
               <a:t>TWO-LAYER NET</a:t>
             </a:r>
+            <a:endParaRPr sz="900" b="1">
+              <a:solidFill>
+                <a:srgbClr val="5F6F82"/>
+              </a:solidFill>
+              <a:latin typeface="微软雅黑" panose="020B0503020204020204" charset="-122"/>
+            </a:endParaRPr>
           </a:p>
         </p:txBody>
       </p:sp>
@@ -5093,10 +5482,16 @@
                 <a:solidFill>
                   <a:srgbClr val="1E2328"/>
                 </a:solidFill>
-                <a:latin typeface="Microsoft YaHei"/>
+                <a:latin typeface="微软雅黑" panose="020B0503020204020204" charset="-122"/>
               </a:rPr>
               <a:t>TwoLayerNet：非线性隐藏层带来明显提升</a:t>
             </a:r>
+            <a:endParaRPr sz="2400" b="1">
+              <a:solidFill>
+                <a:srgbClr val="1E2328"/>
+              </a:solidFill>
+              <a:latin typeface="微软雅黑" panose="020B0503020204020204" charset="-122"/>
+            </a:endParaRPr>
           </a:p>
         </p:txBody>
       </p:sp>
@@ -5127,7 +5522,7 @@
                 <a:spcPts val="800"/>
               </a:spcAft>
               <a:defRPr sz="1400">
-                <a:latin typeface="Microsoft YaHei"/>
+                <a:latin typeface="微软雅黑" panose="020B0503020204020204" charset="-122"/>
               </a:defRPr>
             </a:pPr>
             <a:r>
@@ -5140,7 +5535,7 @@
                 <a:spcPts val="800"/>
               </a:spcAft>
               <a:defRPr sz="1400">
-                <a:latin typeface="Microsoft YaHei"/>
+                <a:latin typeface="微软雅黑" panose="020B0503020204020204" charset="-122"/>
               </a:defRPr>
             </a:pPr>
             <a:r>
@@ -5153,7 +5548,7 @@
                 <a:spcPts val="800"/>
               </a:spcAft>
               <a:defRPr sz="1400">
-                <a:latin typeface="Microsoft YaHei"/>
+                <a:latin typeface="微软雅黑" panose="020B0503020204020204" charset="-122"/>
               </a:defRPr>
             </a:pPr>
             <a:r>
@@ -5166,7 +5561,7 @@
                 <a:spcPts val="800"/>
               </a:spcAft>
               <a:defRPr sz="1400">
-                <a:latin typeface="Microsoft YaHei"/>
+                <a:latin typeface="微软雅黑" panose="020B0503020204020204" charset="-122"/>
               </a:defRPr>
             </a:pPr>
             <a:r>
@@ -5184,15 +5579,15 @@
           <p:nvPr/>
         </p:nvPicPr>
         <p:blipFill>
-          <a:blip r:embed="rId2"/>
+          <a:blip r:embed="rId1"/>
           <a:stretch>
             <a:fillRect/>
           </a:stretch>
         </p:blipFill>
         <p:spPr>
           <a:xfrm>
-            <a:off x="4709160" y="1005840"/>
-            <a:ext cx="7040880" cy="4480560"/>
+            <a:off x="5099050" y="1253490"/>
+            <a:ext cx="6650990" cy="4232910"/>
           </a:xfrm>
           <a:prstGeom prst="rect">
             <a:avLst/>
@@ -5207,8 +5602,8 @@
 </p:sld>
 </file>
 
-<file path=ppt/slides/slide8.xml><?xml version="1.0" encoding="utf-8"?>
-<p:sld xmlns:a="http://schemas.openxmlformats.org/drawingml/2006/main" xmlns:p="http://schemas.openxmlformats.org/presentationml/2006/main" xmlns:r="http://schemas.openxmlformats.org/officeDocument/2006/relationships">
+<file path=ppt/slides/slide7.xml><?xml version="1.0" encoding="utf-8"?>
+<p:sld xmlns:a="http://schemas.openxmlformats.org/drawingml/2006/main" xmlns:r="http://schemas.openxmlformats.org/officeDocument/2006/relationships" xmlns:p="http://schemas.openxmlformats.org/presentationml/2006/main">
   <p:cSld>
     <p:bg>
       <p:bgPr>
@@ -5252,10 +5647,16 @@
                 <a:solidFill>
                   <a:srgbClr val="5F6F82"/>
                 </a:solidFill>
-                <a:latin typeface="Microsoft YaHei"/>
+                <a:latin typeface="微软雅黑" panose="020B0503020204020204" charset="-122"/>
               </a:rPr>
               <a:t>COMPARISON</a:t>
             </a:r>
+            <a:endParaRPr sz="900" b="1">
+              <a:solidFill>
+                <a:srgbClr val="5F6F82"/>
+              </a:solidFill>
+              <a:latin typeface="微软雅黑" panose="020B0503020204020204" charset="-122"/>
+            </a:endParaRPr>
           </a:p>
         </p:txBody>
       </p:sp>
@@ -5286,10 +5687,16 @@
                 <a:solidFill>
                   <a:srgbClr val="1E2328"/>
                 </a:solidFill>
-                <a:latin typeface="Microsoft YaHei"/>
+                <a:latin typeface="微软雅黑" panose="020B0503020204020204" charset="-122"/>
               </a:rPr>
               <a:t>模型对比：TwoLayerNet 在 raw pixels 上领先</a:t>
             </a:r>
+            <a:endParaRPr sz="2400" b="1">
+              <a:solidFill>
+                <a:srgbClr val="1E2328"/>
+              </a:solidFill>
+              <a:latin typeface="微软雅黑" panose="020B0503020204020204" charset="-122"/>
+            </a:endParaRPr>
           </a:p>
         </p:txBody>
       </p:sp>
@@ -5302,7 +5709,7 @@
           <p:nvPr/>
         </p:nvPicPr>
         <p:blipFill>
-          <a:blip r:embed="rId2"/>
+          <a:blip r:embed="rId1"/>
           <a:stretch>
             <a:fillRect/>
           </a:stretch>
@@ -5325,8 +5732,8 @@
 </p:sld>
 </file>
 
-<file path=ppt/slides/slide9.xml><?xml version="1.0" encoding="utf-8"?>
-<p:sld xmlns:a="http://schemas.openxmlformats.org/drawingml/2006/main" xmlns:p="http://schemas.openxmlformats.org/presentationml/2006/main" xmlns:r="http://schemas.openxmlformats.org/officeDocument/2006/relationships">
+<file path=ppt/slides/slide8.xml><?xml version="1.0" encoding="utf-8"?>
+<p:sld xmlns:a="http://schemas.openxmlformats.org/drawingml/2006/main" xmlns:r="http://schemas.openxmlformats.org/officeDocument/2006/relationships" xmlns:p="http://schemas.openxmlformats.org/presentationml/2006/main">
   <p:cSld>
     <p:bg>
       <p:bgPr>
@@ -5370,10 +5777,16 @@
                 <a:solidFill>
                   <a:srgbClr val="5F6F82"/>
                 </a:solidFill>
-                <a:latin typeface="Microsoft YaHei"/>
+                <a:latin typeface="微软雅黑" panose="020B0503020204020204" charset="-122"/>
               </a:rPr>
               <a:t>SCALE EFFECT</a:t>
             </a:r>
+            <a:endParaRPr sz="900" b="1">
+              <a:solidFill>
+                <a:srgbClr val="5F6F82"/>
+              </a:solidFill>
+              <a:latin typeface="微软雅黑" panose="020B0503020204020204" charset="-122"/>
+            </a:endParaRPr>
           </a:p>
         </p:txBody>
       </p:sp>
@@ -5404,10 +5817,16 @@
                 <a:solidFill>
                   <a:srgbClr val="1E2328"/>
                 </a:solidFill>
-                <a:latin typeface="Microsoft YaHei"/>
+                <a:latin typeface="微软雅黑" panose="020B0503020204020204" charset="-122"/>
               </a:rPr>
               <a:t>数据规模影响：线性与非线性模型更能利用更多数据</a:t>
             </a:r>
+            <a:endParaRPr sz="2400" b="1">
+              <a:solidFill>
+                <a:srgbClr val="1E2328"/>
+              </a:solidFill>
+              <a:latin typeface="微软雅黑" panose="020B0503020204020204" charset="-122"/>
+            </a:endParaRPr>
           </a:p>
         </p:txBody>
       </p:sp>
@@ -5420,7 +5839,7 @@
           <p:nvPr/>
         </p:nvPicPr>
         <p:blipFill>
-          <a:blip r:embed="rId2"/>
+          <a:blip r:embed="rId1"/>
           <a:stretch>
             <a:fillRect/>
           </a:stretch>
@@ -5462,7 +5881,7 @@
                 <a:spcPts val="800"/>
               </a:spcAft>
               <a:defRPr sz="1500">
-                <a:latin typeface="Microsoft YaHei"/>
+                <a:latin typeface="微软雅黑" panose="020B0503020204020204" charset="-122"/>
               </a:defRPr>
             </a:pPr>
             <a:r>
@@ -5475,7 +5894,7 @@
                 <a:spcPts val="800"/>
               </a:spcAft>
               <a:defRPr sz="1500">
-                <a:latin typeface="Microsoft YaHei"/>
+                <a:latin typeface="微软雅黑" panose="020B0503020204020204" charset="-122"/>
               </a:defRPr>
             </a:pPr>
             <a:r>
@@ -5488,7 +5907,7 @@
                 <a:spcPts val="800"/>
               </a:spcAft>
               <a:defRPr sz="1500">
-                <a:latin typeface="Microsoft YaHei"/>
+                <a:latin typeface="微软雅黑" panose="020B0503020204020204" charset="-122"/>
               </a:defRPr>
             </a:pPr>
             <a:r>
@@ -5501,12 +5920,300 @@
                 <a:spcPts val="800"/>
               </a:spcAft>
               <a:defRPr sz="1500">
-                <a:latin typeface="Microsoft YaHei"/>
+                <a:latin typeface="微软雅黑" panose="020B0503020204020204" charset="-122"/>
               </a:defRPr>
             </a:pPr>
             <a:r>
               <a:t>测试集波动不替代验证集选模</a:t>
             </a:r>
+          </a:p>
+        </p:txBody>
+      </p:sp>
+    </p:spTree>
+  </p:cSld>
+  <p:clrMapOvr>
+    <a:masterClrMapping/>
+  </p:clrMapOvr>
+</p:sld>
+</file>
+
+<file path=ppt/slides/slide9.xml><?xml version="1.0" encoding="utf-8"?>
+<p:sld xmlns:a="http://schemas.openxmlformats.org/drawingml/2006/main" xmlns:r="http://schemas.openxmlformats.org/officeDocument/2006/relationships" xmlns:p="http://schemas.openxmlformats.org/presentationml/2006/main">
+  <p:cSld>
+    <p:bg>
+      <p:bgPr>
+        <a:solidFill>
+          <a:srgbClr val="F8F7F4"/>
+        </a:solidFill>
+        <a:effectLst/>
+      </p:bgPr>
+    </p:bg>
+    <p:spTree>
+      <p:nvGrpSpPr>
+        <p:cNvPr id="1" name=""/>
+        <p:cNvGrpSpPr/>
+        <p:nvPr/>
+      </p:nvGrpSpPr>
+      <p:grpSpPr/>
+      <p:sp>
+        <p:nvSpPr>
+          <p:cNvPr id="2" name="TextBox 1"/>
+          <p:cNvSpPr txBox="1"/>
+          <p:nvPr/>
+        </p:nvSpPr>
+        <p:spPr>
+          <a:xfrm>
+            <a:off x="502920" y="256032"/>
+            <a:ext cx="2286000" cy="237744"/>
+          </a:xfrm>
+          <a:prstGeom prst="rect">
+            <a:avLst/>
+          </a:prstGeom>
+          <a:noFill/>
+        </p:spPr>
+        <p:txBody>
+          <a:bodyPr wrap="none">
+            <a:spAutoFit/>
+          </a:bodyPr>
+          <a:lstStyle/>
+          <a:p>
+            <a:r>
+              <a:rPr sz="900" b="1">
+                <a:solidFill>
+                  <a:srgbClr val="5F6F82"/>
+                </a:solidFill>
+                <a:latin typeface="微软雅黑" panose="020B0503020204020204" charset="-122"/>
+              </a:rPr>
+              <a:t>DIAGNOSTICS</a:t>
+            </a:r>
+            <a:endParaRPr sz="900" b="1">
+              <a:solidFill>
+                <a:srgbClr val="5F6F82"/>
+              </a:solidFill>
+              <a:latin typeface="微软雅黑" panose="020B0503020204020204" charset="-122"/>
+            </a:endParaRPr>
+          </a:p>
+        </p:txBody>
+      </p:sp>
+      <p:sp>
+        <p:nvSpPr>
+          <p:cNvPr id="3" name="TextBox 2"/>
+          <p:cNvSpPr txBox="1"/>
+          <p:nvPr/>
+        </p:nvSpPr>
+        <p:spPr>
+          <a:xfrm>
+            <a:off x="502920" y="502920"/>
+            <a:ext cx="10424160" cy="502920"/>
+          </a:xfrm>
+          <a:prstGeom prst="rect">
+            <a:avLst/>
+          </a:prstGeom>
+          <a:noFill/>
+        </p:spPr>
+        <p:txBody>
+          <a:bodyPr wrap="none">
+            <a:spAutoFit/>
+          </a:bodyPr>
+          <a:lstStyle/>
+          <a:p>
+            <a:r>
+              <a:rPr sz="2400" b="1">
+                <a:solidFill>
+                  <a:srgbClr val="1E2328"/>
+                </a:solidFill>
+                <a:latin typeface="微软雅黑" panose="020B0503020204020204" charset="-122"/>
+              </a:rPr>
+              <a:t>诊断图：loss 下降与类别混淆</a:t>
+            </a:r>
+            <a:endParaRPr sz="2400" b="1">
+              <a:solidFill>
+                <a:srgbClr val="1E2328"/>
+              </a:solidFill>
+              <a:latin typeface="微软雅黑" panose="020B0503020204020204" charset="-122"/>
+            </a:endParaRPr>
+          </a:p>
+        </p:txBody>
+      </p:sp>
+      <p:pic>
+        <p:nvPicPr>
+          <p:cNvPr id="4" name="Picture 3" descr="two_layer_loss_curve.png"/>
+          <p:cNvPicPr>
+            <a:picLocks noChangeAspect="1"/>
+          </p:cNvPicPr>
+          <p:nvPr/>
+        </p:nvPicPr>
+        <p:blipFill>
+          <a:blip r:embed="rId1"/>
+          <a:srcRect t="7168" r="-732"/>
+          <a:stretch>
+            <a:fillRect/>
+          </a:stretch>
+        </p:blipFill>
+        <p:spPr>
+          <a:xfrm>
+            <a:off x="685800" y="1219200"/>
+            <a:ext cx="5242560" cy="2804160"/>
+          </a:xfrm>
+          <a:prstGeom prst="rect">
+            <a:avLst/>
+          </a:prstGeom>
+        </p:spPr>
+      </p:pic>
+      <p:pic>
+        <p:nvPicPr>
+          <p:cNvPr id="5" name="Picture 4" descr="confusion_matrix_best_model.png"/>
+          <p:cNvPicPr>
+            <a:picLocks noChangeAspect="1"/>
+          </p:cNvPicPr>
+          <p:nvPr/>
+        </p:nvPicPr>
+        <p:blipFill>
+          <a:blip r:embed="rId2"/>
+          <a:srcRect t="6147" r="-1768"/>
+          <a:stretch>
+            <a:fillRect/>
+          </a:stretch>
+        </p:blipFill>
+        <p:spPr>
+          <a:xfrm>
+            <a:off x="6126480" y="1178560"/>
+            <a:ext cx="5118100" cy="4033520"/>
+          </a:xfrm>
+          <a:prstGeom prst="rect">
+            <a:avLst/>
+          </a:prstGeom>
+        </p:spPr>
+      </p:pic>
+      <p:sp>
+        <p:nvSpPr>
+          <p:cNvPr id="6" name="文本框 5"/>
+          <p:cNvSpPr txBox="1"/>
+          <p:nvPr/>
+        </p:nvSpPr>
+        <p:spPr>
+          <a:xfrm>
+            <a:off x="685800" y="4115435"/>
+            <a:ext cx="4064000" cy="368300"/>
+          </a:xfrm>
+          <a:prstGeom prst="rect">
+            <a:avLst/>
+          </a:prstGeom>
+          <a:noFill/>
+        </p:spPr>
+        <p:txBody>
+          <a:bodyPr wrap="square" rtlCol="0">
+            <a:spAutoFit/>
+          </a:bodyPr>
+          <a:p>
+            <a:r>
+              <a:rPr b="1">
+                <a:solidFill>
+                  <a:srgbClr val="1E2328"/>
+                </a:solidFill>
+                <a:latin typeface="微软雅黑" panose="020B0503020204020204" charset="-122"/>
+                <a:sym typeface="+mn-ea"/>
+              </a:rPr>
+              <a:t>TwoLayerNet</a:t>
+            </a:r>
+            <a:r>
+              <a:rPr lang="en-US" b="1">
+                <a:solidFill>
+                  <a:srgbClr val="1E2328"/>
+                </a:solidFill>
+                <a:latin typeface="微软雅黑" panose="020B0503020204020204" charset="-122"/>
+                <a:sym typeface="+mn-ea"/>
+              </a:rPr>
+              <a:t>-N49000 loss</a:t>
+            </a:r>
+            <a:r>
+              <a:rPr lang="zh-CN" altLang="en-US" b="1">
+                <a:solidFill>
+                  <a:srgbClr val="1E2328"/>
+                </a:solidFill>
+                <a:latin typeface="微软雅黑" panose="020B0503020204020204" charset="-122"/>
+                <a:sym typeface="+mn-ea"/>
+              </a:rPr>
+              <a:t>变化</a:t>
+            </a:r>
+            <a:endParaRPr lang="zh-CN" altLang="en-US" b="1">
+              <a:solidFill>
+                <a:srgbClr val="1E2328"/>
+              </a:solidFill>
+              <a:latin typeface="微软雅黑" panose="020B0503020204020204" charset="-122"/>
+              <a:sym typeface="+mn-ea"/>
+            </a:endParaRPr>
+          </a:p>
+        </p:txBody>
+      </p:sp>
+      <p:sp>
+        <p:nvSpPr>
+          <p:cNvPr id="7" name="文本框 6"/>
+          <p:cNvSpPr txBox="1"/>
+          <p:nvPr/>
+        </p:nvSpPr>
+        <p:spPr>
+          <a:xfrm>
+            <a:off x="6193155" y="5394325"/>
+            <a:ext cx="4064000" cy="368300"/>
+          </a:xfrm>
+          <a:prstGeom prst="rect">
+            <a:avLst/>
+          </a:prstGeom>
+          <a:noFill/>
+        </p:spPr>
+        <p:txBody>
+          <a:bodyPr wrap="square" rtlCol="0">
+            <a:spAutoFit/>
+          </a:bodyPr>
+          <a:p>
+            <a:r>
+              <a:rPr b="1">
+                <a:solidFill>
+                  <a:srgbClr val="1E2328"/>
+                </a:solidFill>
+                <a:latin typeface="微软雅黑" panose="020B0503020204020204" charset="-122"/>
+                <a:sym typeface="+mn-ea"/>
+              </a:rPr>
+              <a:t>TwoLayerNet</a:t>
+            </a:r>
+            <a:r>
+              <a:rPr lang="en-US" b="1">
+                <a:solidFill>
+                  <a:srgbClr val="1E2328"/>
+                </a:solidFill>
+                <a:latin typeface="微软雅黑" panose="020B0503020204020204" charset="-122"/>
+                <a:sym typeface="+mn-ea"/>
+              </a:rPr>
+              <a:t>-1000 </a:t>
+            </a:r>
+            <a:r>
+              <a:rPr lang="zh-CN" altLang="en-US" b="1">
+                <a:solidFill>
+                  <a:srgbClr val="1E2328"/>
+                </a:solidFill>
+                <a:latin typeface="微软雅黑" panose="020B0503020204020204" charset="-122"/>
+                <a:sym typeface="+mn-ea"/>
+              </a:rPr>
+              <a:t>混淆</a:t>
+            </a:r>
+            <a:r>
+              <a:rPr lang="zh-CN" altLang="en-US" b="1">
+                <a:solidFill>
+                  <a:srgbClr val="1E2328"/>
+                </a:solidFill>
+                <a:latin typeface="微软雅黑" panose="020B0503020204020204" charset="-122"/>
+                <a:sym typeface="+mn-ea"/>
+              </a:rPr>
+              <a:t>矩阵</a:t>
+            </a:r>
+            <a:endParaRPr lang="zh-CN" altLang="en-US" b="1">
+              <a:solidFill>
+                <a:srgbClr val="1E2328"/>
+              </a:solidFill>
+              <a:latin typeface="微软雅黑" panose="020B0503020204020204" charset="-122"/>
+              <a:sym typeface="+mn-ea"/>
+            </a:endParaRPr>
           </a:p>
         </p:txBody>
       </p:sp>
@@ -5834,6 +6541,10 @@
       </a:style>
     </a:lnDef>
   </a:objectDefaults>
-  <a:extraClrSchemeLst/>
+  <a:extLst>
+    <a:ext uri="{05A4C25C-085E-4340-85A3-A5531E510DB2}">
+      <thm15:themeFamily xmlns:thm15="http://schemas.microsoft.com/office/thememl/2012/main" name="Office Theme" id="{62F939B6-93AF-4DB8-9C6B-D6C7DFDC589F}" vid="{4A3C46E8-61CC-4603-A589-7422A47A8E4A}"/>
+    </a:ext>
+  </a:extLst>
 </a:theme>
 </file>
--- a/week5task/task07_cs231n_assignment1/results/week5_cs231n_assignment1_report.pptx
+++ b/week5task/task07_cs231n_assignment1/results/week5_cs231n_assignment1_report.pptx
@@ -1,27 +1,27 @@
 
 <file path=ppt/presentation.xml><?xml version="1.0" encoding="utf-8"?>
-<p:presentation xmlns:a="http://schemas.openxmlformats.org/drawingml/2006/main" xmlns:r="http://schemas.openxmlformats.org/officeDocument/2006/relationships" xmlns:p="http://schemas.openxmlformats.org/presentationml/2006/main" autoCompressPictures="0">
+<p:presentation xmlns:a="http://schemas.openxmlformats.org/drawingml/2006/main" xmlns:r="http://schemas.openxmlformats.org/officeDocument/2006/relationships" xmlns:p="http://schemas.openxmlformats.org/presentationml/2006/main" saveSubsetFonts="1" autoCompressPictures="0">
   <p:sldMasterIdLst>
     <p:sldMasterId id="2147483648" r:id="rId1"/>
   </p:sldMasterIdLst>
   <p:sldIdLst>
-    <p:sldId id="256" r:id="rId3"/>
-    <p:sldId id="258" r:id="rId4"/>
-    <p:sldId id="259" r:id="rId5"/>
-    <p:sldId id="260" r:id="rId6"/>
-    <p:sldId id="261" r:id="rId7"/>
-    <p:sldId id="262" r:id="rId8"/>
-    <p:sldId id="263" r:id="rId9"/>
-    <p:sldId id="264" r:id="rId10"/>
-    <p:sldId id="265" r:id="rId11"/>
-    <p:sldId id="266" r:id="rId12"/>
-    <p:sldId id="267" r:id="rId13"/>
-    <p:sldId id="268" r:id="rId14"/>
-    <p:sldId id="269" r:id="rId18"/>
-    <p:sldId id="270" r:id="rId19"/>
-    <p:sldId id="271" r:id="rId20"/>
+    <p:sldId id="256" r:id="rId7"/>
+    <p:sldId id="257" r:id="rId8"/>
+    <p:sldId id="258" r:id="rId9"/>
+    <p:sldId id="259" r:id="rId10"/>
+    <p:sldId id="260" r:id="rId11"/>
+    <p:sldId id="261" r:id="rId12"/>
+    <p:sldId id="262" r:id="rId13"/>
+    <p:sldId id="263" r:id="rId14"/>
+    <p:sldId id="264" r:id="rId15"/>
+    <p:sldId id="265" r:id="rId16"/>
+    <p:sldId id="266" r:id="rId17"/>
+    <p:sldId id="267" r:id="rId18"/>
+    <p:sldId id="268" r:id="rId19"/>
+    <p:sldId id="269" r:id="rId20"/>
+    <p:sldId id="270" r:id="rId21"/>
   </p:sldIdLst>
-  <p:sldSz cx="12191365" cy="6858000" type="screen4x3"/>
+  <p:sldSz cx="12191695" cy="6858000" type="screen4x3"/>
   <p:notesSz cx="6858000" cy="9144000"/>
   <p:defaultTextStyle>
     <a:defPPr>
@@ -118,22 +118,6 @@
       </a:defRPr>
     </a:lvl9pPr>
   </p:defaultTextStyle>
-  <p:extLst>
-    <p:ext uri="{EFAFB233-063F-42B5-8137-9DF3F51BA10A}">
-      <p15:sldGuideLst xmlns:p15="http://schemas.microsoft.com/office/powerpoint/2012/main">
-        <p15:guide id="1" orient="horz" pos="2160" userDrawn="1">
-          <p15:clr>
-            <a:srgbClr val="A4A3A4"/>
-          </p15:clr>
-        </p15:guide>
-        <p15:guide id="2" pos="2880" userDrawn="1">
-          <p15:clr>
-            <a:srgbClr val="A4A3A4"/>
-          </p15:clr>
-        </p15:guide>
-      </p15:sldGuideLst>
-    </p:ext>
-  </p:extLst>
 </p:presentation>
 </file>
 
@@ -318,6 +302,7 @@
           <a:p>
             <a:fld id="{5BCAD085-E8A6-8845-BD4E-CB4CCA059FC4}" type="datetimeFigureOut">
               <a:rPr lang="en-US" smtClean="0"/>
+              <a:t>1/27/13</a:t>
             </a:fld>
             <a:endParaRPr lang="en-US"/>
           </a:p>
@@ -359,12 +344,18 @@
           <a:p>
             <a:fld id="{C1FF6DA9-008F-8B48-92A6-B652298478BF}" type="slidenum">
               <a:rPr lang="en-US" smtClean="0"/>
+              <a:t>‹#›</a:t>
             </a:fld>
             <a:endParaRPr lang="en-US"/>
           </a:p>
         </p:txBody>
       </p:sp>
     </p:spTree>
+    <p:extLst>
+      <p:ext uri="{BB962C8B-B14F-4D97-AF65-F5344CB8AC3E}">
+        <p14:creationId xmlns:p14="http://schemas.microsoft.com/office/powerpoint/2010/main" val="3168075583"/>
+      </p:ext>
+    </p:extLst>
   </p:cSld>
   <p:clrMapOvr>
     <a:masterClrMapping/>
@@ -432,7 +423,6 @@
               <a:rPr lang="en-US" smtClean="0"/>
               <a:t>Click to edit Master text styles</a:t>
             </a:r>
-            <a:endParaRPr lang="en-US" smtClean="0"/>
           </a:p>
           <a:p>
             <a:pPr lvl="1"/>
@@ -440,7 +430,6 @@
               <a:rPr lang="en-US" smtClean="0"/>
               <a:t>Second level</a:t>
             </a:r>
-            <a:endParaRPr lang="en-US" smtClean="0"/>
           </a:p>
           <a:p>
             <a:pPr lvl="2"/>
@@ -448,7 +437,6 @@
               <a:rPr lang="en-US" smtClean="0"/>
               <a:t>Third level</a:t>
             </a:r>
-            <a:endParaRPr lang="en-US" smtClean="0"/>
           </a:p>
           <a:p>
             <a:pPr lvl="3"/>
@@ -456,7 +444,6 @@
               <a:rPr lang="en-US" smtClean="0"/>
               <a:t>Fourth level</a:t>
             </a:r>
-            <a:endParaRPr lang="en-US" smtClean="0"/>
           </a:p>
           <a:p>
             <a:pPr lvl="4"/>
@@ -485,6 +472,7 @@
           <a:p>
             <a:fld id="{5BCAD085-E8A6-8845-BD4E-CB4CCA059FC4}" type="datetimeFigureOut">
               <a:rPr lang="en-US" smtClean="0"/>
+              <a:t>1/27/13</a:t>
             </a:fld>
             <a:endParaRPr lang="en-US"/>
           </a:p>
@@ -526,12 +514,18 @@
           <a:p>
             <a:fld id="{C1FF6DA9-008F-8B48-92A6-B652298478BF}" type="slidenum">
               <a:rPr lang="en-US" smtClean="0"/>
+              <a:t>‹#›</a:t>
             </a:fld>
             <a:endParaRPr lang="en-US"/>
           </a:p>
         </p:txBody>
       </p:sp>
     </p:spTree>
+    <p:extLst>
+      <p:ext uri="{BB962C8B-B14F-4D97-AF65-F5344CB8AC3E}">
+        <p14:creationId xmlns:p14="http://schemas.microsoft.com/office/powerpoint/2010/main" val="2910927964"/>
+      </p:ext>
+    </p:extLst>
   </p:cSld>
   <p:clrMapOvr>
     <a:masterClrMapping/>
@@ -609,7 +603,6 @@
               <a:rPr lang="en-US" smtClean="0"/>
               <a:t>Click to edit Master text styles</a:t>
             </a:r>
-            <a:endParaRPr lang="en-US" smtClean="0"/>
           </a:p>
           <a:p>
             <a:pPr lvl="1"/>
@@ -617,7 +610,6 @@
               <a:rPr lang="en-US" smtClean="0"/>
               <a:t>Second level</a:t>
             </a:r>
-            <a:endParaRPr lang="en-US" smtClean="0"/>
           </a:p>
           <a:p>
             <a:pPr lvl="2"/>
@@ -625,7 +617,6 @@
               <a:rPr lang="en-US" smtClean="0"/>
               <a:t>Third level</a:t>
             </a:r>
-            <a:endParaRPr lang="en-US" smtClean="0"/>
           </a:p>
           <a:p>
             <a:pPr lvl="3"/>
@@ -633,7 +624,6 @@
               <a:rPr lang="en-US" smtClean="0"/>
               <a:t>Fourth level</a:t>
             </a:r>
-            <a:endParaRPr lang="en-US" smtClean="0"/>
           </a:p>
           <a:p>
             <a:pPr lvl="4"/>
@@ -662,6 +652,7 @@
           <a:p>
             <a:fld id="{5BCAD085-E8A6-8845-BD4E-CB4CCA059FC4}" type="datetimeFigureOut">
               <a:rPr lang="en-US" smtClean="0"/>
+              <a:t>1/27/13</a:t>
             </a:fld>
             <a:endParaRPr lang="en-US"/>
           </a:p>
@@ -703,12 +694,18 @@
           <a:p>
             <a:fld id="{C1FF6DA9-008F-8B48-92A6-B652298478BF}" type="slidenum">
               <a:rPr lang="en-US" smtClean="0"/>
+              <a:t>‹#›</a:t>
             </a:fld>
             <a:endParaRPr lang="en-US"/>
           </a:p>
         </p:txBody>
       </p:sp>
     </p:spTree>
+    <p:extLst>
+      <p:ext uri="{BB962C8B-B14F-4D97-AF65-F5344CB8AC3E}">
+        <p14:creationId xmlns:p14="http://schemas.microsoft.com/office/powerpoint/2010/main" val="3612223792"/>
+      </p:ext>
+    </p:extLst>
   </p:cSld>
   <p:clrMapOvr>
     <a:masterClrMapping/>
@@ -776,7 +773,6 @@
               <a:rPr lang="en-US" smtClean="0"/>
               <a:t>Click to edit Master text styles</a:t>
             </a:r>
-            <a:endParaRPr lang="en-US" smtClean="0"/>
           </a:p>
           <a:p>
             <a:pPr lvl="1"/>
@@ -784,7 +780,6 @@
               <a:rPr lang="en-US" smtClean="0"/>
               <a:t>Second level</a:t>
             </a:r>
-            <a:endParaRPr lang="en-US" smtClean="0"/>
           </a:p>
           <a:p>
             <a:pPr lvl="2"/>
@@ -792,7 +787,6 @@
               <a:rPr lang="en-US" smtClean="0"/>
               <a:t>Third level</a:t>
             </a:r>
-            <a:endParaRPr lang="en-US" smtClean="0"/>
           </a:p>
           <a:p>
             <a:pPr lvl="3"/>
@@ -800,7 +794,6 @@
               <a:rPr lang="en-US" smtClean="0"/>
               <a:t>Fourth level</a:t>
             </a:r>
-            <a:endParaRPr lang="en-US" smtClean="0"/>
           </a:p>
           <a:p>
             <a:pPr lvl="4"/>
@@ -829,6 +822,7 @@
           <a:p>
             <a:fld id="{5BCAD085-E8A6-8845-BD4E-CB4CCA059FC4}" type="datetimeFigureOut">
               <a:rPr lang="en-US" smtClean="0"/>
+              <a:t>1/27/13</a:t>
             </a:fld>
             <a:endParaRPr lang="en-US"/>
           </a:p>
@@ -870,12 +864,18 @@
           <a:p>
             <a:fld id="{C1FF6DA9-008F-8B48-92A6-B652298478BF}" type="slidenum">
               <a:rPr lang="en-US" smtClean="0"/>
+              <a:t>‹#›</a:t>
             </a:fld>
             <a:endParaRPr lang="en-US"/>
           </a:p>
         </p:txBody>
       </p:sp>
     </p:spTree>
+    <p:extLst>
+      <p:ext uri="{BB962C8B-B14F-4D97-AF65-F5344CB8AC3E}">
+        <p14:creationId xmlns:p14="http://schemas.microsoft.com/office/powerpoint/2010/main" val="2614314258"/>
+      </p:ext>
+    </p:extLst>
   </p:cSld>
   <p:clrMapOvr>
     <a:masterClrMapping/>
@@ -1048,7 +1048,6 @@
               <a:rPr lang="en-US" smtClean="0"/>
               <a:t>Click to edit Master text styles</a:t>
             </a:r>
-            <a:endParaRPr lang="en-US" smtClean="0"/>
           </a:p>
         </p:txBody>
       </p:sp>
@@ -1069,6 +1068,7 @@
           <a:p>
             <a:fld id="{5BCAD085-E8A6-8845-BD4E-CB4CCA059FC4}" type="datetimeFigureOut">
               <a:rPr lang="en-US" smtClean="0"/>
+              <a:t>1/27/13</a:t>
             </a:fld>
             <a:endParaRPr lang="en-US"/>
           </a:p>
@@ -1110,12 +1110,18 @@
           <a:p>
             <a:fld id="{C1FF6DA9-008F-8B48-92A6-B652298478BF}" type="slidenum">
               <a:rPr lang="en-US" smtClean="0"/>
+              <a:t>‹#›</a:t>
             </a:fld>
             <a:endParaRPr lang="en-US"/>
           </a:p>
         </p:txBody>
       </p:sp>
     </p:spTree>
+    <p:extLst>
+      <p:ext uri="{BB962C8B-B14F-4D97-AF65-F5344CB8AC3E}">
+        <p14:creationId xmlns:p14="http://schemas.microsoft.com/office/powerpoint/2010/main" val="960648375"/>
+      </p:ext>
+    </p:extLst>
   </p:cSld>
   <p:clrMapOvr>
     <a:masterClrMapping/>
@@ -1216,7 +1222,6 @@
               <a:rPr lang="en-US" smtClean="0"/>
               <a:t>Click to edit Master text styles</a:t>
             </a:r>
-            <a:endParaRPr lang="en-US" smtClean="0"/>
           </a:p>
           <a:p>
             <a:pPr lvl="1"/>
@@ -1224,7 +1229,6 @@
               <a:rPr lang="en-US" smtClean="0"/>
               <a:t>Second level</a:t>
             </a:r>
-            <a:endParaRPr lang="en-US" smtClean="0"/>
           </a:p>
           <a:p>
             <a:pPr lvl="2"/>
@@ -1232,7 +1236,6 @@
               <a:rPr lang="en-US" smtClean="0"/>
               <a:t>Third level</a:t>
             </a:r>
-            <a:endParaRPr lang="en-US" smtClean="0"/>
           </a:p>
           <a:p>
             <a:pPr lvl="3"/>
@@ -1240,7 +1243,6 @@
               <a:rPr lang="en-US" smtClean="0"/>
               <a:t>Fourth level</a:t>
             </a:r>
-            <a:endParaRPr lang="en-US" smtClean="0"/>
           </a:p>
           <a:p>
             <a:pPr lvl="4"/>
@@ -1305,7 +1307,6 @@
               <a:rPr lang="en-US" smtClean="0"/>
               <a:t>Click to edit Master text styles</a:t>
             </a:r>
-            <a:endParaRPr lang="en-US" smtClean="0"/>
           </a:p>
           <a:p>
             <a:pPr lvl="1"/>
@@ -1313,7 +1314,6 @@
               <a:rPr lang="en-US" smtClean="0"/>
               <a:t>Second level</a:t>
             </a:r>
-            <a:endParaRPr lang="en-US" smtClean="0"/>
           </a:p>
           <a:p>
             <a:pPr lvl="2"/>
@@ -1321,7 +1321,6 @@
               <a:rPr lang="en-US" smtClean="0"/>
               <a:t>Third level</a:t>
             </a:r>
-            <a:endParaRPr lang="en-US" smtClean="0"/>
           </a:p>
           <a:p>
             <a:pPr lvl="3"/>
@@ -1329,7 +1328,6 @@
               <a:rPr lang="en-US" smtClean="0"/>
               <a:t>Fourth level</a:t>
             </a:r>
-            <a:endParaRPr lang="en-US" smtClean="0"/>
           </a:p>
           <a:p>
             <a:pPr lvl="4"/>
@@ -1358,6 +1356,7 @@
           <a:p>
             <a:fld id="{5BCAD085-E8A6-8845-BD4E-CB4CCA059FC4}" type="datetimeFigureOut">
               <a:rPr lang="en-US" smtClean="0"/>
+              <a:t>1/27/13</a:t>
             </a:fld>
             <a:endParaRPr lang="en-US"/>
           </a:p>
@@ -1399,12 +1398,18 @@
           <a:p>
             <a:fld id="{C1FF6DA9-008F-8B48-92A6-B652298478BF}" type="slidenum">
               <a:rPr lang="en-US" smtClean="0"/>
+              <a:t>‹#›</a:t>
             </a:fld>
             <a:endParaRPr lang="en-US"/>
           </a:p>
         </p:txBody>
       </p:sp>
     </p:spTree>
+    <p:extLst>
+      <p:ext uri="{BB962C8B-B14F-4D97-AF65-F5344CB8AC3E}">
+        <p14:creationId xmlns:p14="http://schemas.microsoft.com/office/powerpoint/2010/main" val="2782244947"/>
+      </p:ext>
+    </p:extLst>
   </p:cSld>
   <p:clrMapOvr>
     <a:masterClrMapping/>
@@ -1518,7 +1523,6 @@
               <a:rPr lang="en-US" smtClean="0"/>
               <a:t>Click to edit Master text styles</a:t>
             </a:r>
-            <a:endParaRPr lang="en-US" smtClean="0"/>
           </a:p>
         </p:txBody>
       </p:sp>
@@ -1575,7 +1579,6 @@
               <a:rPr lang="en-US" smtClean="0"/>
               <a:t>Click to edit Master text styles</a:t>
             </a:r>
-            <a:endParaRPr lang="en-US" smtClean="0"/>
           </a:p>
           <a:p>
             <a:pPr lvl="1"/>
@@ -1583,7 +1586,6 @@
               <a:rPr lang="en-US" smtClean="0"/>
               <a:t>Second level</a:t>
             </a:r>
-            <a:endParaRPr lang="en-US" smtClean="0"/>
           </a:p>
           <a:p>
             <a:pPr lvl="2"/>
@@ -1591,7 +1593,6 @@
               <a:rPr lang="en-US" smtClean="0"/>
               <a:t>Third level</a:t>
             </a:r>
-            <a:endParaRPr lang="en-US" smtClean="0"/>
           </a:p>
           <a:p>
             <a:pPr lvl="3"/>
@@ -1599,7 +1600,6 @@
               <a:rPr lang="en-US" smtClean="0"/>
               <a:t>Fourth level</a:t>
             </a:r>
-            <a:endParaRPr lang="en-US" smtClean="0"/>
           </a:p>
           <a:p>
             <a:pPr lvl="4"/>
@@ -1673,7 +1673,6 @@
               <a:rPr lang="en-US" smtClean="0"/>
               <a:t>Click to edit Master text styles</a:t>
             </a:r>
-            <a:endParaRPr lang="en-US" smtClean="0"/>
           </a:p>
         </p:txBody>
       </p:sp>
@@ -1730,7 +1729,6 @@
               <a:rPr lang="en-US" smtClean="0"/>
               <a:t>Click to edit Master text styles</a:t>
             </a:r>
-            <a:endParaRPr lang="en-US" smtClean="0"/>
           </a:p>
           <a:p>
             <a:pPr lvl="1"/>
@@ -1738,7 +1736,6 @@
               <a:rPr lang="en-US" smtClean="0"/>
               <a:t>Second level</a:t>
             </a:r>
-            <a:endParaRPr lang="en-US" smtClean="0"/>
           </a:p>
           <a:p>
             <a:pPr lvl="2"/>
@@ -1746,7 +1743,6 @@
               <a:rPr lang="en-US" smtClean="0"/>
               <a:t>Third level</a:t>
             </a:r>
-            <a:endParaRPr lang="en-US" smtClean="0"/>
           </a:p>
           <a:p>
             <a:pPr lvl="3"/>
@@ -1754,7 +1750,6 @@
               <a:rPr lang="en-US" smtClean="0"/>
               <a:t>Fourth level</a:t>
             </a:r>
-            <a:endParaRPr lang="en-US" smtClean="0"/>
           </a:p>
           <a:p>
             <a:pPr lvl="4"/>
@@ -1783,6 +1778,7 @@
           <a:p>
             <a:fld id="{5BCAD085-E8A6-8845-BD4E-CB4CCA059FC4}" type="datetimeFigureOut">
               <a:rPr lang="en-US" smtClean="0"/>
+              <a:t>1/27/13</a:t>
             </a:fld>
             <a:endParaRPr lang="en-US"/>
           </a:p>
@@ -1824,12 +1820,18 @@
           <a:p>
             <a:fld id="{C1FF6DA9-008F-8B48-92A6-B652298478BF}" type="slidenum">
               <a:rPr lang="en-US" smtClean="0"/>
+              <a:t>‹#›</a:t>
             </a:fld>
             <a:endParaRPr lang="en-US"/>
           </a:p>
         </p:txBody>
       </p:sp>
     </p:spTree>
+    <p:extLst>
+      <p:ext uri="{BB962C8B-B14F-4D97-AF65-F5344CB8AC3E}">
+        <p14:creationId xmlns:p14="http://schemas.microsoft.com/office/powerpoint/2010/main" val="990158736"/>
+      </p:ext>
+    </p:extLst>
   </p:cSld>
   <p:clrMapOvr>
     <a:masterClrMapping/>
@@ -1894,6 +1896,7 @@
           <a:p>
             <a:fld id="{5BCAD085-E8A6-8845-BD4E-CB4CCA059FC4}" type="datetimeFigureOut">
               <a:rPr lang="en-US" smtClean="0"/>
+              <a:t>1/27/13</a:t>
             </a:fld>
             <a:endParaRPr lang="en-US"/>
           </a:p>
@@ -1935,12 +1938,18 @@
           <a:p>
             <a:fld id="{C1FF6DA9-008F-8B48-92A6-B652298478BF}" type="slidenum">
               <a:rPr lang="en-US" smtClean="0"/>
+              <a:t>‹#›</a:t>
             </a:fld>
             <a:endParaRPr lang="en-US"/>
           </a:p>
         </p:txBody>
       </p:sp>
     </p:spTree>
+    <p:extLst>
+      <p:ext uri="{BB962C8B-B14F-4D97-AF65-F5344CB8AC3E}">
+        <p14:creationId xmlns:p14="http://schemas.microsoft.com/office/powerpoint/2010/main" val="727027711"/>
+      </p:ext>
+    </p:extLst>
   </p:cSld>
   <p:clrMapOvr>
     <a:masterClrMapping/>
@@ -1982,6 +1991,7 @@
           <a:p>
             <a:fld id="{5BCAD085-E8A6-8845-BD4E-CB4CCA059FC4}" type="datetimeFigureOut">
               <a:rPr lang="en-US" smtClean="0"/>
+              <a:t>1/27/13</a:t>
             </a:fld>
             <a:endParaRPr lang="en-US"/>
           </a:p>
@@ -2023,12 +2033,18 @@
           <a:p>
             <a:fld id="{C1FF6DA9-008F-8B48-92A6-B652298478BF}" type="slidenum">
               <a:rPr lang="en-US" smtClean="0"/>
+              <a:t>‹#›</a:t>
             </a:fld>
             <a:endParaRPr lang="en-US"/>
           </a:p>
         </p:txBody>
       </p:sp>
     </p:spTree>
+    <p:extLst>
+      <p:ext uri="{BB962C8B-B14F-4D97-AF65-F5344CB8AC3E}">
+        <p14:creationId xmlns:p14="http://schemas.microsoft.com/office/powerpoint/2010/main" val="1212999818"/>
+      </p:ext>
+    </p:extLst>
   </p:cSld>
   <p:clrMapOvr>
     <a:masterClrMapping/>
@@ -2138,7 +2154,6 @@
               <a:rPr lang="en-US" smtClean="0"/>
               <a:t>Click to edit Master text styles</a:t>
             </a:r>
-            <a:endParaRPr lang="en-US" smtClean="0"/>
           </a:p>
           <a:p>
             <a:pPr lvl="1"/>
@@ -2146,7 +2161,6 @@
               <a:rPr lang="en-US" smtClean="0"/>
               <a:t>Second level</a:t>
             </a:r>
-            <a:endParaRPr lang="en-US" smtClean="0"/>
           </a:p>
           <a:p>
             <a:pPr lvl="2"/>
@@ -2154,7 +2168,6 @@
               <a:rPr lang="en-US" smtClean="0"/>
               <a:t>Third level</a:t>
             </a:r>
-            <a:endParaRPr lang="en-US" smtClean="0"/>
           </a:p>
           <a:p>
             <a:pPr lvl="3"/>
@@ -2162,7 +2175,6 @@
               <a:rPr lang="en-US" smtClean="0"/>
               <a:t>Fourth level</a:t>
             </a:r>
-            <a:endParaRPr lang="en-US" smtClean="0"/>
           </a:p>
           <a:p>
             <a:pPr lvl="4"/>
@@ -2236,7 +2248,6 @@
               <a:rPr lang="en-US" smtClean="0"/>
               <a:t>Click to edit Master text styles</a:t>
             </a:r>
-            <a:endParaRPr lang="en-US" smtClean="0"/>
           </a:p>
         </p:txBody>
       </p:sp>
@@ -2257,6 +2268,7 @@
           <a:p>
             <a:fld id="{5BCAD085-E8A6-8845-BD4E-CB4CCA059FC4}" type="datetimeFigureOut">
               <a:rPr lang="en-US" smtClean="0"/>
+              <a:t>1/27/13</a:t>
             </a:fld>
             <a:endParaRPr lang="en-US"/>
           </a:p>
@@ -2298,12 +2310,18 @@
           <a:p>
             <a:fld id="{C1FF6DA9-008F-8B48-92A6-B652298478BF}" type="slidenum">
               <a:rPr lang="en-US" smtClean="0"/>
+              <a:t>‹#›</a:t>
             </a:fld>
             <a:endParaRPr lang="en-US"/>
           </a:p>
         </p:txBody>
       </p:sp>
     </p:spTree>
+    <p:extLst>
+      <p:ext uri="{BB962C8B-B14F-4D97-AF65-F5344CB8AC3E}">
+        <p14:creationId xmlns:p14="http://schemas.microsoft.com/office/powerpoint/2010/main" val="1840726560"/>
+      </p:ext>
+    </p:extLst>
   </p:cSld>
   <p:clrMapOvr>
     <a:masterClrMapping/>
@@ -2483,7 +2501,6 @@
               <a:rPr lang="en-US" smtClean="0"/>
               <a:t>Click to edit Master text styles</a:t>
             </a:r>
-            <a:endParaRPr lang="en-US" smtClean="0"/>
           </a:p>
         </p:txBody>
       </p:sp>
@@ -2504,6 +2521,7 @@
           <a:p>
             <a:fld id="{5BCAD085-E8A6-8845-BD4E-CB4CCA059FC4}" type="datetimeFigureOut">
               <a:rPr lang="en-US" smtClean="0"/>
+              <a:t>1/27/13</a:t>
             </a:fld>
             <a:endParaRPr lang="en-US"/>
           </a:p>
@@ -2545,12 +2563,18 @@
           <a:p>
             <a:fld id="{C1FF6DA9-008F-8B48-92A6-B652298478BF}" type="slidenum">
               <a:rPr lang="en-US" smtClean="0"/>
+              <a:t>‹#›</a:t>
             </a:fld>
             <a:endParaRPr lang="en-US"/>
           </a:p>
         </p:txBody>
       </p:sp>
     </p:spTree>
+    <p:extLst>
+      <p:ext uri="{BB962C8B-B14F-4D97-AF65-F5344CB8AC3E}">
+        <p14:creationId xmlns:p14="http://schemas.microsoft.com/office/powerpoint/2010/main" val="3889236939"/>
+      </p:ext>
+    </p:extLst>
   </p:cSld>
   <p:clrMapOvr>
     <a:masterClrMapping/>
@@ -2643,7 +2667,6 @@
               <a:rPr lang="en-US" smtClean="0"/>
               <a:t>Click to edit Master text styles</a:t>
             </a:r>
-            <a:endParaRPr lang="en-US" smtClean="0"/>
           </a:p>
           <a:p>
             <a:pPr lvl="1"/>
@@ -2651,7 +2674,6 @@
               <a:rPr lang="en-US" smtClean="0"/>
               <a:t>Second level</a:t>
             </a:r>
-            <a:endParaRPr lang="en-US" smtClean="0"/>
           </a:p>
           <a:p>
             <a:pPr lvl="2"/>
@@ -2659,7 +2681,6 @@
               <a:rPr lang="en-US" smtClean="0"/>
               <a:t>Third level</a:t>
             </a:r>
-            <a:endParaRPr lang="en-US" smtClean="0"/>
           </a:p>
           <a:p>
             <a:pPr lvl="3"/>
@@ -2667,7 +2688,6 @@
               <a:rPr lang="en-US" smtClean="0"/>
               <a:t>Fourth level</a:t>
             </a:r>
-            <a:endParaRPr lang="en-US" smtClean="0"/>
           </a:p>
           <a:p>
             <a:pPr lvl="4"/>
@@ -2714,6 +2734,7 @@
           <a:p>
             <a:fld id="{5BCAD085-E8A6-8845-BD4E-CB4CCA059FC4}" type="datetimeFigureOut">
               <a:rPr lang="en-US" smtClean="0"/>
+              <a:t>1/27/13</a:t>
             </a:fld>
             <a:endParaRPr lang="en-US"/>
           </a:p>
@@ -2791,12 +2812,18 @@
           <a:p>
             <a:fld id="{C1FF6DA9-008F-8B48-92A6-B652298478BF}" type="slidenum">
               <a:rPr lang="en-US" smtClean="0"/>
+              <a:t>‹#›</a:t>
             </a:fld>
             <a:endParaRPr lang="en-US"/>
           </a:p>
         </p:txBody>
       </p:sp>
     </p:spTree>
+    <p:extLst>
+      <p:ext uri="{BB962C8B-B14F-4D97-AF65-F5344CB8AC3E}">
+        <p14:creationId xmlns:p14="http://schemas.microsoft.com/office/powerpoint/2010/main" val="2209977519"/>
+      </p:ext>
+    </p:extLst>
   </p:cSld>
   <p:clrMap bg1="lt1" tx1="dk1" bg2="lt2" tx2="dk2" accent1="accent1" accent2="accent2" accent3="accent3" accent4="accent4" accent5="accent5" accent6="accent6" hlink="hlink" folHlink="folHlink"/>
   <p:sldLayoutIdLst>
@@ -2834,7 +2861,7 @@
         <a:spcBef>
           <a:spcPct val="20000"/>
         </a:spcBef>
-        <a:buFont typeface="Arial" panose="020B0604020202020204"/>
+        <a:buFont typeface="Arial"/>
         <a:buChar char="•"/>
         <a:defRPr sz="3200" kern="1200">
           <a:solidFill>
@@ -2849,7 +2876,7 @@
         <a:spcBef>
           <a:spcPct val="20000"/>
         </a:spcBef>
-        <a:buFont typeface="Arial" panose="020B0604020202020204"/>
+        <a:buFont typeface="Arial"/>
         <a:buChar char="–"/>
         <a:defRPr sz="2800" kern="1200">
           <a:solidFill>
@@ -2864,7 +2891,7 @@
         <a:spcBef>
           <a:spcPct val="20000"/>
         </a:spcBef>
-        <a:buFont typeface="Arial" panose="020B0604020202020204"/>
+        <a:buFont typeface="Arial"/>
         <a:buChar char="•"/>
         <a:defRPr sz="2400" kern="1200">
           <a:solidFill>
@@ -2879,7 +2906,7 @@
         <a:spcBef>
           <a:spcPct val="20000"/>
         </a:spcBef>
-        <a:buFont typeface="Arial" panose="020B0604020202020204"/>
+        <a:buFont typeface="Arial"/>
         <a:buChar char="–"/>
         <a:defRPr sz="2000" kern="1200">
           <a:solidFill>
@@ -2894,7 +2921,7 @@
         <a:spcBef>
           <a:spcPct val="20000"/>
         </a:spcBef>
-        <a:buFont typeface="Arial" panose="020B0604020202020204"/>
+        <a:buFont typeface="Arial"/>
         <a:buChar char="»"/>
         <a:defRPr sz="2000" kern="1200">
           <a:solidFill>
@@ -2909,7 +2936,7 @@
         <a:spcBef>
           <a:spcPct val="20000"/>
         </a:spcBef>
-        <a:buFont typeface="Arial" panose="020B0604020202020204"/>
+        <a:buFont typeface="Arial"/>
         <a:buChar char="•"/>
         <a:defRPr sz="2000" kern="1200">
           <a:solidFill>
@@ -2924,7 +2951,7 @@
         <a:spcBef>
           <a:spcPct val="20000"/>
         </a:spcBef>
-        <a:buFont typeface="Arial" panose="020B0604020202020204"/>
+        <a:buFont typeface="Arial"/>
         <a:buChar char="•"/>
         <a:defRPr sz="2000" kern="1200">
           <a:solidFill>
@@ -2939,7 +2966,7 @@
         <a:spcBef>
           <a:spcPct val="20000"/>
         </a:spcBef>
-        <a:buFont typeface="Arial" panose="020B0604020202020204"/>
+        <a:buFont typeface="Arial"/>
         <a:buChar char="•"/>
         <a:defRPr sz="2000" kern="1200">
           <a:solidFill>
@@ -2954,7 +2981,7 @@
         <a:spcBef>
           <a:spcPct val="20000"/>
         </a:spcBef>
-        <a:buFont typeface="Arial" panose="020B0604020202020204"/>
+        <a:buFont typeface="Arial"/>
         <a:buChar char="•"/>
         <a:defRPr sz="2000" kern="1200">
           <a:solidFill>
@@ -3066,7 +3093,7 @@
 </file>
 
 <file path=ppt/slides/slide1.xml><?xml version="1.0" encoding="utf-8"?>
-<p:sld xmlns:a="http://schemas.openxmlformats.org/drawingml/2006/main" xmlns:r="http://schemas.openxmlformats.org/officeDocument/2006/relationships" xmlns:p="http://schemas.openxmlformats.org/presentationml/2006/main">
+<p:sld xmlns:a="http://schemas.openxmlformats.org/drawingml/2006/main" xmlns:p="http://schemas.openxmlformats.org/presentationml/2006/main" xmlns:r="http://schemas.openxmlformats.org/officeDocument/2006/relationships">
   <p:cSld>
     <p:bg>
       <p:bgPr>
@@ -3091,8 +3118,8 @@
         </p:nvSpPr>
         <p:spPr>
           <a:xfrm>
-            <a:off x="640080" y="914400"/>
-            <a:ext cx="9601200" cy="548640"/>
+            <a:off x="640080" y="868680"/>
+            <a:ext cx="9875520" cy="548640"/>
           </a:xfrm>
           <a:prstGeom prst="rect">
             <a:avLst/>
@@ -3100,7 +3127,7 @@
           <a:noFill/>
         </p:spPr>
         <p:txBody>
-          <a:bodyPr wrap="none">
+          <a:bodyPr wrap="square">
             <a:spAutoFit/>
           </a:bodyPr>
           <a:lstStyle/>
@@ -3108,18 +3135,12 @@
             <a:r>
               <a:rPr sz="3400" b="1">
                 <a:solidFill>
-                  <a:srgbClr val="2A2E34"/>
-                </a:solidFill>
-                <a:latin typeface="微软雅黑" panose="020B0503020204020204" charset="-122"/>
+                  <a:srgbClr val="23282E"/>
+                </a:solidFill>
+                <a:latin typeface="Microsoft YaHei"/>
               </a:rPr>
               <a:t>Week5 CS231n Assignment 1</a:t>
             </a:r>
-            <a:endParaRPr sz="3400" b="1">
-              <a:solidFill>
-                <a:srgbClr val="2A2E34"/>
-              </a:solidFill>
-              <a:latin typeface="微软雅黑" panose="020B0503020204020204" charset="-122"/>
-            </a:endParaRPr>
           </a:p>
         </p:txBody>
       </p:sp>
@@ -3131,8 +3152,8 @@
         </p:nvSpPr>
         <p:spPr>
           <a:xfrm>
-            <a:off x="658368" y="1600200"/>
-            <a:ext cx="9326880" cy="365760"/>
+            <a:off x="658368" y="1572768"/>
+            <a:ext cx="10424160" cy="438912"/>
           </a:xfrm>
           <a:prstGeom prst="rect">
             <a:avLst/>
@@ -3140,7 +3161,7 @@
           <a:noFill/>
         </p:spPr>
         <p:txBody>
-          <a:bodyPr wrap="none">
+          <a:bodyPr wrap="square">
             <a:spAutoFit/>
           </a:bodyPr>
           <a:lstStyle/>
@@ -3148,18 +3169,12 @@
             <a:r>
               <a:rPr sz="1800" b="0">
                 <a:solidFill>
-                  <a:srgbClr val="2A2E34"/>
-                </a:solidFill>
-                <a:latin typeface="微软雅黑" panose="020B0503020204020204" charset="-122"/>
+                  <a:srgbClr val="23282E"/>
+                </a:solidFill>
+                <a:latin typeface="Microsoft YaHei"/>
               </a:rPr>
-              <a:t>CIFAR-10 图像分类本地复现实验：kNN、Softmax、TwoLayerNet</a:t>
-            </a:r>
-            <a:endParaRPr sz="1800" b="0">
-              <a:solidFill>
-                <a:srgbClr val="2A2E34"/>
-              </a:solidFill>
-              <a:latin typeface="微软雅黑" panose="020B0503020204020204" charset="-122"/>
-            </a:endParaRPr>
+              <a:t>CIFAR-10 图像分类本地复现：raw pixels 基线 + HOG/color histogram 特征实验</a:t>
+            </a:r>
           </a:p>
         </p:txBody>
       </p:sp>
@@ -3171,8 +3186,8 @@
         </p:nvSpPr>
         <p:spPr>
           <a:xfrm>
-            <a:off x="658368" y="2331720"/>
-            <a:ext cx="7772400" cy="411480"/>
+            <a:off x="685800" y="2423160"/>
+            <a:ext cx="2468880" cy="228600"/>
           </a:xfrm>
           <a:prstGeom prst="rect">
             <a:avLst/>
@@ -3180,26 +3195,21 @@
           <a:noFill/>
         </p:spPr>
         <p:txBody>
-          <a:bodyPr wrap="none">
+          <a:bodyPr wrap="square">
             <a:spAutoFit/>
           </a:bodyPr>
           <a:lstStyle/>
           <a:p>
-            <a:r>
-              <a:rPr sz="2000" b="1">
-                <a:solidFill>
-                  <a:srgbClr val="4F8968"/>
-                </a:solidFill>
-                <a:latin typeface="微软雅黑" panose="020B0503020204020204" charset="-122"/>
+            <a:pPr algn="ctr"/>
+            <a:r>
+              <a:rPr sz="1100" b="1">
+                <a:solidFill>
+                  <a:srgbClr val="5C6B7E"/>
+                </a:solidFill>
+                <a:latin typeface="Microsoft YaHei"/>
               </a:rPr>
-              <a:t>最佳测试准确率：TwoLayerNet / N49000 / 0.493</a:t>
-            </a:r>
-            <a:endParaRPr sz="2000" b="1">
-              <a:solidFill>
-                <a:srgbClr val="4F8968"/>
-              </a:solidFill>
-              <a:latin typeface="微软雅黑" panose="020B0503020204020204" charset="-122"/>
-            </a:endParaRPr>
+              <a:t>最佳 raw pixels</a:t>
+            </a:r>
           </a:p>
         </p:txBody>
       </p:sp>
@@ -3211,8 +3221,8 @@
         </p:nvSpPr>
         <p:spPr>
           <a:xfrm>
-            <a:off x="658368" y="2788920"/>
-            <a:ext cx="7772400" cy="320040"/>
+            <a:off x="685800" y="2679191"/>
+            <a:ext cx="2468880" cy="457200"/>
           </a:xfrm>
           <a:prstGeom prst="rect">
             <a:avLst/>
@@ -3220,39 +3230,34 @@
           <a:noFill/>
         </p:spPr>
         <p:txBody>
-          <a:bodyPr wrap="none">
+          <a:bodyPr wrap="square">
             <a:spAutoFit/>
           </a:bodyPr>
           <a:lstStyle/>
           <a:p>
-            <a:r>
-              <a:rPr sz="1500" b="0">
-                <a:solidFill>
-                  <a:srgbClr val="2A2E34"/>
-                </a:solidFill>
-                <a:latin typeface="微软雅黑" panose="020B0503020204020204" charset="-122"/>
+            <a:pPr algn="ctr"/>
+            <a:r>
+              <a:rPr sz="2400" b="1">
+                <a:solidFill>
+                  <a:srgbClr val="4F8968"/>
+                </a:solidFill>
+                <a:latin typeface="Microsoft YaHei"/>
               </a:rPr>
-              <a:t>数据规模：10k / 20k / 49k 训练样本；验证与测试各 1k</a:t>
-            </a:r>
-            <a:endParaRPr sz="1500" b="0">
-              <a:solidFill>
-                <a:srgbClr val="2A2E34"/>
-              </a:solidFill>
-              <a:latin typeface="微软雅黑" panose="020B0503020204020204" charset="-122"/>
-            </a:endParaRPr>
-          </a:p>
-        </p:txBody>
-      </p:sp>
-      <p:sp>
-        <p:nvSpPr>
-          <p:cNvPr id="6" name="TextBox 3"/>
+              <a:t>0.493</a:t>
+            </a:r>
+          </a:p>
+        </p:txBody>
+      </p:sp>
+      <p:sp>
+        <p:nvSpPr>
+          <p:cNvPr id="6" name="TextBox 5"/>
           <p:cNvSpPr txBox="1"/>
           <p:nvPr/>
         </p:nvSpPr>
         <p:spPr>
           <a:xfrm>
-            <a:off x="658495" y="3931920"/>
-            <a:ext cx="7809230" cy="1383665"/>
+            <a:off x="3337560" y="2423160"/>
+            <a:ext cx="2468880" cy="228600"/>
           </a:xfrm>
           <a:prstGeom prst="rect">
             <a:avLst/>
@@ -3260,7 +3265,147 @@
           <a:noFill/>
         </p:spPr>
         <p:txBody>
-          <a:bodyPr wrap="none">
+          <a:bodyPr wrap="square">
+            <a:spAutoFit/>
+          </a:bodyPr>
+          <a:lstStyle/>
+          <a:p>
+            <a:pPr algn="ctr"/>
+            <a:r>
+              <a:rPr sz="1100" b="1">
+                <a:solidFill>
+                  <a:srgbClr val="5C6B7E"/>
+                </a:solidFill>
+                <a:latin typeface="Microsoft YaHei"/>
+              </a:rPr>
+              <a:t>最佳 image features</a:t>
+            </a:r>
+          </a:p>
+        </p:txBody>
+      </p:sp>
+      <p:sp>
+        <p:nvSpPr>
+          <p:cNvPr id="7" name="TextBox 6"/>
+          <p:cNvSpPr txBox="1"/>
+          <p:nvPr/>
+        </p:nvSpPr>
+        <p:spPr>
+          <a:xfrm>
+            <a:off x="3337560" y="2679191"/>
+            <a:ext cx="2468880" cy="457200"/>
+          </a:xfrm>
+          <a:prstGeom prst="rect">
+            <a:avLst/>
+          </a:prstGeom>
+          <a:noFill/>
+        </p:spPr>
+        <p:txBody>
+          <a:bodyPr wrap="square">
+            <a:spAutoFit/>
+          </a:bodyPr>
+          <a:lstStyle/>
+          <a:p>
+            <a:pPr algn="ctr"/>
+            <a:r>
+              <a:rPr sz="2400" b="1">
+                <a:solidFill>
+                  <a:srgbClr val="4F8968"/>
+                </a:solidFill>
+                <a:latin typeface="Microsoft YaHei"/>
+              </a:rPr>
+              <a:t>0.576</a:t>
+            </a:r>
+          </a:p>
+        </p:txBody>
+      </p:sp>
+      <p:sp>
+        <p:nvSpPr>
+          <p:cNvPr id="8" name="TextBox 7"/>
+          <p:cNvSpPr txBox="1"/>
+          <p:nvPr/>
+        </p:nvSpPr>
+        <p:spPr>
+          <a:xfrm>
+            <a:off x="5989320" y="2423160"/>
+            <a:ext cx="2468880" cy="228600"/>
+          </a:xfrm>
+          <a:prstGeom prst="rect">
+            <a:avLst/>
+          </a:prstGeom>
+          <a:noFill/>
+        </p:spPr>
+        <p:txBody>
+          <a:bodyPr wrap="square">
+            <a:spAutoFit/>
+          </a:bodyPr>
+          <a:lstStyle/>
+          <a:p>
+            <a:pPr algn="ctr"/>
+            <a:r>
+              <a:rPr sz="1100" b="1">
+                <a:solidFill>
+                  <a:srgbClr val="5C6B7E"/>
+                </a:solidFill>
+                <a:latin typeface="Microsoft YaHei"/>
+              </a:rPr>
+              <a:t>features 提升</a:t>
+            </a:r>
+          </a:p>
+        </p:txBody>
+      </p:sp>
+      <p:sp>
+        <p:nvSpPr>
+          <p:cNvPr id="9" name="TextBox 8"/>
+          <p:cNvSpPr txBox="1"/>
+          <p:nvPr/>
+        </p:nvSpPr>
+        <p:spPr>
+          <a:xfrm>
+            <a:off x="5989320" y="2679191"/>
+            <a:ext cx="2468880" cy="457200"/>
+          </a:xfrm>
+          <a:prstGeom prst="rect">
+            <a:avLst/>
+          </a:prstGeom>
+          <a:noFill/>
+        </p:spPr>
+        <p:txBody>
+          <a:bodyPr wrap="square">
+            <a:spAutoFit/>
+          </a:bodyPr>
+          <a:lstStyle/>
+          <a:p>
+            <a:pPr algn="ctr"/>
+            <a:r>
+              <a:rPr sz="2400" b="1">
+                <a:solidFill>
+                  <a:srgbClr val="CD7539"/>
+                </a:solidFill>
+                <a:latin typeface="Microsoft YaHei"/>
+              </a:rPr>
+              <a:t>+0.083</a:t>
+            </a:r>
+          </a:p>
+        </p:txBody>
+      </p:sp>
+      <p:sp>
+        <p:nvSpPr>
+          <p:cNvPr id="10" name="TextBox 9"/>
+          <p:cNvSpPr txBox="1"/>
+          <p:nvPr/>
+        </p:nvSpPr>
+        <p:spPr>
+          <a:xfrm>
+            <a:off x="777240" y="3657600"/>
+            <a:ext cx="10424160" cy="1554480"/>
+          </a:xfrm>
+          <a:prstGeom prst="rect">
+            <a:avLst/>
+          </a:prstGeom>
+          <a:noFill/>
+        </p:spPr>
+        <p:txBody>
+          <a:bodyPr wrap="square">
             <a:spAutoFit/>
           </a:bodyPr>
           <a:lstStyle/>
@@ -3269,12 +3414,15 @@
               <a:spcAft>
                 <a:spcPts val="800"/>
               </a:spcAft>
-              <a:defRPr sz="1600">
-                <a:latin typeface="微软雅黑" panose="020B0503020204020204" charset="-122"/>
+              <a:defRPr sz="1700">
+                <a:solidFill>
+                  <a:srgbClr val="2A2E34"/>
+                </a:solidFill>
+                <a:latin typeface="Microsoft YaHei"/>
               </a:defRPr>
             </a:pPr>
             <a:r>
-              <a:t>CS231n A1 关注图像分类的完整工程链路</a:t>
+              <a:t>目标：在本地复现 CS231n A1 的完整学习流程，而不是提交官方作业</a:t>
             </a:r>
           </a:p>
           <a:p>
@@ -3282,12 +3430,15 @@
               <a:spcAft>
                 <a:spcPts val="800"/>
               </a:spcAft>
-              <a:defRPr sz="1600">
-                <a:latin typeface="微软雅黑" panose="020B0503020204020204" charset="-122"/>
+              <a:defRPr sz="1700">
+                <a:solidFill>
+                  <a:srgbClr val="2A2E34"/>
+                </a:solidFill>
+                <a:latin typeface="Microsoft YaHei"/>
               </a:defRPr>
             </a:pPr>
             <a:r>
-              <a:t>从 kNN 到 Softmax，再到两层神经网络</a:t>
+              <a:t>主线：kNN、Softmax、TwoLayerNet、HOG + color histogram</a:t>
             </a:r>
           </a:p>
           <a:p>
@@ -3295,23 +3446,16 @@
               <a:spcAft>
                 <a:spcPts val="800"/>
               </a:spcAft>
-              <a:defRPr sz="1600">
-                <a:latin typeface="微软雅黑" panose="020B0503020204020204" charset="-122"/>
+              <a:defRPr sz="1700">
+                <a:solidFill>
+                  <a:srgbClr val="2A2E34"/>
+                </a:solidFill>
+                <a:latin typeface="Microsoft YaHei"/>
               </a:defRPr>
             </a:pPr>
             <a:r>
-              <a:t>核心学习点：数据划分、loss、gradient、regularization、hyperparameter tuning</a:t>
-            </a:r>
-          </a:p>
-          <a:p>
-            <a:pPr>
-              <a:spcAft>
-                <a:spcPts val="800"/>
-              </a:spcAft>
-              <a:defRPr sz="1600">
-                <a:latin typeface="微软雅黑" panose="020B0503020204020204" charset="-122"/>
-              </a:defRPr>
-            </a:pPr>
+              <a:t>汇报重点：为什么“输入表示”会显著影响图像分类效果</a:t>
+            </a:r>
           </a:p>
         </p:txBody>
       </p:sp>
@@ -3324,7 +3468,7 @@
 </file>
 
 <file path=ppt/slides/slide10.xml><?xml version="1.0" encoding="utf-8"?>
-<p:sld xmlns:a="http://schemas.openxmlformats.org/drawingml/2006/main" xmlns:r="http://schemas.openxmlformats.org/officeDocument/2006/relationships" xmlns:p="http://schemas.openxmlformats.org/presentationml/2006/main">
+<p:sld xmlns:a="http://schemas.openxmlformats.org/drawingml/2006/main" xmlns:p="http://schemas.openxmlformats.org/presentationml/2006/main" xmlns:r="http://schemas.openxmlformats.org/officeDocument/2006/relationships">
   <p:cSld>
     <p:bg>
       <p:bgPr>
@@ -3349,8 +3493,8 @@
         </p:nvSpPr>
         <p:spPr>
           <a:xfrm>
-            <a:off x="502920" y="256032"/>
-            <a:ext cx="2286000" cy="237744"/>
+            <a:off x="502920" y="228600"/>
+            <a:ext cx="3017520" cy="256032"/>
           </a:xfrm>
           <a:prstGeom prst="rect">
             <a:avLst/>
@@ -3358,7 +3502,7 @@
           <a:noFill/>
         </p:spPr>
         <p:txBody>
-          <a:bodyPr wrap="none">
+          <a:bodyPr wrap="square">
             <a:spAutoFit/>
           </a:bodyPr>
           <a:lstStyle/>
@@ -3366,18 +3510,12 @@
             <a:r>
               <a:rPr sz="900" b="1">
                 <a:solidFill>
-                  <a:srgbClr val="5F6F82"/>
-                </a:solidFill>
-                <a:latin typeface="微软雅黑" panose="020B0503020204020204" charset="-122"/>
+                  <a:srgbClr val="5C6B7E"/>
+                </a:solidFill>
+                <a:latin typeface="Microsoft YaHei"/>
               </a:rPr>
-              <a:t>BEST MODEL</a:t>
-            </a:r>
-            <a:endParaRPr sz="900" b="1">
-              <a:solidFill>
-                <a:srgbClr val="5F6F82"/>
-              </a:solidFill>
-              <a:latin typeface="微软雅黑" panose="020B0503020204020204" charset="-122"/>
-            </a:endParaRPr>
+              <a:t>TWO-LAYER TUNING</a:t>
+            </a:r>
           </a:p>
         </p:txBody>
       </p:sp>
@@ -3389,8 +3527,8 @@
         </p:nvSpPr>
         <p:spPr>
           <a:xfrm>
-            <a:off x="502920" y="502920"/>
-            <a:ext cx="10424160" cy="502920"/>
+            <a:off x="502920" y="530352"/>
+            <a:ext cx="10881360" cy="502920"/>
           </a:xfrm>
           <a:prstGeom prst="rect">
             <a:avLst/>
@@ -3398,7 +3536,7 @@
           <a:noFill/>
         </p:spPr>
         <p:txBody>
-          <a:bodyPr wrap="none">
+          <a:bodyPr wrap="square">
             <a:spAutoFit/>
           </a:bodyPr>
           <a:lstStyle/>
@@ -3406,31 +3544,49 @@
             <a:r>
               <a:rPr sz="2400" b="1">
                 <a:solidFill>
-                  <a:srgbClr val="1E2328"/>
-                </a:solidFill>
-                <a:latin typeface="微软雅黑" panose="020B0503020204020204" charset="-122"/>
+                  <a:srgbClr val="1A1F24"/>
+                </a:solidFill>
+                <a:latin typeface="Microsoft YaHei"/>
               </a:rPr>
-              <a:t>最佳模型：TwoLayerNet 是本轮复现的主结果</a:t>
-            </a:r>
-            <a:endParaRPr sz="2400" b="1">
-              <a:solidFill>
-                <a:srgbClr val="1E2328"/>
-              </a:solidFill>
-              <a:latin typeface="微软雅黑" panose="020B0503020204020204" charset="-122"/>
-            </a:endParaRPr>
-          </a:p>
-        </p:txBody>
-      </p:sp>
-      <p:sp>
-        <p:nvSpPr>
-          <p:cNvPr id="4" name="TextBox 3"/>
+              <a:t>TwoLayerNet on Features：非线性分类器继续提升</a:t>
+            </a:r>
+          </a:p>
+        </p:txBody>
+      </p:sp>
+      <p:pic>
+        <p:nvPicPr>
+          <p:cNvPr id="4" name="Picture 3" descr="features_twolayer_config_comparison.png"/>
+          <p:cNvPicPr>
+            <a:picLocks noChangeAspect="1"/>
+          </p:cNvPicPr>
+          <p:nvPr/>
+        </p:nvPicPr>
+        <p:blipFill>
+          <a:blip r:embed="rId2"/>
+          <a:stretch>
+            <a:fillRect/>
+          </a:stretch>
+        </p:blipFill>
+        <p:spPr>
+          <a:xfrm>
+            <a:off x="640080" y="1097280"/>
+            <a:ext cx="6675120" cy="4114800"/>
+          </a:xfrm>
+          <a:prstGeom prst="rect">
+            <a:avLst/>
+          </a:prstGeom>
+        </p:spPr>
+      </p:pic>
+      <p:sp>
+        <p:nvSpPr>
+          <p:cNvPr id="5" name="TextBox 4"/>
           <p:cNvSpPr txBox="1"/>
           <p:nvPr/>
         </p:nvSpPr>
         <p:spPr>
           <a:xfrm>
-            <a:off x="685800" y="1234440"/>
-            <a:ext cx="10424160" cy="4389120"/>
+            <a:off x="7635240" y="1417320"/>
+            <a:ext cx="3657600" cy="3657600"/>
           </a:xfrm>
           <a:prstGeom prst="rect">
             <a:avLst/>
@@ -3438,7 +3594,7 @@
           <a:noFill/>
         </p:spPr>
         <p:txBody>
-          <a:bodyPr wrap="none">
+          <a:bodyPr wrap="square">
             <a:spAutoFit/>
           </a:bodyPr>
           <a:lstStyle/>
@@ -3447,12 +3603,15 @@
               <a:spcAft>
                 <a:spcPts val="800"/>
               </a:spcAft>
-              <a:defRPr sz="1600">
-                <a:latin typeface="微软雅黑" panose="020B0503020204020204" charset="-122"/>
+              <a:defRPr sz="1700">
+                <a:solidFill>
+                  <a:srgbClr val="2A2E34"/>
+                </a:solidFill>
+                <a:latin typeface="Microsoft YaHei"/>
               </a:defRPr>
             </a:pPr>
             <a:r>
-              <a:t>按 validation：N49000 TwoLayerNet cfg4，val=0.515, test=0.493</a:t>
+              <a:t>最佳 hidden_dim=750</a:t>
             </a:r>
           </a:p>
           <a:p>
@@ -3460,12 +3619,15 @@
               <a:spcAft>
                 <a:spcPts val="800"/>
               </a:spcAft>
-              <a:defRPr sz="1600">
-                <a:latin typeface="微软雅黑" panose="020B0503020204020204" charset="-122"/>
+              <a:defRPr sz="1700">
+                <a:solidFill>
+                  <a:srgbClr val="2A2E34"/>
+                </a:solidFill>
+                <a:latin typeface="Microsoft YaHei"/>
               </a:defRPr>
             </a:pPr>
             <a:r>
-              <a:t>按 test：部分配置测试准确率可到 0.510，但应以验证集选模</a:t>
+              <a:t>最佳 lr=1.0e-03</a:t>
             </a:r>
           </a:p>
           <a:p>
@@ -3473,12 +3635,15 @@
               <a:spcAft>
                 <a:spcPts val="800"/>
               </a:spcAft>
-              <a:defRPr sz="1600">
-                <a:latin typeface="微软雅黑" panose="020B0503020204020204" charset="-122"/>
+              <a:defRPr sz="1700">
+                <a:solidFill>
+                  <a:srgbClr val="2A2E34"/>
+                </a:solidFill>
+                <a:latin typeface="Microsoft YaHei"/>
               </a:defRPr>
             </a:pPr>
             <a:r>
-              <a:t>Softmax 最佳 test=0.359</a:t>
+              <a:t>最佳 reg=0.001</a:t>
             </a:r>
           </a:p>
           <a:p>
@@ -3486,12 +3651,31 @@
               <a:spcAft>
                 <a:spcPts val="800"/>
               </a:spcAft>
-              <a:defRPr sz="1600">
-                <a:latin typeface="微软雅黑" panose="020B0503020204020204" charset="-122"/>
+              <a:defRPr sz="1700">
+                <a:solidFill>
+                  <a:srgbClr val="2A2E34"/>
+                </a:solidFill>
+                <a:latin typeface="Microsoft YaHei"/>
               </a:defRPr>
             </a:pPr>
             <a:r>
-              <a:t>kNN 最佳 test=0.348</a:t>
+              <a:t>Val Acc=0.605</a:t>
+            </a:r>
+          </a:p>
+          <a:p>
+            <a:pPr>
+              <a:spcAft>
+                <a:spcPts val="800"/>
+              </a:spcAft>
+              <a:defRPr sz="1700">
+                <a:solidFill>
+                  <a:srgbClr val="2A2E34"/>
+                </a:solidFill>
+                <a:latin typeface="Microsoft YaHei"/>
+              </a:defRPr>
+            </a:pPr>
+            <a:r>
+              <a:t>Test Acc=0.576</a:t>
             </a:r>
           </a:p>
         </p:txBody>
@@ -3505,7 +3689,7 @@
 </file>
 
 <file path=ppt/slides/slide11.xml><?xml version="1.0" encoding="utf-8"?>
-<p:sld xmlns:a="http://schemas.openxmlformats.org/drawingml/2006/main" xmlns:r="http://schemas.openxmlformats.org/officeDocument/2006/relationships" xmlns:p="http://schemas.openxmlformats.org/presentationml/2006/main">
+<p:sld xmlns:a="http://schemas.openxmlformats.org/drawingml/2006/main" xmlns:p="http://schemas.openxmlformats.org/presentationml/2006/main" xmlns:r="http://schemas.openxmlformats.org/officeDocument/2006/relationships">
   <p:cSld>
     <p:bg>
       <p:bgPr>
@@ -3530,8 +3714,8 @@
         </p:nvSpPr>
         <p:spPr>
           <a:xfrm>
-            <a:off x="502920" y="256032"/>
-            <a:ext cx="2286000" cy="237744"/>
+            <a:off x="502920" y="228600"/>
+            <a:ext cx="3017520" cy="256032"/>
           </a:xfrm>
           <a:prstGeom prst="rect">
             <a:avLst/>
@@ -3539,7 +3723,7 @@
           <a:noFill/>
         </p:spPr>
         <p:txBody>
-          <a:bodyPr wrap="none">
+          <a:bodyPr wrap="square">
             <a:spAutoFit/>
           </a:bodyPr>
           <a:lstStyle/>
@@ -3547,18 +3731,12 @@
             <a:r>
               <a:rPr sz="900" b="1">
                 <a:solidFill>
-                  <a:srgbClr val="5F6F82"/>
-                </a:solidFill>
-                <a:latin typeface="微软雅黑" panose="020B0503020204020204" charset="-122"/>
+                  <a:srgbClr val="5C6B7E"/>
+                </a:solidFill>
+                <a:latin typeface="Microsoft YaHei"/>
               </a:rPr>
-              <a:t>TAKEAWAYS</a:t>
-            </a:r>
-            <a:endParaRPr sz="900" b="1">
-              <a:solidFill>
-                <a:srgbClr val="5F6F82"/>
-              </a:solidFill>
-              <a:latin typeface="微软雅黑" panose="020B0503020204020204" charset="-122"/>
-            </a:endParaRPr>
+              <a:t>INTERPRETATION</a:t>
+            </a:r>
           </a:p>
         </p:txBody>
       </p:sp>
@@ -3570,8 +3748,8 @@
         </p:nvSpPr>
         <p:spPr>
           <a:xfrm>
-            <a:off x="502920" y="502920"/>
-            <a:ext cx="10424160" cy="502920"/>
+            <a:off x="502920" y="530352"/>
+            <a:ext cx="10881360" cy="502920"/>
           </a:xfrm>
           <a:prstGeom prst="rect">
             <a:avLst/>
@@ -3579,7 +3757,7 @@
           <a:noFill/>
         </p:spPr>
         <p:txBody>
-          <a:bodyPr wrap="none">
+          <a:bodyPr wrap="square">
             <a:spAutoFit/>
           </a:bodyPr>
           <a:lstStyle/>
@@ -3587,18 +3765,12 @@
             <a:r>
               <a:rPr sz="2400" b="1">
                 <a:solidFill>
-                  <a:srgbClr val="1E2328"/>
-                </a:solidFill>
-                <a:latin typeface="微软雅黑" panose="020B0503020204020204" charset="-122"/>
+                  <a:srgbClr val="1A1F24"/>
+                </a:solidFill>
+                <a:latin typeface="Microsoft YaHei"/>
               </a:rPr>
-              <a:t>关键学习收获</a:t>
-            </a:r>
-            <a:endParaRPr sz="2400" b="1">
-              <a:solidFill>
-                <a:srgbClr val="1E2328"/>
-              </a:solidFill>
-              <a:latin typeface="微软雅黑" panose="020B0503020204020204" charset="-122"/>
-            </a:endParaRPr>
+              <a:t>这个补充实验说明了什么</a:t>
+            </a:r>
           </a:p>
         </p:txBody>
       </p:sp>
@@ -3610,8 +3782,8 @@
         </p:nvSpPr>
         <p:spPr>
           <a:xfrm>
-            <a:off x="685800" y="1234440"/>
-            <a:ext cx="10424160" cy="4389120"/>
+            <a:off x="777240" y="1234440"/>
+            <a:ext cx="10424160" cy="4297680"/>
           </a:xfrm>
           <a:prstGeom prst="rect">
             <a:avLst/>
@@ -3619,7 +3791,7 @@
           <a:noFill/>
         </p:spPr>
         <p:txBody>
-          <a:bodyPr wrap="none">
+          <a:bodyPr wrap="square">
             <a:spAutoFit/>
           </a:bodyPr>
           <a:lstStyle/>
@@ -3628,12 +3800,15 @@
               <a:spcAft>
                 <a:spcPts val="800"/>
               </a:spcAft>
-              <a:defRPr sz="1600">
-                <a:latin typeface="微软雅黑" panose="020B0503020204020204" charset="-122"/>
+              <a:defRPr sz="2000">
+                <a:solidFill>
+                  <a:srgbClr val="2A2E34"/>
+                </a:solidFill>
+                <a:latin typeface="Microsoft YaHei"/>
               </a:defRPr>
             </a:pPr>
             <a:r>
-              <a:t>图像分类 pipeline 的核心是数据划分 + 训练 + 验证调参 + 测试评估</a:t>
+              <a:t>图像分类性能不仅取决于模型，也取决于输入表示</a:t>
             </a:r>
           </a:p>
           <a:p>
@@ -3641,12 +3816,15 @@
               <a:spcAft>
                 <a:spcPts val="800"/>
               </a:spcAft>
-              <a:defRPr sz="1600">
-                <a:latin typeface="微软雅黑" panose="020B0503020204020204" charset="-122"/>
+              <a:defRPr sz="2000">
+                <a:solidFill>
+                  <a:srgbClr val="2A2E34"/>
+                </a:solidFill>
+                <a:latin typeface="Microsoft YaHei"/>
               </a:defRPr>
             </a:pPr>
             <a:r>
-              <a:t>向量化 NumPy 实现决定了实验能否高效运行</a:t>
+              <a:t>HOG 把边缘和轮廓编码出来，让分类器看到更接近语义的信号</a:t>
             </a:r>
           </a:p>
           <a:p>
@@ -3654,12 +3832,15 @@
               <a:spcAft>
                 <a:spcPts val="800"/>
               </a:spcAft>
-              <a:defRPr sz="1600">
-                <a:latin typeface="微软雅黑" panose="020B0503020204020204" charset="-122"/>
+              <a:defRPr sz="2000">
+                <a:solidFill>
+                  <a:srgbClr val="2A2E34"/>
+                </a:solidFill>
+                <a:latin typeface="Microsoft YaHei"/>
               </a:defRPr>
             </a:pPr>
             <a:r>
-              <a:t>正则化和学习率会直接决定泛化性能</a:t>
+              <a:t>颜色直方图保留类别相关的颜色统计，比如 frog / ship / truck 的色彩分布差异</a:t>
             </a:r>
           </a:p>
           <a:p>
@@ -3667,25 +3848,15 @@
               <a:spcAft>
                 <a:spcPts val="800"/>
               </a:spcAft>
-              <a:defRPr sz="1600">
-                <a:latin typeface="微软雅黑" panose="020B0503020204020204" charset="-122"/>
+              <a:defRPr sz="2000">
+                <a:solidFill>
+                  <a:srgbClr val="2A2E34"/>
+                </a:solidFill>
+                <a:latin typeface="Microsoft YaHei"/>
               </a:defRPr>
             </a:pPr>
             <a:r>
-              <a:t>raw pixels 能跑通流程，但不是好的视觉表示</a:t>
-            </a:r>
-          </a:p>
-          <a:p>
-            <a:pPr>
-              <a:spcAft>
-                <a:spcPts val="800"/>
-              </a:spcAft>
-              <a:defRPr sz="1600">
-                <a:latin typeface="微软雅黑" panose="020B0503020204020204" charset="-122"/>
-              </a:defRPr>
-            </a:pPr>
-            <a:r>
-              <a:t>非线性模型明显优于线性模型，但还不是 CNN</a:t>
+              <a:t>CNN 的意义更清楚了：它会自动学习比 HOG 更强、更层次化的局部视觉特征</a:t>
             </a:r>
           </a:p>
         </p:txBody>
@@ -3699,7 +3870,7 @@
 </file>
 
 <file path=ppt/slides/slide12.xml><?xml version="1.0" encoding="utf-8"?>
-<p:sld xmlns:a="http://schemas.openxmlformats.org/drawingml/2006/main" xmlns:r="http://schemas.openxmlformats.org/officeDocument/2006/relationships" xmlns:p="http://schemas.openxmlformats.org/presentationml/2006/main">
+<p:sld xmlns:a="http://schemas.openxmlformats.org/drawingml/2006/main" xmlns:p="http://schemas.openxmlformats.org/presentationml/2006/main" xmlns:r="http://schemas.openxmlformats.org/officeDocument/2006/relationships">
   <p:cSld>
     <p:bg>
       <p:bgPr>
@@ -3724,8 +3895,8 @@
         </p:nvSpPr>
         <p:spPr>
           <a:xfrm>
-            <a:off x="502920" y="256032"/>
-            <a:ext cx="2286000" cy="237744"/>
+            <a:off x="502920" y="228600"/>
+            <a:ext cx="3017520" cy="256032"/>
           </a:xfrm>
           <a:prstGeom prst="rect">
             <a:avLst/>
@@ -3733,7 +3904,7 @@
           <a:noFill/>
         </p:spPr>
         <p:txBody>
-          <a:bodyPr wrap="none">
+          <a:bodyPr wrap="square">
             <a:spAutoFit/>
           </a:bodyPr>
           <a:lstStyle/>
@@ -3741,18 +3912,12 @@
             <a:r>
               <a:rPr sz="900" b="1">
                 <a:solidFill>
-                  <a:srgbClr val="5F6F82"/>
-                </a:solidFill>
-                <a:latin typeface="微软雅黑" panose="020B0503020204020204" charset="-122"/>
+                  <a:srgbClr val="5C6B7E"/>
+                </a:solidFill>
+                <a:latin typeface="Microsoft YaHei"/>
               </a:rPr>
-              <a:t>LIMITS</a:t>
-            </a:r>
-            <a:endParaRPr sz="900" b="1">
-              <a:solidFill>
-                <a:srgbClr val="5F6F82"/>
-              </a:solidFill>
-              <a:latin typeface="微软雅黑" panose="020B0503020204020204" charset="-122"/>
-            </a:endParaRPr>
+              <a:t>TAKEAWAYS</a:t>
+            </a:r>
           </a:p>
         </p:txBody>
       </p:sp>
@@ -3764,8 +3929,8 @@
         </p:nvSpPr>
         <p:spPr>
           <a:xfrm>
-            <a:off x="502920" y="502920"/>
-            <a:ext cx="9230995" cy="460375"/>
+            <a:off x="502920" y="530352"/>
+            <a:ext cx="10881360" cy="502920"/>
           </a:xfrm>
           <a:prstGeom prst="rect">
             <a:avLst/>
@@ -3773,7 +3938,7 @@
           <a:noFill/>
         </p:spPr>
         <p:txBody>
-          <a:bodyPr wrap="none">
+          <a:bodyPr wrap="square">
             <a:spAutoFit/>
           </a:bodyPr>
           <a:lstStyle/>
@@ -3781,54 +3946,12 @@
             <a:r>
               <a:rPr sz="2400" b="1">
                 <a:solidFill>
-                  <a:srgbClr val="1E2328"/>
-                </a:solidFill>
-                <a:latin typeface="微软雅黑" panose="020B0503020204020204" charset="-122"/>
+                  <a:srgbClr val="1A1F24"/>
+                </a:solidFill>
+                <a:latin typeface="Microsoft YaHei"/>
               </a:rPr>
-              <a:t>当前局限：还没有进入真正强的图像表示</a:t>
-            </a:r>
-            <a:r>
-              <a:rPr lang="zh-CN" sz="2400" b="1">
-                <a:solidFill>
-                  <a:srgbClr val="1E2328"/>
-                </a:solidFill>
-                <a:latin typeface="微软雅黑" panose="020B0503020204020204" charset="-122"/>
-              </a:rPr>
-              <a:t>（</a:t>
-            </a:r>
-            <a:r>
-              <a:rPr lang="en-US" altLang="zh-CN" sz="2400" b="1">
-                <a:solidFill>
-                  <a:srgbClr val="1E2328"/>
-                </a:solidFill>
-                <a:latin typeface="微软雅黑" panose="020B0503020204020204" charset="-122"/>
-              </a:rPr>
-              <a:t>ASSIGNMENT2</a:t>
-            </a:r>
-            <a:r>
-              <a:rPr lang="zh-CN" altLang="en-US" sz="2400" b="1">
-                <a:solidFill>
-                  <a:srgbClr val="1E2328"/>
-                </a:solidFill>
-                <a:latin typeface="微软雅黑" panose="020B0503020204020204" charset="-122"/>
-              </a:rPr>
-              <a:t>作业</a:t>
-            </a:r>
-            <a:r>
-              <a:rPr lang="zh-CN" sz="2400" b="1">
-                <a:solidFill>
-                  <a:srgbClr val="1E2328"/>
-                </a:solidFill>
-                <a:latin typeface="微软雅黑" panose="020B0503020204020204" charset="-122"/>
-              </a:rPr>
-              <a:t>）</a:t>
-            </a:r>
-            <a:endParaRPr lang="zh-CN" sz="2400" b="1">
-              <a:solidFill>
-                <a:srgbClr val="1E2328"/>
-              </a:solidFill>
-              <a:latin typeface="微软雅黑" panose="020B0503020204020204" charset="-122"/>
-            </a:endParaRPr>
+              <a:t>本周学习收获</a:t>
+            </a:r>
           </a:p>
         </p:txBody>
       </p:sp>
@@ -3840,7 +3963,7 @@
         </p:nvSpPr>
         <p:spPr>
           <a:xfrm>
-            <a:off x="685800" y="1234440"/>
+            <a:off x="777240" y="1234440"/>
             <a:ext cx="10424160" cy="4389120"/>
           </a:xfrm>
           <a:prstGeom prst="rect">
@@ -3849,7 +3972,7 @@
           <a:noFill/>
         </p:spPr>
         <p:txBody>
-          <a:bodyPr wrap="none">
+          <a:bodyPr wrap="square">
             <a:spAutoFit/>
           </a:bodyPr>
           <a:lstStyle/>
@@ -3858,12 +3981,15 @@
               <a:spcAft>
                 <a:spcPts val="800"/>
               </a:spcAft>
-              <a:defRPr sz="1600">
-                <a:latin typeface="微软雅黑" panose="020B0503020204020204" charset="-122"/>
+              <a:defRPr sz="1900">
+                <a:solidFill>
+                  <a:srgbClr val="2A2E34"/>
+                </a:solidFill>
+                <a:latin typeface="Microsoft YaHei"/>
               </a:defRPr>
             </a:pPr>
             <a:r>
-              <a:t>已补跑 HOG / color histogram features</a:t>
+              <a:t>掌握了 CIFAR-10 图像分类 pipeline：数据划分、训练、验证调参、测试评估</a:t>
             </a:r>
           </a:p>
           <a:p>
@@ -3871,12 +3997,15 @@
               <a:spcAft>
                 <a:spcPts val="800"/>
               </a:spcAft>
-              <a:defRPr sz="1600">
-                <a:latin typeface="微软雅黑" panose="020B0503020204020204" charset="-122"/>
+              <a:defRPr sz="1900">
+                <a:solidFill>
+                  <a:srgbClr val="2A2E34"/>
+                </a:solidFill>
+                <a:latin typeface="Microsoft YaHei"/>
               </a:defRPr>
             </a:pPr>
             <a:r>
-              <a:t>FullyConnectedNet 的 dropout / batch normalization 还未展开</a:t>
+              <a:t>理解了 kNN、Softmax、TwoLayerNet 的表达能力差异</a:t>
             </a:r>
           </a:p>
           <a:p>
@@ -3884,12 +4013,15 @@
               <a:spcAft>
                 <a:spcPts val="800"/>
               </a:spcAft>
-              <a:defRPr sz="1600">
-                <a:latin typeface="微软雅黑" panose="020B0503020204020204" charset="-122"/>
+              <a:defRPr sz="1900">
+                <a:solidFill>
+                  <a:srgbClr val="2A2E34"/>
+                </a:solidFill>
+                <a:latin typeface="Microsoft YaHei"/>
               </a:defRPr>
             </a:pPr>
             <a:r>
-              <a:t>测试集使用 1,000 张快速评估，后续可扩到完整 10,000 张</a:t>
+              <a:t>练习了超参数搜索：learning rate、regularization、hidden_dim、epochs</a:t>
             </a:r>
           </a:p>
           <a:p>
@@ -3897,151 +4029,32 @@
               <a:spcAft>
                 <a:spcPts val="800"/>
               </a:spcAft>
-              <a:defRPr sz="1600">
-                <a:latin typeface="微软雅黑" panose="020B0503020204020204" charset="-122"/>
+              <a:defRPr sz="1900">
+                <a:solidFill>
+                  <a:srgbClr val="2A2E34"/>
+                </a:solidFill>
+                <a:latin typeface="Microsoft YaHei"/>
               </a:defRPr>
             </a:pPr>
             <a:r>
-              <a:t>未使用 CNN，因此没有利用图像局部空间结构</a:t>
-            </a:r>
-          </a:p>
-        </p:txBody>
-      </p:sp>
-      <p:sp>
-        <p:nvSpPr>
-          <p:cNvPr id="5" name="文本框 4"/>
-          <p:cNvSpPr txBox="1"/>
-          <p:nvPr/>
-        </p:nvSpPr>
-        <p:spPr>
-          <a:xfrm>
-            <a:off x="685800" y="3804285"/>
-            <a:ext cx="6096000" cy="1630045"/>
-          </a:xfrm>
-          <a:prstGeom prst="rect">
-            <a:avLst/>
-          </a:prstGeom>
-          <a:noFill/>
-        </p:spPr>
-        <p:txBody>
-          <a:bodyPr wrap="square" rtlCol="0" anchor="t">
-            <a:spAutoFit/>
-          </a:bodyPr>
+              <a:t>通过 HOG + color histogram 理解“特征表示”对模型效果的影响</a:t>
+            </a:r>
+          </a:p>
           <a:p>
             <a:pPr>
               <a:spcAft>
                 <a:spcPts val="800"/>
               </a:spcAft>
-              <a:defRPr sz="1600">
-                <a:latin typeface="微软雅黑" panose="020B0503020204020204" charset="-122"/>
+              <a:defRPr sz="1900">
+                <a:solidFill>
+                  <a:srgbClr val="2A2E34"/>
+                </a:solidFill>
+                <a:latin typeface="Microsoft YaHei"/>
               </a:defRPr>
             </a:pPr>
             <a:r>
-              <a:rPr>
-                <a:sym typeface="+mn-ea"/>
-              </a:rPr>
-              <a:t>1. features.ipynb 已补跑：HOG + color histogram</a:t>
-            </a:r>
-            <a:endParaRPr>
-              <a:sym typeface="+mn-ea"/>
-            </a:endParaRPr>
-          </a:p>
-          <a:p>
-            <a:pPr>
-              <a:spcAft>
-                <a:spcPts val="800"/>
-              </a:spcAft>
-              <a:defRPr sz="1600">
-                <a:latin typeface="微软雅黑" panose="020B0503020204020204" charset="-122"/>
-              </a:defRPr>
-            </a:pPr>
-            <a:r>
-              <a:rPr>
-                <a:sym typeface="+mn-ea"/>
-              </a:rPr>
-              <a:t>2. 跑 FullyConnectedNets.ipynb：多层网络、Dropout、BatchNorm</a:t>
-            </a:r>
-            <a:endParaRPr>
-              <a:sym typeface="+mn-ea"/>
-            </a:endParaRPr>
-          </a:p>
-          <a:p>
-            <a:pPr>
-              <a:spcAft>
-                <a:spcPts val="800"/>
-              </a:spcAft>
-              <a:defRPr sz="1600">
-                <a:latin typeface="微软雅黑" panose="020B0503020204020204" charset="-122"/>
-              </a:defRPr>
-            </a:pPr>
-            <a:r>
-              <a:rPr>
-                <a:sym typeface="+mn-ea"/>
-              </a:rPr>
-              <a:t>3. 扩大 TwoLayerNet epoch 与更细调参</a:t>
-            </a:r>
-            <a:endParaRPr>
-              <a:sym typeface="+mn-ea"/>
-            </a:endParaRPr>
-          </a:p>
-          <a:p>
-            <a:pPr>
-              <a:spcAft>
-                <a:spcPts val="800"/>
-              </a:spcAft>
-              <a:defRPr sz="1600">
-                <a:latin typeface="微软雅黑" panose="020B0503020204020204" charset="-122"/>
-              </a:defRPr>
-            </a:pPr>
-            <a:r>
-              <a:rPr>
-                <a:sym typeface="+mn-ea"/>
-              </a:rPr>
-              <a:t>4. 进入 CNN：利用局部感受野和权重共享</a:t>
-            </a:r>
-            <a:endParaRPr lang="zh-CN" altLang="en-US">
-              <a:sym typeface="+mn-ea"/>
-            </a:endParaRPr>
-          </a:p>
-        </p:txBody>
-      </p:sp>
-      <p:sp>
-        <p:nvSpPr>
-          <p:cNvPr id="6" name="TextBox 2"/>
-          <p:cNvSpPr txBox="1"/>
-          <p:nvPr/>
-        </p:nvSpPr>
-        <p:spPr>
-          <a:xfrm>
-            <a:off x="502920" y="3177540"/>
-            <a:ext cx="10424160" cy="502920"/>
-          </a:xfrm>
-          <a:prstGeom prst="rect">
-            <a:avLst/>
-          </a:prstGeom>
-          <a:noFill/>
-        </p:spPr>
-        <p:txBody>
-          <a:bodyPr wrap="none">
-            <a:spAutoFit/>
-          </a:bodyPr>
-          <a:lstStyle/>
-          <a:p>
-            <a:r>
-              <a:rPr sz="2400" b="1">
-                <a:solidFill>
-                  <a:srgbClr val="1E2328"/>
-                </a:solidFill>
-                <a:latin typeface="微软雅黑" panose="020B0503020204020204" charset="-122"/>
-              </a:rPr>
-              <a:t>下一步计划：从 A1 走向更强模型</a:t>
-            </a:r>
-            <a:endParaRPr sz="2400" b="1">
-              <a:solidFill>
-                <a:srgbClr val="1E2328"/>
-              </a:solidFill>
-              <a:latin typeface="微软雅黑" panose="020B0503020204020204" charset="-122"/>
-            </a:endParaRPr>
+              <a:t>为后续 CNN 学习建立了动机：从手工特征走向自动特征学习</a:t>
+            </a:r>
           </a:p>
         </p:txBody>
       </p:sp>
@@ -4079,8 +4092,8 @@
         </p:nvSpPr>
         <p:spPr>
           <a:xfrm>
-            <a:off x="502920" y="256032"/>
-            <a:ext cx="2560320" cy="237744"/>
+            <a:off x="502920" y="228600"/>
+            <a:ext cx="3017520" cy="256032"/>
           </a:xfrm>
           <a:prstGeom prst="rect">
             <a:avLst/>
@@ -4088,7 +4101,7 @@
           <a:noFill/>
         </p:spPr>
         <p:txBody>
-          <a:bodyPr wrap="none">
+          <a:bodyPr wrap="square">
             <a:spAutoFit/>
           </a:bodyPr>
           <a:lstStyle/>
@@ -4096,11 +4109,11 @@
             <a:r>
               <a:rPr sz="900" b="1">
                 <a:solidFill>
-                  <a:srgbClr val="5F6F82"/>
+                  <a:srgbClr val="5C6B7E"/>
                 </a:solidFill>
                 <a:latin typeface="Microsoft YaHei"/>
               </a:rPr>
-              <a:t>IMAGE FEATURES</a:t>
+              <a:t>CURRENT LIMITS</a:t>
             </a:r>
           </a:p>
         </p:txBody>
@@ -4113,8 +4126,8 @@
         </p:nvSpPr>
         <p:spPr>
           <a:xfrm>
-            <a:off x="502920" y="502920"/>
-            <a:ext cx="10698480" cy="502920"/>
+            <a:off x="502920" y="530352"/>
+            <a:ext cx="10881360" cy="502920"/>
           </a:xfrm>
           <a:prstGeom prst="rect">
             <a:avLst/>
@@ -4122,7 +4135,7 @@
           <a:noFill/>
         </p:spPr>
         <p:txBody>
-          <a:bodyPr wrap="none">
+          <a:bodyPr wrap="square">
             <a:spAutoFit/>
           </a:bodyPr>
           <a:lstStyle/>
@@ -4130,11 +4143,11 @@
             <a:r>
               <a:rPr sz="2400" b="1">
                 <a:solidFill>
-                  <a:srgbClr val="1E2328"/>
+                  <a:srgbClr val="1A1F24"/>
                 </a:solidFill>
                 <a:latin typeface="Microsoft YaHei"/>
               </a:rPr>
-              <a:t>补充实验：HOG + Color Histogram</a:t>
+              <a:t>当前仍然保留的局限</a:t>
             </a:r>
           </a:p>
         </p:txBody>
@@ -4147,8 +4160,8 @@
         </p:nvSpPr>
         <p:spPr>
           <a:xfrm>
-            <a:off x="685800" y="1234440"/>
-            <a:ext cx="4663440" cy="4389120"/>
+            <a:off x="777240" y="1234440"/>
+            <a:ext cx="10424160" cy="4389120"/>
           </a:xfrm>
           <a:prstGeom prst="rect">
             <a:avLst/>
@@ -4156,7 +4169,7 @@
           <a:noFill/>
         </p:spPr>
         <p:txBody>
-          <a:bodyPr wrap="none">
+          <a:bodyPr wrap="square">
             <a:spAutoFit/>
           </a:bodyPr>
           <a:lstStyle/>
@@ -4165,12 +4178,15 @@
               <a:spcAft>
                 <a:spcPts val="800"/>
               </a:spcAft>
-              <a:defRPr sz="1500">
+              <a:defRPr sz="2000">
+                <a:solidFill>
+                  <a:srgbClr val="2A2E34"/>
+                </a:solidFill>
                 <a:latin typeface="Microsoft YaHei"/>
               </a:defRPr>
             </a:pPr>
             <a:r>
-              <a:t>A1 后半部分要求比较 raw pixels 与 higher-level representations</a:t>
+              <a:t>测试集仍使用 1,000 张快速评估，后续可扩到完整 10,000 张</a:t>
             </a:r>
           </a:p>
           <a:p>
@@ -4178,12 +4194,15 @@
               <a:spcAft>
                 <a:spcPts val="800"/>
               </a:spcAft>
-              <a:defRPr sz="1500">
+              <a:defRPr sz="2000">
+                <a:solidFill>
+                  <a:srgbClr val="2A2E34"/>
+                </a:solidFill>
                 <a:latin typeface="Microsoft YaHei"/>
               </a:defRPr>
             </a:pPr>
             <a:r>
-              <a:t>本次提取 HOG + HSV color histogram，特征维度 154</a:t>
+              <a:t>FullyConnectedNet 的 dropout / batch normalization 还没有系统展开</a:t>
             </a:r>
           </a:p>
           <a:p>
@@ -4191,12 +4210,15 @@
               <a:spcAft>
                 <a:spcPts val="800"/>
               </a:spcAft>
-              <a:defRPr sz="1500">
+              <a:defRPr sz="2000">
+                <a:solidFill>
+                  <a:srgbClr val="2A2E34"/>
+                </a:solidFill>
                 <a:latin typeface="Microsoft YaHei"/>
               </a:defRPr>
             </a:pPr>
             <a:r>
-              <a:t>HOG 关注边缘和梯度方向，color histogram 关注颜色分布</a:t>
+              <a:t>TwoLayerNet 调参还可以继续更细，例如更多 epoch 和更密集搜索</a:t>
             </a:r>
           </a:p>
           <a:p>
@@ -4204,40 +4226,19 @@
               <a:spcAft>
                 <a:spcPts val="800"/>
               </a:spcAft>
-              <a:defRPr sz="1500">
+              <a:defRPr sz="2000">
+                <a:solidFill>
+                  <a:srgbClr val="2A2E34"/>
+                </a:solidFill>
                 <a:latin typeface="Microsoft YaHei"/>
               </a:defRPr>
             </a:pPr>
             <a:r>
-              <a:t>这一步不是换模型，而是换输入表示</a:t>
-            </a:r>
-          </a:p>
-        </p:txBody>
-      </p:sp>
-      <p:pic>
-        <p:nvPicPr>
-          <p:cNvPr id="5" name="Picture 4" descr="feature_vs_raw_accuracy.png"/>
-          <p:cNvPicPr>
-            <a:picLocks noChangeAspect="1"/>
-          </p:cNvPicPr>
-          <p:nvPr/>
-        </p:nvPicPr>
-        <p:blipFill>
-          <a:blip r:embed="rId2"/>
-          <a:stretch>
-            <a:fillRect/>
-          </a:stretch>
-        </p:blipFill>
-        <p:spPr>
-          <a:xfrm>
-            <a:off x="5577840" y="1097280"/>
-            <a:ext cx="5852160" cy="4023360"/>
-          </a:xfrm>
-          <a:prstGeom prst="rect">
-            <a:avLst/>
-          </a:prstGeom>
-        </p:spPr>
-      </p:pic>
+              <a:t>目前还没有训练 CNN，因此还没有自动利用图像局部空间结构</a:t>
+            </a:r>
+          </a:p>
+        </p:txBody>
+      </p:sp>
     </p:spTree>
   </p:cSld>
   <p:clrMapOvr>
@@ -4272,8 +4273,8 @@
         </p:nvSpPr>
         <p:spPr>
           <a:xfrm>
-            <a:off x="502920" y="256032"/>
-            <a:ext cx="2560320" cy="237744"/>
+            <a:off x="502920" y="228600"/>
+            <a:ext cx="3017520" cy="256032"/>
           </a:xfrm>
           <a:prstGeom prst="rect">
             <a:avLst/>
@@ -4281,7 +4282,7 @@
           <a:noFill/>
         </p:spPr>
         <p:txBody>
-          <a:bodyPr wrap="none">
+          <a:bodyPr wrap="square">
             <a:spAutoFit/>
           </a:bodyPr>
           <a:lstStyle/>
@@ -4289,11 +4290,11 @@
             <a:r>
               <a:rPr sz="900" b="1">
                 <a:solidFill>
-                  <a:srgbClr val="5F6F82"/>
+                  <a:srgbClr val="5C6B7E"/>
                 </a:solidFill>
                 <a:latin typeface="Microsoft YaHei"/>
               </a:rPr>
-              <a:t>FEATURE TUNING</a:t>
+              <a:t>NEXT STEP</a:t>
             </a:r>
           </a:p>
         </p:txBody>
@@ -4306,8 +4307,8 @@
         </p:nvSpPr>
         <p:spPr>
           <a:xfrm>
-            <a:off x="502920" y="502920"/>
-            <a:ext cx="10698480" cy="502920"/>
+            <a:off x="502920" y="530352"/>
+            <a:ext cx="10881360" cy="502920"/>
           </a:xfrm>
           <a:prstGeom prst="rect">
             <a:avLst/>
@@ -4315,7 +4316,7 @@
           <a:noFill/>
         </p:spPr>
         <p:txBody>
-          <a:bodyPr wrap="none">
+          <a:bodyPr wrap="square">
             <a:spAutoFit/>
           </a:bodyPr>
           <a:lstStyle/>
@@ -4323,73 +4324,25 @@
             <a:r>
               <a:rPr sz="2400" b="1">
                 <a:solidFill>
-                  <a:srgbClr val="1E2328"/>
+                  <a:srgbClr val="1A1F24"/>
                 </a:solidFill>
                 <a:latin typeface="Microsoft YaHei"/>
               </a:rPr>
-              <a:t>特征版模型调参结果</a:t>
-            </a:r>
-          </a:p>
-        </p:txBody>
-      </p:sp>
-      <p:pic>
-        <p:nvPicPr>
-          <p:cNvPr id="4" name="Picture 3" descr="features_softmax_hyperparam_heatmap.png"/>
-          <p:cNvPicPr>
-            <a:picLocks noChangeAspect="1"/>
-          </p:cNvPicPr>
-          <p:nvPr/>
-        </p:nvPicPr>
-        <p:blipFill>
-          <a:blip r:embed="rId2"/>
-          <a:stretch>
-            <a:fillRect/>
-          </a:stretch>
-        </p:blipFill>
-        <p:spPr>
-          <a:xfrm>
-            <a:off x="594360" y="1051560"/>
-            <a:ext cx="5303520" cy="3840480"/>
-          </a:xfrm>
-          <a:prstGeom prst="rect">
-            <a:avLst/>
-          </a:prstGeom>
-        </p:spPr>
-      </p:pic>
-      <p:pic>
-        <p:nvPicPr>
-          <p:cNvPr id="5" name="Picture 4" descr="features_twolayer_config_comparison.png"/>
-          <p:cNvPicPr>
-            <a:picLocks noChangeAspect="1"/>
-          </p:cNvPicPr>
-          <p:nvPr/>
-        </p:nvPicPr>
-        <p:blipFill>
-          <a:blip r:embed="rId3"/>
-          <a:stretch>
-            <a:fillRect/>
-          </a:stretch>
-        </p:blipFill>
-        <p:spPr>
-          <a:xfrm>
-            <a:off x="6080760" y="1051560"/>
-            <a:ext cx="5486400" cy="3840480"/>
-          </a:xfrm>
-          <a:prstGeom prst="rect">
-            <a:avLst/>
-          </a:prstGeom>
-        </p:spPr>
-      </p:pic>
-      <p:sp>
-        <p:nvSpPr>
-          <p:cNvPr id="6" name="TextBox 5"/>
+              <a:t>下一步：从 Assignment 1 走向 Assignment 2</a:t>
+            </a:r>
+          </a:p>
+        </p:txBody>
+      </p:sp>
+      <p:sp>
+        <p:nvSpPr>
+          <p:cNvPr id="4" name="TextBox 3"/>
           <p:cNvSpPr txBox="1"/>
           <p:nvPr/>
         </p:nvSpPr>
         <p:spPr>
           <a:xfrm>
-            <a:off x="685800" y="5577840"/>
-            <a:ext cx="10515600" cy="365760"/>
+            <a:off x="777240" y="1234440"/>
+            <a:ext cx="10424160" cy="4389120"/>
           </a:xfrm>
           <a:prstGeom prst="rect">
             <a:avLst/>
@@ -4397,19 +4350,72 @@
           <a:noFill/>
         </p:spPr>
         <p:txBody>
-          <a:bodyPr wrap="none">
+          <a:bodyPr wrap="square">
             <a:spAutoFit/>
           </a:bodyPr>
           <a:lstStyle/>
           <a:p>
-            <a:r>
-              <a:rPr sz="1800" b="1">
-                <a:solidFill>
-                  <a:srgbClr val="4F8968"/>
-                </a:solidFill>
-                <a:latin typeface="Microsoft YaHei"/>
-              </a:rPr>
-              <a:t>Best feature TwoLayerNet: val=0.605, test=0.576</a:t>
+            <a:pPr>
+              <a:spcAft>
+                <a:spcPts val="800"/>
+              </a:spcAft>
+              <a:defRPr sz="2000">
+                <a:solidFill>
+                  <a:srgbClr val="2A2E34"/>
+                </a:solidFill>
+                <a:latin typeface="Microsoft YaHei"/>
+              </a:defRPr>
+            </a:pPr>
+            <a:r>
+              <a:t>继续 FullyConnectedNet：多层网络、Dropout、Batch Normalization</a:t>
+            </a:r>
+          </a:p>
+          <a:p>
+            <a:pPr>
+              <a:spcAft>
+                <a:spcPts val="800"/>
+              </a:spcAft>
+              <a:defRPr sz="2000">
+                <a:solidFill>
+                  <a:srgbClr val="2A2E34"/>
+                </a:solidFill>
+                <a:latin typeface="Microsoft YaHei"/>
+              </a:defRPr>
+            </a:pPr>
+            <a:r>
+              <a:t>进入 CNN：卷积层、池化层、局部感受野、权重共享</a:t>
+            </a:r>
+          </a:p>
+          <a:p>
+            <a:pPr>
+              <a:spcAft>
+                <a:spcPts val="800"/>
+              </a:spcAft>
+              <a:defRPr sz="2000">
+                <a:solidFill>
+                  <a:srgbClr val="2A2E34"/>
+                </a:solidFill>
+                <a:latin typeface="Microsoft YaHei"/>
+              </a:defRPr>
+            </a:pPr>
+            <a:r>
+              <a:t>用 PyTorch 重新实现 CIFAR-10 训练流程</a:t>
+            </a:r>
+          </a:p>
+          <a:p>
+            <a:pPr>
+              <a:spcAft>
+                <a:spcPts val="800"/>
+              </a:spcAft>
+              <a:defRPr sz="2000">
+                <a:solidFill>
+                  <a:srgbClr val="2A2E34"/>
+                </a:solidFill>
+                <a:latin typeface="Microsoft YaHei"/>
+              </a:defRPr>
+            </a:pPr>
+            <a:r>
+              <a:t>目标从“手工特征 + 小网络”过渡到“端到端自动学习图像特征”</a:t>
             </a:r>
           </a:p>
         </p:txBody>
@@ -4448,8 +4454,8 @@
         </p:nvSpPr>
         <p:spPr>
           <a:xfrm>
-            <a:off x="502920" y="256032"/>
-            <a:ext cx="2560320" cy="237744"/>
+            <a:off x="685800" y="1005840"/>
+            <a:ext cx="9601200" cy="594360"/>
           </a:xfrm>
           <a:prstGeom prst="rect">
             <a:avLst/>
@@ -4457,19 +4463,19 @@
           <a:noFill/>
         </p:spPr>
         <p:txBody>
-          <a:bodyPr wrap="none">
+          <a:bodyPr wrap="square">
             <a:spAutoFit/>
           </a:bodyPr>
           <a:lstStyle/>
           <a:p>
             <a:r>
-              <a:rPr sz="900" b="1">
-                <a:solidFill>
-                  <a:srgbClr val="5F6F82"/>
+              <a:rPr sz="3400" b="1">
+                <a:solidFill>
+                  <a:srgbClr val="23282E"/>
                 </a:solidFill>
                 <a:latin typeface="Microsoft YaHei"/>
               </a:rPr>
-              <a:t>UPDATED CONCLUSION</a:t>
+              <a:t>汇报结论</a:t>
             </a:r>
           </a:p>
         </p:txBody>
@@ -4482,8 +4488,8 @@
         </p:nvSpPr>
         <p:spPr>
           <a:xfrm>
-            <a:off x="502920" y="502920"/>
-            <a:ext cx="10698480" cy="502920"/>
+            <a:off x="731520" y="1920240"/>
+            <a:ext cx="10607040" cy="822960"/>
           </a:xfrm>
           <a:prstGeom prst="rect">
             <a:avLst/>
@@ -4491,19 +4497,19 @@
           <a:noFill/>
         </p:spPr>
         <p:txBody>
-          <a:bodyPr wrap="none">
+          <a:bodyPr wrap="square">
             <a:spAutoFit/>
           </a:bodyPr>
           <a:lstStyle/>
           <a:p>
             <a:r>
-              <a:rPr sz="2400" b="1">
-                <a:solidFill>
-                  <a:srgbClr val="1E2328"/>
+              <a:rPr sz="2300" b="1">
+                <a:solidFill>
+                  <a:srgbClr val="23282E"/>
                 </a:solidFill>
                 <a:latin typeface="Microsoft YaHei"/>
               </a:rPr>
-              <a:t>更新后的 Week5 结论</a:t>
+              <a:t>Assignment 1 的价值不是只跑出一个准确率，而是理解图像分类系统由数据、表示、模型、优化和调参共同决定。</a:t>
             </a:r>
           </a:p>
         </p:txBody>
@@ -4516,8 +4522,8 @@
         </p:nvSpPr>
         <p:spPr>
           <a:xfrm>
-            <a:off x="731520" y="1234440"/>
-            <a:ext cx="10424160" cy="4389120"/>
+            <a:off x="868680" y="3154680"/>
+            <a:ext cx="10241280" cy="1828800"/>
           </a:xfrm>
           <a:prstGeom prst="rect">
             <a:avLst/>
@@ -4525,7 +4531,7 @@
           <a:noFill/>
         </p:spPr>
         <p:txBody>
-          <a:bodyPr wrap="none">
+          <a:bodyPr wrap="square">
             <a:spAutoFit/>
           </a:bodyPr>
           <a:lstStyle/>
@@ -4534,12 +4540,15 @@
               <a:spcAft>
                 <a:spcPts val="800"/>
               </a:spcAft>
-              <a:defRPr sz="1800">
+              <a:defRPr sz="2100">
+                <a:solidFill>
+                  <a:srgbClr val="2A2E34"/>
+                </a:solidFill>
                 <a:latin typeface="Microsoft YaHei"/>
               </a:defRPr>
             </a:pPr>
             <a:r>
-              <a:t>Softmax: raw pixels 0.359 -&gt; features 0.420</a:t>
+              <a:t>raw pixels 最佳 TwoLayerNet test acc：0.493</a:t>
             </a:r>
           </a:p>
           <a:p>
@@ -4547,12 +4556,15 @@
               <a:spcAft>
                 <a:spcPts val="800"/>
               </a:spcAft>
-              <a:defRPr sz="1800">
+              <a:defRPr sz="2100">
+                <a:solidFill>
+                  <a:srgbClr val="2A2E34"/>
+                </a:solidFill>
                 <a:latin typeface="Microsoft YaHei"/>
               </a:defRPr>
             </a:pPr>
             <a:r>
-              <a:t>TwoLayerNet: raw pixels 0.493 -&gt; features 0.576</a:t>
+              <a:t>HOG + color histogram 最佳 TwoLayerNet test acc：0.576</a:t>
             </a:r>
           </a:p>
           <a:p>
@@ -4560,25 +4572,15 @@
               <a:spcAft>
                 <a:spcPts val="800"/>
               </a:spcAft>
-              <a:defRPr sz="1800">
+              <a:defRPr sz="2100">
+                <a:solidFill>
+                  <a:srgbClr val="2A2E34"/>
+                </a:solidFill>
                 <a:latin typeface="Microsoft YaHei"/>
               </a:defRPr>
             </a:pPr>
             <a:r>
-              <a:t>手工图像特征能显著提升传统分类器，因为它更接近边缘、颜色、轮廓等视觉语义</a:t>
-            </a:r>
-          </a:p>
-          <a:p>
-            <a:pPr>
-              <a:spcAft>
-                <a:spcPts val="800"/>
-              </a:spcAft>
-              <a:defRPr sz="1800">
-                <a:latin typeface="Microsoft YaHei"/>
-              </a:defRPr>
-            </a:pPr>
-            <a:r>
-              <a:t>CNN 后续要学习的事情，本质上就是自动学习比 HOG 更强的局部图像特征</a:t>
+              <a:t>补充 features 后，Week5 已覆盖 A1 的主要实验主线</a:t>
             </a:r>
           </a:p>
         </p:txBody>
@@ -4592,7 +4594,7 @@
 </file>
 
 <file path=ppt/slides/slide2.xml><?xml version="1.0" encoding="utf-8"?>
-<p:sld xmlns:a="http://schemas.openxmlformats.org/drawingml/2006/main" xmlns:r="http://schemas.openxmlformats.org/officeDocument/2006/relationships" xmlns:p="http://schemas.openxmlformats.org/presentationml/2006/main">
+<p:sld xmlns:a="http://schemas.openxmlformats.org/drawingml/2006/main" xmlns:p="http://schemas.openxmlformats.org/presentationml/2006/main" xmlns:r="http://schemas.openxmlformats.org/officeDocument/2006/relationships">
   <p:cSld>
     <p:bg>
       <p:bgPr>
@@ -4617,8 +4619,8 @@
         </p:nvSpPr>
         <p:spPr>
           <a:xfrm>
-            <a:off x="502920" y="256032"/>
-            <a:ext cx="2286000" cy="237744"/>
+            <a:off x="502920" y="228600"/>
+            <a:ext cx="3017520" cy="256032"/>
           </a:xfrm>
           <a:prstGeom prst="rect">
             <a:avLst/>
@@ -4626,7 +4628,7 @@
           <a:noFill/>
         </p:spPr>
         <p:txBody>
-          <a:bodyPr wrap="none">
+          <a:bodyPr wrap="square">
             <a:spAutoFit/>
           </a:bodyPr>
           <a:lstStyle/>
@@ -4634,18 +4636,12 @@
             <a:r>
               <a:rPr sz="900" b="1">
                 <a:solidFill>
-                  <a:srgbClr val="5F6F82"/>
-                </a:solidFill>
-                <a:latin typeface="微软雅黑" panose="020B0503020204020204" charset="-122"/>
+                  <a:srgbClr val="5C6B7E"/>
+                </a:solidFill>
+                <a:latin typeface="Microsoft YaHei"/>
               </a:rPr>
-              <a:t>DATASET</a:t>
-            </a:r>
-            <a:endParaRPr sz="900" b="1">
-              <a:solidFill>
-                <a:srgbClr val="5F6F82"/>
-              </a:solidFill>
-              <a:latin typeface="微软雅黑" panose="020B0503020204020204" charset="-122"/>
-            </a:endParaRPr>
+              <a:t>ASSIGNMENT 1 SCOPE</a:t>
+            </a:r>
           </a:p>
         </p:txBody>
       </p:sp>
@@ -4657,8 +4653,8 @@
         </p:nvSpPr>
         <p:spPr>
           <a:xfrm>
-            <a:off x="502920" y="502920"/>
-            <a:ext cx="10424160" cy="502920"/>
+            <a:off x="502920" y="530352"/>
+            <a:ext cx="10881360" cy="502920"/>
           </a:xfrm>
           <a:prstGeom prst="rect">
             <a:avLst/>
@@ -4666,7 +4662,7 @@
           <a:noFill/>
         </p:spPr>
         <p:txBody>
-          <a:bodyPr wrap="none">
+          <a:bodyPr wrap="square">
             <a:spAutoFit/>
           </a:bodyPr>
           <a:lstStyle/>
@@ -4674,31 +4670,478 @@
             <a:r>
               <a:rPr sz="2400" b="1">
                 <a:solidFill>
-                  <a:srgbClr val="1E2328"/>
-                </a:solidFill>
-                <a:latin typeface="微软雅黑" panose="020B0503020204020204" charset="-122"/>
+                  <a:srgbClr val="1A1F24"/>
+                </a:solidFill>
+                <a:latin typeface="Microsoft YaHei"/>
               </a:rPr>
-              <a:t>CIFAR-10：10 类 32×32 彩色图像</a:t>
-            </a:r>
-            <a:endParaRPr sz="2400" b="1">
-              <a:solidFill>
-                <a:srgbClr val="1E2328"/>
-              </a:solidFill>
-              <a:latin typeface="微软雅黑" panose="020B0503020204020204" charset="-122"/>
-            </a:endParaRPr>
-          </a:p>
-        </p:txBody>
-      </p:sp>
-      <p:sp>
-        <p:nvSpPr>
-          <p:cNvPr id="4" name="TextBox 3"/>
+              <a:t>Assignment 1 到底要求我们理解什么</a:t>
+            </a:r>
+          </a:p>
+        </p:txBody>
+      </p:sp>
+      <p:graphicFrame>
+        <p:nvGraphicFramePr>
+          <p:cNvPr id="4" name="Table 3"/>
+          <p:cNvGraphicFramePr>
+            <a:graphicFrameLocks noGrp="1"/>
+          </p:cNvGraphicFramePr>
+          <p:nvPr/>
+        </p:nvGraphicFramePr>
+        <p:xfrm>
+          <a:off x="731520" y="1234440"/>
+          <a:ext cx="10698480" cy="4023360"/>
+        </p:xfrm>
+        <a:graphic>
+          <a:graphicData uri="http://schemas.openxmlformats.org/drawingml/2006/table">
+            <a:tbl>
+              <a:tblPr firstRow="1" bandRow="1">
+                <a:tableStyleId>{5C22544A-7EE6-4342-B048-85BDC9FD1C3A}</a:tableStyleId>
+              </a:tblPr>
+              <a:tblGrid>
+                <a:gridCol w="3566160"/>
+                <a:gridCol w="3566160"/>
+                <a:gridCol w="3566160"/>
+              </a:tblGrid>
+              <a:tr h="670560">
+                <a:tc>
+                  <a:txBody>
+                    <a:bodyPr/>
+                    <a:lstStyle/>
+                    <a:p>
+                      <a:pPr algn="ctr"/>
+                      <a:r>
+                        <a:rPr sz="1200" b="1">
+                          <a:solidFill>
+                            <a:srgbClr val="23282E"/>
+                          </a:solidFill>
+                          <a:latin typeface="Microsoft YaHei"/>
+                        </a:rPr>
+                        <a:t>题目</a:t>
+                      </a:r>
+                    </a:p>
+                  </a:txBody>
+                  <a:tcPr>
+                    <a:solidFill>
+                      <a:srgbClr val="EBEFEC"/>
+                    </a:solidFill>
+                  </a:tcPr>
+                </a:tc>
+                <a:tc>
+                  <a:txBody>
+                    <a:bodyPr/>
+                    <a:lstStyle/>
+                    <a:p>
+                      <a:pPr algn="ctr"/>
+                      <a:r>
+                        <a:rPr sz="1200" b="1">
+                          <a:solidFill>
+                            <a:srgbClr val="23282E"/>
+                          </a:solidFill>
+                          <a:latin typeface="Microsoft YaHei"/>
+                        </a:rPr>
+                        <a:t>内容</a:t>
+                      </a:r>
+                    </a:p>
+                  </a:txBody>
+                  <a:tcPr>
+                    <a:solidFill>
+                      <a:srgbClr val="EBEFEC"/>
+                    </a:solidFill>
+                  </a:tcPr>
+                </a:tc>
+                <a:tc>
+                  <a:txBody>
+                    <a:bodyPr/>
+                    <a:lstStyle/>
+                    <a:p>
+                      <a:pPr algn="ctr"/>
+                      <a:r>
+                        <a:rPr sz="1200" b="1">
+                          <a:solidFill>
+                            <a:srgbClr val="23282E"/>
+                          </a:solidFill>
+                          <a:latin typeface="Microsoft YaHei"/>
+                        </a:rPr>
+                        <a:t>本次是否完成</a:t>
+                      </a:r>
+                    </a:p>
+                  </a:txBody>
+                  <a:tcPr>
+                    <a:solidFill>
+                      <a:srgbClr val="EBEFEC"/>
+                    </a:solidFill>
+                  </a:tcPr>
+                </a:tc>
+              </a:tr>
+              <a:tr h="670560">
+                <a:tc>
+                  <a:txBody>
+                    <a:bodyPr/>
+                    <a:lstStyle/>
+                    <a:p>
+                      <a:pPr algn="ctr"/>
+                      <a:r>
+                        <a:rPr sz="1200" b="0">
+                          <a:solidFill>
+                            <a:srgbClr val="23282E"/>
+                          </a:solidFill>
+                          <a:latin typeface="Microsoft YaHei"/>
+                        </a:rPr>
+                        <a:t>Q1</a:t>
+                      </a:r>
+                    </a:p>
+                  </a:txBody>
+                  <a:tcPr>
+                    <a:solidFill>
+                      <a:srgbClr val="FFFFFF"/>
+                    </a:solidFill>
+                  </a:tcPr>
+                </a:tc>
+                <a:tc>
+                  <a:txBody>
+                    <a:bodyPr/>
+                    <a:lstStyle/>
+                    <a:p>
+                      <a:pPr algn="ctr"/>
+                      <a:r>
+                        <a:rPr sz="1200" b="0">
+                          <a:solidFill>
+                            <a:srgbClr val="23282E"/>
+                          </a:solidFill>
+                          <a:latin typeface="Microsoft YaHei"/>
+                        </a:rPr>
+                        <a:t>kNN classifier</a:t>
+                      </a:r>
+                    </a:p>
+                  </a:txBody>
+                  <a:tcPr>
+                    <a:solidFill>
+                      <a:srgbClr val="FFFFFF"/>
+                    </a:solidFill>
+                  </a:tcPr>
+                </a:tc>
+                <a:tc>
+                  <a:txBody>
+                    <a:bodyPr/>
+                    <a:lstStyle/>
+                    <a:p>
+                      <a:pPr algn="ctr"/>
+                      <a:r>
+                        <a:rPr sz="1200" b="0">
+                          <a:solidFill>
+                            <a:srgbClr val="23282E"/>
+                          </a:solidFill>
+                          <a:latin typeface="Microsoft YaHei"/>
+                        </a:rPr>
+                        <a:t>已完成</a:t>
+                      </a:r>
+                    </a:p>
+                  </a:txBody>
+                  <a:tcPr>
+                    <a:solidFill>
+                      <a:srgbClr val="FFFFFF"/>
+                    </a:solidFill>
+                  </a:tcPr>
+                </a:tc>
+              </a:tr>
+              <a:tr h="670560">
+                <a:tc>
+                  <a:txBody>
+                    <a:bodyPr/>
+                    <a:lstStyle/>
+                    <a:p>
+                      <a:pPr algn="ctr"/>
+                      <a:r>
+                        <a:rPr sz="1200" b="0">
+                          <a:solidFill>
+                            <a:srgbClr val="23282E"/>
+                          </a:solidFill>
+                          <a:latin typeface="Microsoft YaHei"/>
+                        </a:rPr>
+                        <a:t>Q2</a:t>
+                      </a:r>
+                    </a:p>
+                  </a:txBody>
+                  <a:tcPr>
+                    <a:solidFill>
+                      <a:srgbClr val="FFFFFF"/>
+                    </a:solidFill>
+                  </a:tcPr>
+                </a:tc>
+                <a:tc>
+                  <a:txBody>
+                    <a:bodyPr/>
+                    <a:lstStyle/>
+                    <a:p>
+                      <a:pPr algn="ctr"/>
+                      <a:r>
+                        <a:rPr sz="1200" b="0">
+                          <a:solidFill>
+                            <a:srgbClr val="23282E"/>
+                          </a:solidFill>
+                          <a:latin typeface="Microsoft YaHei"/>
+                        </a:rPr>
+                        <a:t>Softmax classifier</a:t>
+                      </a:r>
+                    </a:p>
+                  </a:txBody>
+                  <a:tcPr>
+                    <a:solidFill>
+                      <a:srgbClr val="FFFFFF"/>
+                    </a:solidFill>
+                  </a:tcPr>
+                </a:tc>
+                <a:tc>
+                  <a:txBody>
+                    <a:bodyPr/>
+                    <a:lstStyle/>
+                    <a:p>
+                      <a:pPr algn="ctr"/>
+                      <a:r>
+                        <a:rPr sz="1200" b="0">
+                          <a:solidFill>
+                            <a:srgbClr val="23282E"/>
+                          </a:solidFill>
+                          <a:latin typeface="Microsoft YaHei"/>
+                        </a:rPr>
+                        <a:t>已完成</a:t>
+                      </a:r>
+                    </a:p>
+                  </a:txBody>
+                  <a:tcPr>
+                    <a:solidFill>
+                      <a:srgbClr val="FFFFFF"/>
+                    </a:solidFill>
+                  </a:tcPr>
+                </a:tc>
+              </a:tr>
+              <a:tr h="670560">
+                <a:tc>
+                  <a:txBody>
+                    <a:bodyPr/>
+                    <a:lstStyle/>
+                    <a:p>
+                      <a:pPr algn="ctr"/>
+                      <a:r>
+                        <a:rPr sz="1200" b="0">
+                          <a:solidFill>
+                            <a:srgbClr val="23282E"/>
+                          </a:solidFill>
+                          <a:latin typeface="Microsoft YaHei"/>
+                        </a:rPr>
+                        <a:t>Q3</a:t>
+                      </a:r>
+                    </a:p>
+                  </a:txBody>
+                  <a:tcPr>
+                    <a:solidFill>
+                      <a:srgbClr val="FFFFFF"/>
+                    </a:solidFill>
+                  </a:tcPr>
+                </a:tc>
+                <a:tc>
+                  <a:txBody>
+                    <a:bodyPr/>
+                    <a:lstStyle/>
+                    <a:p>
+                      <a:pPr algn="ctr"/>
+                      <a:r>
+                        <a:rPr sz="1200" b="0">
+                          <a:solidFill>
+                            <a:srgbClr val="23282E"/>
+                          </a:solidFill>
+                          <a:latin typeface="Microsoft YaHei"/>
+                        </a:rPr>
+                        <a:t>Two-Layer Neural Network</a:t>
+                      </a:r>
+                    </a:p>
+                  </a:txBody>
+                  <a:tcPr>
+                    <a:solidFill>
+                      <a:srgbClr val="FFFFFF"/>
+                    </a:solidFill>
+                  </a:tcPr>
+                </a:tc>
+                <a:tc>
+                  <a:txBody>
+                    <a:bodyPr/>
+                    <a:lstStyle/>
+                    <a:p>
+                      <a:pPr algn="ctr"/>
+                      <a:r>
+                        <a:rPr sz="1200" b="0">
+                          <a:solidFill>
+                            <a:srgbClr val="23282E"/>
+                          </a:solidFill>
+                          <a:latin typeface="Microsoft YaHei"/>
+                        </a:rPr>
+                        <a:t>已完成</a:t>
+                      </a:r>
+                    </a:p>
+                  </a:txBody>
+                  <a:tcPr>
+                    <a:solidFill>
+                      <a:srgbClr val="FFFFFF"/>
+                    </a:solidFill>
+                  </a:tcPr>
+                </a:tc>
+              </a:tr>
+              <a:tr h="670560">
+                <a:tc>
+                  <a:txBody>
+                    <a:bodyPr/>
+                    <a:lstStyle/>
+                    <a:p>
+                      <a:pPr algn="ctr"/>
+                      <a:r>
+                        <a:rPr sz="1200" b="0">
+                          <a:solidFill>
+                            <a:srgbClr val="23282E"/>
+                          </a:solidFill>
+                          <a:latin typeface="Microsoft YaHei"/>
+                        </a:rPr>
+                        <a:t>Q4</a:t>
+                      </a:r>
+                    </a:p>
+                  </a:txBody>
+                  <a:tcPr>
+                    <a:solidFill>
+                      <a:srgbClr val="FFFFFF"/>
+                    </a:solidFill>
+                  </a:tcPr>
+                </a:tc>
+                <a:tc>
+                  <a:txBody>
+                    <a:bodyPr/>
+                    <a:lstStyle/>
+                    <a:p>
+                      <a:pPr algn="ctr"/>
+                      <a:r>
+                        <a:rPr sz="1200" b="0">
+                          <a:solidFill>
+                            <a:srgbClr val="23282E"/>
+                          </a:solidFill>
+                          <a:latin typeface="Microsoft YaHei"/>
+                        </a:rPr>
+                        <a:t>Higher-level image features</a:t>
+                      </a:r>
+                    </a:p>
+                  </a:txBody>
+                  <a:tcPr>
+                    <a:solidFill>
+                      <a:srgbClr val="FFFFFF"/>
+                    </a:solidFill>
+                  </a:tcPr>
+                </a:tc>
+                <a:tc>
+                  <a:txBody>
+                    <a:bodyPr/>
+                    <a:lstStyle/>
+                    <a:p>
+                      <a:pPr algn="ctr"/>
+                      <a:r>
+                        <a:rPr sz="1200" b="0">
+                          <a:solidFill>
+                            <a:srgbClr val="23282E"/>
+                          </a:solidFill>
+                          <a:latin typeface="Microsoft YaHei"/>
+                        </a:rPr>
+                        <a:t>已补跑</a:t>
+                      </a:r>
+                    </a:p>
+                  </a:txBody>
+                  <a:tcPr>
+                    <a:solidFill>
+                      <a:srgbClr val="FFFFFF"/>
+                    </a:solidFill>
+                  </a:tcPr>
+                </a:tc>
+              </a:tr>
+              <a:tr h="670560">
+                <a:tc>
+                  <a:txBody>
+                    <a:bodyPr/>
+                    <a:lstStyle/>
+                    <a:p>
+                      <a:pPr algn="ctr"/>
+                      <a:r>
+                        <a:rPr sz="1200" b="0">
+                          <a:solidFill>
+                            <a:srgbClr val="23282E"/>
+                          </a:solidFill>
+                          <a:latin typeface="Microsoft YaHei"/>
+                        </a:rPr>
+                        <a:t>Q5</a:t>
+                      </a:r>
+                    </a:p>
+                  </a:txBody>
+                  <a:tcPr>
+                    <a:solidFill>
+                      <a:srgbClr val="FFFFFF"/>
+                    </a:solidFill>
+                  </a:tcPr>
+                </a:tc>
+                <a:tc>
+                  <a:txBody>
+                    <a:bodyPr/>
+                    <a:lstStyle/>
+                    <a:p>
+                      <a:pPr algn="ctr"/>
+                      <a:r>
+                        <a:rPr sz="1200" b="0">
+                          <a:solidFill>
+                            <a:srgbClr val="23282E"/>
+                          </a:solidFill>
+                          <a:latin typeface="Microsoft YaHei"/>
+                        </a:rPr>
+                        <a:t>FullyConnectedNet</a:t>
+                      </a:r>
+                    </a:p>
+                  </a:txBody>
+                  <a:tcPr>
+                    <a:solidFill>
+                      <a:srgbClr val="FFFFFF"/>
+                    </a:solidFill>
+                  </a:tcPr>
+                </a:tc>
+                <a:tc>
+                  <a:txBody>
+                    <a:bodyPr/>
+                    <a:lstStyle/>
+                    <a:p>
+                      <a:pPr algn="ctr"/>
+                      <a:r>
+                        <a:rPr sz="1200" b="0">
+                          <a:solidFill>
+                            <a:srgbClr val="23282E"/>
+                          </a:solidFill>
+                          <a:latin typeface="Microsoft YaHei"/>
+                        </a:rPr>
+                        <a:t>基础验证已跑，dropout/BN 未展开</a:t>
+                      </a:r>
+                    </a:p>
+                  </a:txBody>
+                  <a:tcPr>
+                    <a:solidFill>
+                      <a:srgbClr val="FFFFFF"/>
+                    </a:solidFill>
+                  </a:tcPr>
+                </a:tc>
+              </a:tr>
+            </a:tbl>
+          </a:graphicData>
+        </a:graphic>
+      </p:graphicFrame>
+      <p:sp>
+        <p:nvSpPr>
+          <p:cNvPr id="5" name="TextBox 4"/>
           <p:cNvSpPr txBox="1"/>
           <p:nvPr/>
         </p:nvSpPr>
         <p:spPr>
           <a:xfrm>
-            <a:off x="685800" y="1143000"/>
-            <a:ext cx="4754880" cy="4389120"/>
+            <a:off x="822960" y="5623560"/>
+            <a:ext cx="10332720" cy="411480"/>
           </a:xfrm>
           <a:prstGeom prst="rect">
             <a:avLst/>
@@ -4706,88 +5149,23 @@
           <a:noFill/>
         </p:spPr>
         <p:txBody>
-          <a:bodyPr wrap="none">
+          <a:bodyPr wrap="square">
             <a:spAutoFit/>
           </a:bodyPr>
           <a:lstStyle/>
           <a:p>
-            <a:pPr>
-              <a:spcAft>
-                <a:spcPts val="800"/>
-              </a:spcAft>
-              <a:defRPr sz="1600">
-                <a:latin typeface="微软雅黑" panose="020B0503020204020204" charset="-122"/>
-              </a:defRPr>
-            </a:pPr>
-            <a:r>
-              <a:t>原始数据：50,000 train + 10,000 test</a:t>
-            </a:r>
-          </a:p>
-          <a:p>
-            <a:pPr>
-              <a:spcAft>
-                <a:spcPts val="800"/>
-              </a:spcAft>
-              <a:defRPr sz="1600">
-                <a:latin typeface="微软雅黑" panose="020B0503020204020204" charset="-122"/>
-              </a:defRPr>
-            </a:pPr>
-            <a:r>
-              <a:t>官方 A1 常用划分：49,000 train + 1,000 val</a:t>
-            </a:r>
-          </a:p>
-          <a:p>
-            <a:pPr>
-              <a:spcAft>
-                <a:spcPts val="800"/>
-              </a:spcAft>
-              <a:defRPr sz="1600">
-                <a:latin typeface="微软雅黑" panose="020B0503020204020204" charset="-122"/>
-              </a:defRPr>
-            </a:pPr>
-            <a:r>
-              <a:t>本地复现实验对比：N10000、N20000、N49000</a:t>
-            </a:r>
-          </a:p>
-          <a:p>
-            <a:pPr>
-              <a:spcAft>
-                <a:spcPts val="800"/>
-              </a:spcAft>
-              <a:defRPr sz="1600">
-                <a:latin typeface="微软雅黑" panose="020B0503020204020204" charset="-122"/>
-              </a:defRPr>
-            </a:pPr>
-            <a:r>
-              <a:t>快速评估阶段使用 1,000 张 test 以控制运行时间</a:t>
-            </a:r>
-          </a:p>
-        </p:txBody>
-      </p:sp>
-      <p:pic>
-        <p:nvPicPr>
-          <p:cNvPr id="5" name="Picture 4" descr="data_scale_effect.png"/>
-          <p:cNvPicPr>
-            <a:picLocks noChangeAspect="1"/>
-          </p:cNvPicPr>
-          <p:nvPr/>
-        </p:nvPicPr>
-        <p:blipFill>
-          <a:blip r:embed="rId1"/>
-          <a:stretch>
-            <a:fillRect/>
-          </a:stretch>
-        </p:blipFill>
-        <p:spPr>
-          <a:xfrm>
-            <a:off x="5760720" y="1143000"/>
-            <a:ext cx="5669280" cy="3749039"/>
-          </a:xfrm>
-          <a:prstGeom prst="rect">
-            <a:avLst/>
-          </a:prstGeom>
-        </p:spPr>
-      </p:pic>
+            <a:r>
+              <a:rPr sz="1700" b="1">
+                <a:solidFill>
+                  <a:srgbClr val="4F8968"/>
+                </a:solidFill>
+                <a:latin typeface="Microsoft YaHei"/>
+              </a:rPr>
+              <a:t>这次新增的就是 Q4：不用 raw pixels，而是加入 HOG 和 color histogram。</a:t>
+            </a:r>
+          </a:p>
+        </p:txBody>
+      </p:sp>
     </p:spTree>
   </p:cSld>
   <p:clrMapOvr>
@@ -4797,7 +5175,7 @@
 </file>
 
 <file path=ppt/slides/slide3.xml><?xml version="1.0" encoding="utf-8"?>
-<p:sld xmlns:a="http://schemas.openxmlformats.org/drawingml/2006/main" xmlns:r="http://schemas.openxmlformats.org/officeDocument/2006/relationships" xmlns:p="http://schemas.openxmlformats.org/presentationml/2006/main">
+<p:sld xmlns:a="http://schemas.openxmlformats.org/drawingml/2006/main" xmlns:p="http://schemas.openxmlformats.org/presentationml/2006/main" xmlns:r="http://schemas.openxmlformats.org/officeDocument/2006/relationships">
   <p:cSld>
     <p:bg>
       <p:bgPr>
@@ -4822,8 +5200,8 @@
         </p:nvSpPr>
         <p:spPr>
           <a:xfrm>
-            <a:off x="502920" y="256032"/>
-            <a:ext cx="2286000" cy="237744"/>
+            <a:off x="502920" y="228600"/>
+            <a:ext cx="3017520" cy="256032"/>
           </a:xfrm>
           <a:prstGeom prst="rect">
             <a:avLst/>
@@ -4831,7 +5209,7 @@
           <a:noFill/>
         </p:spPr>
         <p:txBody>
-          <a:bodyPr wrap="none">
+          <a:bodyPr wrap="square">
             <a:spAutoFit/>
           </a:bodyPr>
           <a:lstStyle/>
@@ -4839,18 +5217,12 @@
             <a:r>
               <a:rPr sz="900" b="1">
                 <a:solidFill>
-                  <a:srgbClr val="5F6F82"/>
-                </a:solidFill>
-                <a:latin typeface="微软雅黑" panose="020B0503020204020204" charset="-122"/>
+                  <a:srgbClr val="5C6B7E"/>
+                </a:solidFill>
+                <a:latin typeface="Microsoft YaHei"/>
               </a:rPr>
-              <a:t>WORKFLOW</a:t>
-            </a:r>
-            <a:endParaRPr sz="900" b="1">
-              <a:solidFill>
-                <a:srgbClr val="5F6F82"/>
-              </a:solidFill>
-              <a:latin typeface="微软雅黑" panose="020B0503020204020204" charset="-122"/>
-            </a:endParaRPr>
+              <a:t>DATASET</a:t>
+            </a:r>
           </a:p>
         </p:txBody>
       </p:sp>
@@ -4862,8 +5234,8 @@
         </p:nvSpPr>
         <p:spPr>
           <a:xfrm>
-            <a:off x="502920" y="502920"/>
-            <a:ext cx="10424160" cy="502920"/>
+            <a:off x="502920" y="530352"/>
+            <a:ext cx="10881360" cy="502920"/>
           </a:xfrm>
           <a:prstGeom prst="rect">
             <a:avLst/>
@@ -4871,7 +5243,7 @@
           <a:noFill/>
         </p:spPr>
         <p:txBody>
-          <a:bodyPr wrap="none">
+          <a:bodyPr wrap="square">
             <a:spAutoFit/>
           </a:bodyPr>
           <a:lstStyle/>
@@ -4879,18 +5251,12 @@
             <a:r>
               <a:rPr sz="2400" b="1">
                 <a:solidFill>
-                  <a:srgbClr val="1E2328"/>
-                </a:solidFill>
-                <a:latin typeface="微软雅黑" panose="020B0503020204020204" charset="-122"/>
+                  <a:srgbClr val="1A1F24"/>
+                </a:solidFill>
+                <a:latin typeface="Microsoft YaHei"/>
               </a:rPr>
-              <a:t>实验流程：训练、调参、验证、测试与可视化</a:t>
-            </a:r>
-            <a:endParaRPr sz="2400" b="1">
-              <a:solidFill>
-                <a:srgbClr val="1E2328"/>
-              </a:solidFill>
-              <a:latin typeface="微软雅黑" panose="020B0503020204020204" charset="-122"/>
-            </a:endParaRPr>
+              <a:t>CIFAR-10 与实验划分</a:t>
+            </a:r>
           </a:p>
         </p:txBody>
       </p:sp>
@@ -4903,7 +5269,7 @@
         <p:spPr>
           <a:xfrm>
             <a:off x="685800" y="1234440"/>
-            <a:ext cx="4009390" cy="1732915"/>
+            <a:ext cx="4846320" cy="4023360"/>
           </a:xfrm>
           <a:prstGeom prst="rect">
             <a:avLst/>
@@ -4911,7 +5277,7 @@
           <a:noFill/>
         </p:spPr>
         <p:txBody>
-          <a:bodyPr wrap="none">
+          <a:bodyPr wrap="square">
             <a:spAutoFit/>
           </a:bodyPr>
           <a:lstStyle/>
@@ -4920,12 +5286,15 @@
               <a:spcAft>
                 <a:spcPts val="800"/>
               </a:spcAft>
-              <a:defRPr sz="1600">
-                <a:latin typeface="微软雅黑" panose="020B0503020204020204" charset="-122"/>
+              <a:defRPr sz="1700">
+                <a:solidFill>
+                  <a:srgbClr val="2A2E34"/>
+                </a:solidFill>
+                <a:latin typeface="Microsoft YaHei"/>
               </a:defRPr>
             </a:pPr>
             <a:r>
-              <a:t>1. 加载 CIFAR-10 并做 train/val/test split</a:t>
+              <a:t>CIFAR-10：10 类 32×32 彩色图像</a:t>
             </a:r>
           </a:p>
           <a:p>
@@ -4933,12 +5302,15 @@
               <a:spcAft>
                 <a:spcPts val="800"/>
               </a:spcAft>
-              <a:defRPr sz="1600">
-                <a:latin typeface="微软雅黑" panose="020B0503020204020204" charset="-122"/>
+              <a:defRPr sz="1700">
+                <a:solidFill>
+                  <a:srgbClr val="2A2E34"/>
+                </a:solidFill>
+                <a:latin typeface="Microsoft YaHei"/>
               </a:defRPr>
             </a:pPr>
             <a:r>
-              <a:t>2. 训练 kNN、Softmax、TwoLayerNet</a:t>
+              <a:t>官方数据：50,000 train + 10,000 test</a:t>
             </a:r>
           </a:p>
           <a:p>
@@ -4946,12 +5318,15 @@
               <a:spcAft>
                 <a:spcPts val="800"/>
               </a:spcAft>
-              <a:defRPr sz="1600">
-                <a:latin typeface="微软雅黑" panose="020B0503020204020204" charset="-122"/>
+              <a:defRPr sz="1700">
+                <a:solidFill>
+                  <a:srgbClr val="2A2E34"/>
+                </a:solidFill>
+                <a:latin typeface="Microsoft YaHei"/>
               </a:defRPr>
             </a:pPr>
             <a:r>
-              <a:t>3. 在验证集上选择超参数</a:t>
+              <a:t>A1 常用划分：49,000 train + 1,000 validation</a:t>
             </a:r>
           </a:p>
           <a:p>
@@ -4959,26 +5334,43 @@
               <a:spcAft>
                 <a:spcPts val="800"/>
               </a:spcAft>
-              <a:defRPr sz="1600">
-                <a:latin typeface="微软雅黑" panose="020B0503020204020204" charset="-122"/>
+              <a:defRPr sz="1700">
+                <a:solidFill>
+                  <a:srgbClr val="2A2E34"/>
+                </a:solidFill>
+                <a:latin typeface="Microsoft YaHei"/>
               </a:defRPr>
             </a:pPr>
             <a:r>
-              <a:t>4. 用测试集报告泛化性能</a:t>
-            </a:r>
-          </a:p>
-          <a:p>
-            <a:pPr>
-              <a:spcAft>
-                <a:spcPts val="800"/>
-              </a:spcAft>
-              <a:defRPr sz="1600">
-                <a:latin typeface="微软雅黑" panose="020B0503020204020204" charset="-122"/>
-              </a:defRPr>
-            </a:pPr>
-          </a:p>
-        </p:txBody>
-      </p:sp>
+              <a:t>本地快速评估：使用 1,000 张 test 做模型对比</a:t>
+            </a:r>
+          </a:p>
+        </p:txBody>
+      </p:sp>
+      <p:pic>
+        <p:nvPicPr>
+          <p:cNvPr id="5" name="Picture 4" descr="data_scale_effect.png"/>
+          <p:cNvPicPr>
+            <a:picLocks noChangeAspect="1"/>
+          </p:cNvPicPr>
+          <p:nvPr/>
+        </p:nvPicPr>
+        <p:blipFill>
+          <a:blip r:embed="rId2"/>
+          <a:stretch>
+            <a:fillRect/>
+          </a:stretch>
+        </p:blipFill>
+        <p:spPr>
+          <a:xfrm>
+            <a:off x="5806440" y="1143000"/>
+            <a:ext cx="5486400" cy="3840480"/>
+          </a:xfrm>
+          <a:prstGeom prst="rect">
+            <a:avLst/>
+          </a:prstGeom>
+        </p:spPr>
+      </p:pic>
     </p:spTree>
   </p:cSld>
   <p:clrMapOvr>
@@ -4988,7 +5380,7 @@
 </file>
 
 <file path=ppt/slides/slide4.xml><?xml version="1.0" encoding="utf-8"?>
-<p:sld xmlns:a="http://schemas.openxmlformats.org/drawingml/2006/main" xmlns:r="http://schemas.openxmlformats.org/officeDocument/2006/relationships" xmlns:p="http://schemas.openxmlformats.org/presentationml/2006/main">
+<p:sld xmlns:a="http://schemas.openxmlformats.org/drawingml/2006/main" xmlns:p="http://schemas.openxmlformats.org/presentationml/2006/main" xmlns:r="http://schemas.openxmlformats.org/officeDocument/2006/relationships">
   <p:cSld>
     <p:bg>
       <p:bgPr>
@@ -5013,8 +5405,8 @@
         </p:nvSpPr>
         <p:spPr>
           <a:xfrm>
-            <a:off x="502920" y="256032"/>
-            <a:ext cx="2286000" cy="237744"/>
+            <a:off x="502920" y="228600"/>
+            <a:ext cx="3017520" cy="256032"/>
           </a:xfrm>
           <a:prstGeom prst="rect">
             <a:avLst/>
@@ -5022,7 +5414,7 @@
           <a:noFill/>
         </p:spPr>
         <p:txBody>
-          <a:bodyPr wrap="none">
+          <a:bodyPr wrap="square">
             <a:spAutoFit/>
           </a:bodyPr>
           <a:lstStyle/>
@@ -5030,18 +5422,12 @@
             <a:r>
               <a:rPr sz="900" b="1">
                 <a:solidFill>
-                  <a:srgbClr val="5F6F82"/>
-                </a:solidFill>
-                <a:latin typeface="微软雅黑" panose="020B0503020204020204" charset="-122"/>
+                  <a:srgbClr val="5C6B7E"/>
+                </a:solidFill>
+                <a:latin typeface="Microsoft YaHei"/>
               </a:rPr>
-              <a:t>KNN</a:t>
-            </a:r>
-            <a:endParaRPr sz="900" b="1">
-              <a:solidFill>
-                <a:srgbClr val="5F6F82"/>
-              </a:solidFill>
-              <a:latin typeface="微软雅黑" panose="020B0503020204020204" charset="-122"/>
-            </a:endParaRPr>
+              <a:t>WORKFLOW</a:t>
+            </a:r>
           </a:p>
         </p:txBody>
       </p:sp>
@@ -5053,8 +5439,8 @@
         </p:nvSpPr>
         <p:spPr>
           <a:xfrm>
-            <a:off x="502920" y="502920"/>
-            <a:ext cx="10424160" cy="502920"/>
+            <a:off x="502920" y="530352"/>
+            <a:ext cx="10881360" cy="502920"/>
           </a:xfrm>
           <a:prstGeom prst="rect">
             <a:avLst/>
@@ -5062,7 +5448,7 @@
           <a:noFill/>
         </p:spPr>
         <p:txBody>
-          <a:bodyPr wrap="none">
+          <a:bodyPr wrap="square">
             <a:spAutoFit/>
           </a:bodyPr>
           <a:lstStyle/>
@@ -5070,18 +5456,12 @@
             <a:r>
               <a:rPr sz="2400" b="1">
                 <a:solidFill>
-                  <a:srgbClr val="1E2328"/>
-                </a:solidFill>
-                <a:latin typeface="微软雅黑" panose="020B0503020204020204" charset="-122"/>
+                  <a:srgbClr val="1A1F24"/>
+                </a:solidFill>
+                <a:latin typeface="Microsoft YaHei"/>
               </a:rPr>
-              <a:t>kNN：简单但被原始像素距离限制</a:t>
-            </a:r>
-            <a:endParaRPr sz="2400" b="1">
-              <a:solidFill>
-                <a:srgbClr val="1E2328"/>
-              </a:solidFill>
-              <a:latin typeface="微软雅黑" panose="020B0503020204020204" charset="-122"/>
-            </a:endParaRPr>
+              <a:t>实验流程：训练、调参、验证、测试、可视化</a:t>
+            </a:r>
           </a:p>
         </p:txBody>
       </p:sp>
@@ -5093,8 +5473,8 @@
         </p:nvSpPr>
         <p:spPr>
           <a:xfrm>
-            <a:off x="640080" y="1143000"/>
-            <a:ext cx="4572000" cy="4389120"/>
+            <a:off x="822960" y="1234440"/>
+            <a:ext cx="10241280" cy="4389120"/>
           </a:xfrm>
           <a:prstGeom prst="rect">
             <a:avLst/>
@@ -5102,7 +5482,7 @@
           <a:noFill/>
         </p:spPr>
         <p:txBody>
-          <a:bodyPr wrap="none">
+          <a:bodyPr wrap="square">
             <a:spAutoFit/>
           </a:bodyPr>
           <a:lstStyle/>
@@ -5111,12 +5491,15 @@
               <a:spcAft>
                 <a:spcPts val="800"/>
               </a:spcAft>
-              <a:defRPr sz="1600">
-                <a:latin typeface="微软雅黑" panose="020B0503020204020204" charset="-122"/>
+              <a:defRPr sz="1900">
+                <a:solidFill>
+                  <a:srgbClr val="2A2E34"/>
+                </a:solidFill>
+                <a:latin typeface="Microsoft YaHei"/>
               </a:defRPr>
             </a:pPr>
             <a:r>
-              <a:t>N49000 最佳 k=5</a:t>
+              <a:t>1. 下载 CIFAR-10 并构造 train / validation / test split</a:t>
             </a:r>
           </a:p>
           <a:p>
@@ -5124,12 +5507,15 @@
               <a:spcAft>
                 <a:spcPts val="800"/>
               </a:spcAft>
-              <a:defRPr sz="1600">
-                <a:latin typeface="微软雅黑" panose="020B0503020204020204" charset="-122"/>
+              <a:defRPr sz="1900">
+                <a:solidFill>
+                  <a:srgbClr val="2A2E34"/>
+                </a:solidFill>
+                <a:latin typeface="Microsoft YaHei"/>
               </a:defRPr>
             </a:pPr>
             <a:r>
-              <a:t>验证准确率 0.326，测试准确率 0.348</a:t>
+              <a:t>2. 先跑 raw pixels 基线：kNN、Softmax、TwoLayerNet</a:t>
             </a:r>
           </a:p>
           <a:p>
@@ -5137,12 +5523,15 @@
               <a:spcAft>
                 <a:spcPts val="800"/>
               </a:spcAft>
-              <a:defRPr sz="1600">
-                <a:latin typeface="微软雅黑" panose="020B0503020204020204" charset="-122"/>
+              <a:defRPr sz="1900">
+                <a:solidFill>
+                  <a:srgbClr val="2A2E34"/>
+                </a:solidFill>
+                <a:latin typeface="Microsoft YaHei"/>
               </a:defRPr>
             </a:pPr>
             <a:r>
-              <a:t>几乎没有训练成本，但推理要比较所有训练样本</a:t>
+              <a:t>3. 再跑 image features：HOG + HSV color histogram</a:t>
             </a:r>
           </a:p>
           <a:p>
@@ -5150,40 +5539,35 @@
               <a:spcAft>
                 <a:spcPts val="800"/>
               </a:spcAft>
-              <a:defRPr sz="1600">
-                <a:latin typeface="微软雅黑" panose="020B0503020204020204" charset="-122"/>
+              <a:defRPr sz="1900">
+                <a:solidFill>
+                  <a:srgbClr val="2A2E34"/>
+                </a:solidFill>
+                <a:latin typeface="Microsoft YaHei"/>
               </a:defRPr>
             </a:pPr>
             <a:r>
-              <a:t>在高维原始像素空间中，L2 距离不稳定</a:t>
-            </a:r>
-          </a:p>
-        </p:txBody>
-      </p:sp>
-      <p:pic>
-        <p:nvPicPr>
-          <p:cNvPr id="5" name="Picture 4" descr="runtime_comparison.png"/>
-          <p:cNvPicPr>
-            <a:picLocks noChangeAspect="1"/>
-          </p:cNvPicPr>
-          <p:nvPr/>
-        </p:nvPicPr>
-        <p:blipFill>
-          <a:blip r:embed="rId1"/>
-          <a:stretch>
-            <a:fillRect/>
-          </a:stretch>
-        </p:blipFill>
-        <p:spPr>
-          <a:xfrm>
-            <a:off x="5577840" y="1188720"/>
-            <a:ext cx="5943600" cy="4023360"/>
-          </a:xfrm>
-          <a:prstGeom prst="rect">
-            <a:avLst/>
-          </a:prstGeom>
-        </p:spPr>
-      </p:pic>
+              <a:t>4. 所有模型用 validation accuracy 选超参数</a:t>
+            </a:r>
+          </a:p>
+          <a:p>
+            <a:pPr>
+              <a:spcAft>
+                <a:spcPts val="800"/>
+              </a:spcAft>
+              <a:defRPr sz="1900">
+                <a:solidFill>
+                  <a:srgbClr val="2A2E34"/>
+                </a:solidFill>
+                <a:latin typeface="Microsoft YaHei"/>
+              </a:defRPr>
+            </a:pPr>
+            <a:r>
+              <a:t>5. 最后只用 test accuracy 汇报泛化表现</a:t>
+            </a:r>
+          </a:p>
+        </p:txBody>
+      </p:sp>
     </p:spTree>
   </p:cSld>
   <p:clrMapOvr>
@@ -5193,7 +5577,7 @@
 </file>
 
 <file path=ppt/slides/slide5.xml><?xml version="1.0" encoding="utf-8"?>
-<p:sld xmlns:a="http://schemas.openxmlformats.org/drawingml/2006/main" xmlns:r="http://schemas.openxmlformats.org/officeDocument/2006/relationships" xmlns:p="http://schemas.openxmlformats.org/presentationml/2006/main">
+<p:sld xmlns:a="http://schemas.openxmlformats.org/drawingml/2006/main" xmlns:p="http://schemas.openxmlformats.org/presentationml/2006/main" xmlns:r="http://schemas.openxmlformats.org/officeDocument/2006/relationships">
   <p:cSld>
     <p:bg>
       <p:bgPr>
@@ -5218,8 +5602,8 @@
         </p:nvSpPr>
         <p:spPr>
           <a:xfrm>
-            <a:off x="502920" y="256032"/>
-            <a:ext cx="2286000" cy="237744"/>
+            <a:off x="502920" y="228600"/>
+            <a:ext cx="3017520" cy="256032"/>
           </a:xfrm>
           <a:prstGeom prst="rect">
             <a:avLst/>
@@ -5227,7 +5611,7 @@
           <a:noFill/>
         </p:spPr>
         <p:txBody>
-          <a:bodyPr wrap="none">
+          <a:bodyPr wrap="square">
             <a:spAutoFit/>
           </a:bodyPr>
           <a:lstStyle/>
@@ -5235,18 +5619,12 @@
             <a:r>
               <a:rPr sz="900" b="1">
                 <a:solidFill>
-                  <a:srgbClr val="5F6F82"/>
-                </a:solidFill>
-                <a:latin typeface="微软雅黑" panose="020B0503020204020204" charset="-122"/>
+                  <a:srgbClr val="5C6B7E"/>
+                </a:solidFill>
+                <a:latin typeface="Microsoft YaHei"/>
               </a:rPr>
-              <a:t>SOFTMAX</a:t>
-            </a:r>
-            <a:endParaRPr sz="900" b="1">
-              <a:solidFill>
-                <a:srgbClr val="5F6F82"/>
-              </a:solidFill>
-              <a:latin typeface="微软雅黑" panose="020B0503020204020204" charset="-122"/>
-            </a:endParaRPr>
+              <a:t>RAW PIXELS</a:t>
+            </a:r>
           </a:p>
         </p:txBody>
       </p:sp>
@@ -5258,8 +5636,8 @@
         </p:nvSpPr>
         <p:spPr>
           <a:xfrm>
-            <a:off x="502920" y="502920"/>
-            <a:ext cx="10424160" cy="502920"/>
+            <a:off x="502920" y="530352"/>
+            <a:ext cx="10881360" cy="502920"/>
           </a:xfrm>
           <a:prstGeom prst="rect">
             <a:avLst/>
@@ -5267,7 +5645,7 @@
           <a:noFill/>
         </p:spPr>
         <p:txBody>
-          <a:bodyPr wrap="none">
+          <a:bodyPr wrap="square">
             <a:spAutoFit/>
           </a:bodyPr>
           <a:lstStyle/>
@@ -5275,114 +5653,437 @@
             <a:r>
               <a:rPr sz="2400" b="1">
                 <a:solidFill>
-                  <a:srgbClr val="1E2328"/>
-                </a:solidFill>
-                <a:latin typeface="微软雅黑" panose="020B0503020204020204" charset="-122"/>
+                  <a:srgbClr val="1A1F24"/>
+                </a:solidFill>
+                <a:latin typeface="Microsoft YaHei"/>
               </a:rPr>
-              <a:t>Softmax：线性分类器受益于调参和更多数据</a:t>
-            </a:r>
-            <a:endParaRPr sz="2400" b="1">
-              <a:solidFill>
-                <a:srgbClr val="1E2328"/>
-              </a:solidFill>
-              <a:latin typeface="微软雅黑" panose="020B0503020204020204" charset="-122"/>
-            </a:endParaRPr>
-          </a:p>
-        </p:txBody>
-      </p:sp>
-      <p:sp>
-        <p:nvSpPr>
-          <p:cNvPr id="4" name="TextBox 3"/>
-          <p:cNvSpPr txBox="1"/>
+              <a:t>Raw pixels 基线结果</a:t>
+            </a:r>
+          </a:p>
+        </p:txBody>
+      </p:sp>
+      <p:graphicFrame>
+        <p:nvGraphicFramePr>
+          <p:cNvPr id="4" name="Table 3"/>
+          <p:cNvGraphicFramePr>
+            <a:graphicFrameLocks noGrp="1"/>
+          </p:cNvGraphicFramePr>
           <p:nvPr/>
-        </p:nvSpPr>
-        <p:spPr>
-          <a:xfrm>
-            <a:off x="594360" y="1143000"/>
-            <a:ext cx="4114800" cy="4389120"/>
-          </a:xfrm>
-          <a:prstGeom prst="rect">
-            <a:avLst/>
-          </a:prstGeom>
-          <a:noFill/>
-        </p:spPr>
-        <p:txBody>
-          <a:bodyPr wrap="none">
-            <a:spAutoFit/>
-          </a:bodyPr>
-          <a:lstStyle/>
-          <a:p>
-            <a:pPr>
-              <a:spcAft>
-                <a:spcPts val="800"/>
-              </a:spcAft>
-              <a:defRPr sz="1600">
-                <a:latin typeface="微软雅黑" panose="020B0503020204020204" charset="-122"/>
-              </a:defRPr>
-            </a:pPr>
-            <a:r>
-              <a:t>N49000 最佳 lr=5.0e-07</a:t>
-            </a:r>
-          </a:p>
-          <a:p>
-            <a:pPr>
-              <a:spcAft>
-                <a:spcPts val="800"/>
-              </a:spcAft>
-              <a:defRPr sz="1600">
-                <a:latin typeface="微软雅黑" panose="020B0503020204020204" charset="-122"/>
-              </a:defRPr>
-            </a:pPr>
-            <a:r>
-              <a:t>最佳 reg=5000</a:t>
-            </a:r>
-          </a:p>
-          <a:p>
-            <a:pPr>
-              <a:spcAft>
-                <a:spcPts val="800"/>
-              </a:spcAft>
-              <a:defRPr sz="1600">
-                <a:latin typeface="微软雅黑" panose="020B0503020204020204" charset="-122"/>
-              </a:defRPr>
-            </a:pPr>
-            <a:r>
-              <a:t>验证准确率 0.383，测试准确率 0.359</a:t>
-            </a:r>
-          </a:p>
-          <a:p>
-            <a:pPr>
-              <a:spcAft>
-                <a:spcPts val="800"/>
-              </a:spcAft>
-              <a:defRPr sz="1600">
-                <a:latin typeface="微软雅黑" panose="020B0503020204020204" charset="-122"/>
-              </a:defRPr>
-            </a:pPr>
-            <a:r>
-              <a:t>线性决策边界仍限制了上限</a:t>
-            </a:r>
-          </a:p>
-        </p:txBody>
-      </p:sp>
+        </p:nvGraphicFramePr>
+        <p:xfrm>
+          <a:off x="685800" y="1234440"/>
+          <a:ext cx="10789920" cy="1920240"/>
+        </p:xfrm>
+        <a:graphic>
+          <a:graphicData uri="http://schemas.openxmlformats.org/drawingml/2006/table">
+            <a:tbl>
+              <a:tblPr firstRow="1" bandRow="1">
+                <a:tableStyleId>{5C22544A-7EE6-4342-B048-85BDC9FD1C3A}</a:tableStyleId>
+              </a:tblPr>
+              <a:tblGrid>
+                <a:gridCol w="2697480"/>
+                <a:gridCol w="2697480"/>
+                <a:gridCol w="2697480"/>
+                <a:gridCol w="2697480"/>
+              </a:tblGrid>
+              <a:tr h="480060">
+                <a:tc>
+                  <a:txBody>
+                    <a:bodyPr/>
+                    <a:lstStyle/>
+                    <a:p>
+                      <a:pPr algn="ctr"/>
+                      <a:r>
+                        <a:rPr sz="1200" b="1">
+                          <a:solidFill>
+                            <a:srgbClr val="23282E"/>
+                          </a:solidFill>
+                          <a:latin typeface="Microsoft YaHei"/>
+                        </a:rPr>
+                        <a:t>模型</a:t>
+                      </a:r>
+                    </a:p>
+                  </a:txBody>
+                  <a:tcPr>
+                    <a:solidFill>
+                      <a:srgbClr val="EBEFEC"/>
+                    </a:solidFill>
+                  </a:tcPr>
+                </a:tc>
+                <a:tc>
+                  <a:txBody>
+                    <a:bodyPr/>
+                    <a:lstStyle/>
+                    <a:p>
+                      <a:pPr algn="ctr"/>
+                      <a:r>
+                        <a:rPr sz="1200" b="1">
+                          <a:solidFill>
+                            <a:srgbClr val="23282E"/>
+                          </a:solidFill>
+                          <a:latin typeface="Microsoft YaHei"/>
+                        </a:rPr>
+                        <a:t>最佳参数</a:t>
+                      </a:r>
+                    </a:p>
+                  </a:txBody>
+                  <a:tcPr>
+                    <a:solidFill>
+                      <a:srgbClr val="EBEFEC"/>
+                    </a:solidFill>
+                  </a:tcPr>
+                </a:tc>
+                <a:tc>
+                  <a:txBody>
+                    <a:bodyPr/>
+                    <a:lstStyle/>
+                    <a:p>
+                      <a:pPr algn="ctr"/>
+                      <a:r>
+                        <a:rPr sz="1200" b="1">
+                          <a:solidFill>
+                            <a:srgbClr val="23282E"/>
+                          </a:solidFill>
+                          <a:latin typeface="Microsoft YaHei"/>
+                        </a:rPr>
+                        <a:t>Val Acc</a:t>
+                      </a:r>
+                    </a:p>
+                  </a:txBody>
+                  <a:tcPr>
+                    <a:solidFill>
+                      <a:srgbClr val="EBEFEC"/>
+                    </a:solidFill>
+                  </a:tcPr>
+                </a:tc>
+                <a:tc>
+                  <a:txBody>
+                    <a:bodyPr/>
+                    <a:lstStyle/>
+                    <a:p>
+                      <a:pPr algn="ctr"/>
+                      <a:r>
+                        <a:rPr sz="1200" b="1">
+                          <a:solidFill>
+                            <a:srgbClr val="23282E"/>
+                          </a:solidFill>
+                          <a:latin typeface="Microsoft YaHei"/>
+                        </a:rPr>
+                        <a:t>Test Acc</a:t>
+                      </a:r>
+                    </a:p>
+                  </a:txBody>
+                  <a:tcPr>
+                    <a:solidFill>
+                      <a:srgbClr val="EBEFEC"/>
+                    </a:solidFill>
+                  </a:tcPr>
+                </a:tc>
+              </a:tr>
+              <a:tr h="480060">
+                <a:tc>
+                  <a:txBody>
+                    <a:bodyPr/>
+                    <a:lstStyle/>
+                    <a:p>
+                      <a:pPr algn="ctr"/>
+                      <a:r>
+                        <a:rPr sz="1200" b="0">
+                          <a:solidFill>
+                            <a:srgbClr val="23282E"/>
+                          </a:solidFill>
+                          <a:latin typeface="Microsoft YaHei"/>
+                        </a:rPr>
+                        <a:t>kNN</a:t>
+                      </a:r>
+                    </a:p>
+                  </a:txBody>
+                  <a:tcPr>
+                    <a:solidFill>
+                      <a:srgbClr val="FFFFFF"/>
+                    </a:solidFill>
+                  </a:tcPr>
+                </a:tc>
+                <a:tc>
+                  <a:txBody>
+                    <a:bodyPr/>
+                    <a:lstStyle/>
+                    <a:p>
+                      <a:pPr algn="ctr"/>
+                      <a:r>
+                        <a:rPr sz="1200" b="0">
+                          <a:solidFill>
+                            <a:srgbClr val="23282E"/>
+                          </a:solidFill>
+                          <a:latin typeface="Microsoft YaHei"/>
+                        </a:rPr>
+                        <a:t>k=5</a:t>
+                      </a:r>
+                    </a:p>
+                  </a:txBody>
+                  <a:tcPr>
+                    <a:solidFill>
+                      <a:srgbClr val="FFFFFF"/>
+                    </a:solidFill>
+                  </a:tcPr>
+                </a:tc>
+                <a:tc>
+                  <a:txBody>
+                    <a:bodyPr/>
+                    <a:lstStyle/>
+                    <a:p>
+                      <a:pPr algn="ctr"/>
+                      <a:r>
+                        <a:rPr sz="1200" b="0">
+                          <a:solidFill>
+                            <a:srgbClr val="23282E"/>
+                          </a:solidFill>
+                          <a:latin typeface="Microsoft YaHei"/>
+                        </a:rPr>
+                        <a:t>0.326</a:t>
+                      </a:r>
+                    </a:p>
+                  </a:txBody>
+                  <a:tcPr>
+                    <a:solidFill>
+                      <a:srgbClr val="FFFFFF"/>
+                    </a:solidFill>
+                  </a:tcPr>
+                </a:tc>
+                <a:tc>
+                  <a:txBody>
+                    <a:bodyPr/>
+                    <a:lstStyle/>
+                    <a:p>
+                      <a:pPr algn="ctr"/>
+                      <a:r>
+                        <a:rPr sz="1200" b="0">
+                          <a:solidFill>
+                            <a:srgbClr val="23282E"/>
+                          </a:solidFill>
+                          <a:latin typeface="Microsoft YaHei"/>
+                        </a:rPr>
+                        <a:t>0.348</a:t>
+                      </a:r>
+                    </a:p>
+                  </a:txBody>
+                  <a:tcPr>
+                    <a:solidFill>
+                      <a:srgbClr val="FFFFFF"/>
+                    </a:solidFill>
+                  </a:tcPr>
+                </a:tc>
+              </a:tr>
+              <a:tr h="480060">
+                <a:tc>
+                  <a:txBody>
+                    <a:bodyPr/>
+                    <a:lstStyle/>
+                    <a:p>
+                      <a:pPr algn="ctr"/>
+                      <a:r>
+                        <a:rPr sz="1200" b="0">
+                          <a:solidFill>
+                            <a:srgbClr val="23282E"/>
+                          </a:solidFill>
+                          <a:latin typeface="Microsoft YaHei"/>
+                        </a:rPr>
+                        <a:t>Softmax</a:t>
+                      </a:r>
+                    </a:p>
+                  </a:txBody>
+                  <a:tcPr>
+                    <a:solidFill>
+                      <a:srgbClr val="FFFFFF"/>
+                    </a:solidFill>
+                  </a:tcPr>
+                </a:tc>
+                <a:tc>
+                  <a:txBody>
+                    <a:bodyPr/>
+                    <a:lstStyle/>
+                    <a:p>
+                      <a:pPr algn="ctr"/>
+                      <a:r>
+                        <a:rPr sz="1200" b="0">
+                          <a:solidFill>
+                            <a:srgbClr val="23282E"/>
+                          </a:solidFill>
+                          <a:latin typeface="Microsoft YaHei"/>
+                        </a:rPr>
+                        <a:t>lr=5.0e-07, reg=5000</a:t>
+                      </a:r>
+                    </a:p>
+                  </a:txBody>
+                  <a:tcPr>
+                    <a:solidFill>
+                      <a:srgbClr val="FFFFFF"/>
+                    </a:solidFill>
+                  </a:tcPr>
+                </a:tc>
+                <a:tc>
+                  <a:txBody>
+                    <a:bodyPr/>
+                    <a:lstStyle/>
+                    <a:p>
+                      <a:pPr algn="ctr"/>
+                      <a:r>
+                        <a:rPr sz="1200" b="0">
+                          <a:solidFill>
+                            <a:srgbClr val="23282E"/>
+                          </a:solidFill>
+                          <a:latin typeface="Microsoft YaHei"/>
+                        </a:rPr>
+                        <a:t>0.383</a:t>
+                      </a:r>
+                    </a:p>
+                  </a:txBody>
+                  <a:tcPr>
+                    <a:solidFill>
+                      <a:srgbClr val="FFFFFF"/>
+                    </a:solidFill>
+                  </a:tcPr>
+                </a:tc>
+                <a:tc>
+                  <a:txBody>
+                    <a:bodyPr/>
+                    <a:lstStyle/>
+                    <a:p>
+                      <a:pPr algn="ctr"/>
+                      <a:r>
+                        <a:rPr sz="1200" b="0">
+                          <a:solidFill>
+                            <a:srgbClr val="23282E"/>
+                          </a:solidFill>
+                          <a:latin typeface="Microsoft YaHei"/>
+                        </a:rPr>
+                        <a:t>0.359</a:t>
+                      </a:r>
+                    </a:p>
+                  </a:txBody>
+                  <a:tcPr>
+                    <a:solidFill>
+                      <a:srgbClr val="FFFFFF"/>
+                    </a:solidFill>
+                  </a:tcPr>
+                </a:tc>
+              </a:tr>
+              <a:tr h="480060">
+                <a:tc>
+                  <a:txBody>
+                    <a:bodyPr/>
+                    <a:lstStyle/>
+                    <a:p>
+                      <a:pPr algn="ctr"/>
+                      <a:r>
+                        <a:rPr sz="1200" b="0">
+                          <a:solidFill>
+                            <a:srgbClr val="23282E"/>
+                          </a:solidFill>
+                          <a:latin typeface="Microsoft YaHei"/>
+                        </a:rPr>
+                        <a:t>TwoLayerNet</a:t>
+                      </a:r>
+                    </a:p>
+                  </a:txBody>
+                  <a:tcPr>
+                    <a:solidFill>
+                      <a:srgbClr val="FFFFFF"/>
+                    </a:solidFill>
+                  </a:tcPr>
+                </a:tc>
+                <a:tc>
+                  <a:txBody>
+                    <a:bodyPr/>
+                    <a:lstStyle/>
+                    <a:p>
+                      <a:pPr algn="ctr"/>
+                      <a:r>
+                        <a:rPr sz="1200" b="0">
+                          <a:solidFill>
+                            <a:srgbClr val="23282E"/>
+                          </a:solidFill>
+                          <a:latin typeface="Microsoft YaHei"/>
+                        </a:rPr>
+                        <a:t>H=100, lr=2.5e-04</a:t>
+                      </a:r>
+                    </a:p>
+                  </a:txBody>
+                  <a:tcPr>
+                    <a:solidFill>
+                      <a:srgbClr val="FFFFFF"/>
+                    </a:solidFill>
+                  </a:tcPr>
+                </a:tc>
+                <a:tc>
+                  <a:txBody>
+                    <a:bodyPr/>
+                    <a:lstStyle/>
+                    <a:p>
+                      <a:pPr algn="ctr"/>
+                      <a:r>
+                        <a:rPr sz="1200" b="0">
+                          <a:solidFill>
+                            <a:srgbClr val="23282E"/>
+                          </a:solidFill>
+                          <a:latin typeface="Microsoft YaHei"/>
+                        </a:rPr>
+                        <a:t>0.515</a:t>
+                      </a:r>
+                    </a:p>
+                  </a:txBody>
+                  <a:tcPr>
+                    <a:solidFill>
+                      <a:srgbClr val="FFFFFF"/>
+                    </a:solidFill>
+                  </a:tcPr>
+                </a:tc>
+                <a:tc>
+                  <a:txBody>
+                    <a:bodyPr/>
+                    <a:lstStyle/>
+                    <a:p>
+                      <a:pPr algn="ctr"/>
+                      <a:r>
+                        <a:rPr sz="1200" b="0">
+                          <a:solidFill>
+                            <a:srgbClr val="23282E"/>
+                          </a:solidFill>
+                          <a:latin typeface="Microsoft YaHei"/>
+                        </a:rPr>
+                        <a:t>0.493</a:t>
+                      </a:r>
+                    </a:p>
+                  </a:txBody>
+                  <a:tcPr>
+                    <a:solidFill>
+                      <a:srgbClr val="FFFFFF"/>
+                    </a:solidFill>
+                  </a:tcPr>
+                </a:tc>
+              </a:tr>
+            </a:tbl>
+          </a:graphicData>
+        </a:graphic>
+      </p:graphicFrame>
       <p:pic>
         <p:nvPicPr>
-          <p:cNvPr id="5" name="Picture 4" descr="softmax_hyperparam_heatmap.png"/>
+          <p:cNvPr id="5" name="Picture 4" descr="model_test_accuracy_comparison.png"/>
           <p:cNvPicPr>
             <a:picLocks noChangeAspect="1"/>
           </p:cNvPicPr>
           <p:nvPr/>
         </p:nvPicPr>
         <p:blipFill>
-          <a:blip r:embed="rId1"/>
+          <a:blip r:embed="rId2"/>
           <a:stretch>
             <a:fillRect/>
           </a:stretch>
         </p:blipFill>
         <p:spPr>
           <a:xfrm>
-            <a:off x="4892040" y="1051560"/>
-            <a:ext cx="6583680" cy="4389120"/>
+            <a:off x="1143000" y="3383280"/>
+            <a:ext cx="9784080" cy="2743200"/>
           </a:xfrm>
           <a:prstGeom prst="rect">
             <a:avLst/>
@@ -5398,7 +6099,7 @@
 </file>
 
 <file path=ppt/slides/slide6.xml><?xml version="1.0" encoding="utf-8"?>
-<p:sld xmlns:a="http://schemas.openxmlformats.org/drawingml/2006/main" xmlns:r="http://schemas.openxmlformats.org/officeDocument/2006/relationships" xmlns:p="http://schemas.openxmlformats.org/presentationml/2006/main">
+<p:sld xmlns:a="http://schemas.openxmlformats.org/drawingml/2006/main" xmlns:p="http://schemas.openxmlformats.org/presentationml/2006/main" xmlns:r="http://schemas.openxmlformats.org/officeDocument/2006/relationships">
   <p:cSld>
     <p:bg>
       <p:bgPr>
@@ -5423,8 +6124,8 @@
         </p:nvSpPr>
         <p:spPr>
           <a:xfrm>
-            <a:off x="502920" y="256032"/>
-            <a:ext cx="2286000" cy="237744"/>
+            <a:off x="502920" y="228600"/>
+            <a:ext cx="3017520" cy="256032"/>
           </a:xfrm>
           <a:prstGeom prst="rect">
             <a:avLst/>
@@ -5432,7 +6133,7 @@
           <a:noFill/>
         </p:spPr>
         <p:txBody>
-          <a:bodyPr wrap="none">
+          <a:bodyPr wrap="square">
             <a:spAutoFit/>
           </a:bodyPr>
           <a:lstStyle/>
@@ -5440,18 +6141,12 @@
             <a:r>
               <a:rPr sz="900" b="1">
                 <a:solidFill>
-                  <a:srgbClr val="5F6F82"/>
-                </a:solidFill>
-                <a:latin typeface="微软雅黑" panose="020B0503020204020204" charset="-122"/>
+                  <a:srgbClr val="5C6B7E"/>
+                </a:solidFill>
+                <a:latin typeface="Microsoft YaHei"/>
               </a:rPr>
-              <a:t>TWO-LAYER NET</a:t>
-            </a:r>
-            <a:endParaRPr sz="900" b="1">
-              <a:solidFill>
-                <a:srgbClr val="5F6F82"/>
-              </a:solidFill>
-              <a:latin typeface="微软雅黑" panose="020B0503020204020204" charset="-122"/>
-            </a:endParaRPr>
+              <a:t>RAW PIXELS LIMITS</a:t>
+            </a:r>
           </a:p>
         </p:txBody>
       </p:sp>
@@ -5463,8 +6158,8 @@
         </p:nvSpPr>
         <p:spPr>
           <a:xfrm>
-            <a:off x="502920" y="502920"/>
-            <a:ext cx="10424160" cy="502920"/>
+            <a:off x="502920" y="530352"/>
+            <a:ext cx="10881360" cy="502920"/>
           </a:xfrm>
           <a:prstGeom prst="rect">
             <a:avLst/>
@@ -5472,7 +6167,7 @@
           <a:noFill/>
         </p:spPr>
         <p:txBody>
-          <a:bodyPr wrap="none">
+          <a:bodyPr wrap="square">
             <a:spAutoFit/>
           </a:bodyPr>
           <a:lstStyle/>
@@ -5480,18 +6175,12 @@
             <a:r>
               <a:rPr sz="2400" b="1">
                 <a:solidFill>
-                  <a:srgbClr val="1E2328"/>
-                </a:solidFill>
-                <a:latin typeface="微软雅黑" panose="020B0503020204020204" charset="-122"/>
+                  <a:srgbClr val="1A1F24"/>
+                </a:solidFill>
+                <a:latin typeface="Microsoft YaHei"/>
               </a:rPr>
-              <a:t>TwoLayerNet：非线性隐藏层带来明显提升</a:t>
-            </a:r>
-            <a:endParaRPr sz="2400" b="1">
-              <a:solidFill>
-                <a:srgbClr val="1E2328"/>
-              </a:solidFill>
-              <a:latin typeface="微软雅黑" panose="020B0503020204020204" charset="-122"/>
-            </a:endParaRPr>
+              <a:t>为什么 raw pixels 表现有限</a:t>
+            </a:r>
           </a:p>
         </p:txBody>
       </p:sp>
@@ -5503,8 +6192,8 @@
         </p:nvSpPr>
         <p:spPr>
           <a:xfrm>
-            <a:off x="502920" y="1078992"/>
-            <a:ext cx="4480560" cy="4389120"/>
+            <a:off x="777240" y="1234440"/>
+            <a:ext cx="10424160" cy="4114800"/>
           </a:xfrm>
           <a:prstGeom prst="rect">
             <a:avLst/>
@@ -5512,7 +6201,7 @@
           <a:noFill/>
         </p:spPr>
         <p:txBody>
-          <a:bodyPr wrap="none">
+          <a:bodyPr wrap="square">
             <a:spAutoFit/>
           </a:bodyPr>
           <a:lstStyle/>
@@ -5521,12 +6210,15 @@
               <a:spcAft>
                 <a:spcPts val="800"/>
               </a:spcAft>
-              <a:defRPr sz="1400">
-                <a:latin typeface="微软雅黑" panose="020B0503020204020204" charset="-122"/>
+              <a:defRPr sz="2000">
+                <a:solidFill>
+                  <a:srgbClr val="2A2E34"/>
+                </a:solidFill>
+                <a:latin typeface="Microsoft YaHei"/>
               </a:defRPr>
             </a:pPr>
             <a:r>
-              <a:t>N49000 最佳验证配置：H=100, lr=2.5e-04, reg=0.05</a:t>
+              <a:t>32×32×3 图像被拉平成 3072 维向量后，空间结构被打散</a:t>
             </a:r>
           </a:p>
           <a:p>
@@ -5534,12 +6226,15 @@
               <a:spcAft>
                 <a:spcPts val="800"/>
               </a:spcAft>
-              <a:defRPr sz="1400">
-                <a:latin typeface="微软雅黑" panose="020B0503020204020204" charset="-122"/>
+              <a:defRPr sz="2000">
+                <a:solidFill>
+                  <a:srgbClr val="2A2E34"/>
+                </a:solidFill>
+                <a:latin typeface="Microsoft YaHei"/>
               </a:defRPr>
             </a:pPr>
             <a:r>
-              <a:t>验证准确率 0.515</a:t>
+              <a:t>kNN 的 L2 距离容易受背景、亮度、位置变化影响</a:t>
             </a:r>
           </a:p>
           <a:p>
@@ -5547,12 +6242,15 @@
               <a:spcAft>
                 <a:spcPts val="800"/>
               </a:spcAft>
-              <a:defRPr sz="1400">
-                <a:latin typeface="微软雅黑" panose="020B0503020204020204" charset="-122"/>
+              <a:defRPr sz="2000">
+                <a:solidFill>
+                  <a:srgbClr val="2A2E34"/>
+                </a:solidFill>
+                <a:latin typeface="Microsoft YaHei"/>
               </a:defRPr>
             </a:pPr>
             <a:r>
-              <a:t>隐藏层 + ReLU 学习非线性特征组合</a:t>
+              <a:t>Softmax 只能学习线性类别模板，决策边界表达能力有限</a:t>
             </a:r>
           </a:p>
           <a:p>
@@ -5560,40 +6258,19 @@
               <a:spcAft>
                 <a:spcPts val="800"/>
               </a:spcAft>
-              <a:defRPr sz="1400">
-                <a:latin typeface="微软雅黑" panose="020B0503020204020204" charset="-122"/>
+              <a:defRPr sz="2000">
+                <a:solidFill>
+                  <a:srgbClr val="2A2E34"/>
+                </a:solidFill>
+                <a:latin typeface="Microsoft YaHei"/>
               </a:defRPr>
             </a:pPr>
             <a:r>
-              <a:t>模型容量越大不一定越好，需要正则化与学习率匹配</a:t>
-            </a:r>
-          </a:p>
-        </p:txBody>
-      </p:sp>
-      <p:pic>
-        <p:nvPicPr>
-          <p:cNvPr id="5" name="Picture 4" descr="two_layer_config_comparison.png"/>
-          <p:cNvPicPr>
-            <a:picLocks noChangeAspect="1"/>
-          </p:cNvPicPr>
-          <p:nvPr/>
-        </p:nvPicPr>
-        <p:blipFill>
-          <a:blip r:embed="rId1"/>
-          <a:stretch>
-            <a:fillRect/>
-          </a:stretch>
-        </p:blipFill>
-        <p:spPr>
-          <a:xfrm>
-            <a:off x="5099050" y="1253490"/>
-            <a:ext cx="6650990" cy="4232910"/>
-          </a:xfrm>
-          <a:prstGeom prst="rect">
-            <a:avLst/>
-          </a:prstGeom>
-        </p:spPr>
-      </p:pic>
+              <a:t>TwoLayerNet 加入非线性后提升明显，但仍没有显式利用局部图像结构</a:t>
+            </a:r>
+          </a:p>
+        </p:txBody>
+      </p:sp>
     </p:spTree>
   </p:cSld>
   <p:clrMapOvr>
@@ -5603,7 +6280,7 @@
 </file>
 
 <file path=ppt/slides/slide7.xml><?xml version="1.0" encoding="utf-8"?>
-<p:sld xmlns:a="http://schemas.openxmlformats.org/drawingml/2006/main" xmlns:r="http://schemas.openxmlformats.org/officeDocument/2006/relationships" xmlns:p="http://schemas.openxmlformats.org/presentationml/2006/main">
+<p:sld xmlns:a="http://schemas.openxmlformats.org/drawingml/2006/main" xmlns:p="http://schemas.openxmlformats.org/presentationml/2006/main" xmlns:r="http://schemas.openxmlformats.org/officeDocument/2006/relationships">
   <p:cSld>
     <p:bg>
       <p:bgPr>
@@ -5628,8 +6305,8 @@
         </p:nvSpPr>
         <p:spPr>
           <a:xfrm>
-            <a:off x="502920" y="256032"/>
-            <a:ext cx="2286000" cy="237744"/>
+            <a:off x="502920" y="228600"/>
+            <a:ext cx="3017520" cy="256032"/>
           </a:xfrm>
           <a:prstGeom prst="rect">
             <a:avLst/>
@@ -5637,7 +6314,7 @@
           <a:noFill/>
         </p:spPr>
         <p:txBody>
-          <a:bodyPr wrap="none">
+          <a:bodyPr wrap="square">
             <a:spAutoFit/>
           </a:bodyPr>
           <a:lstStyle/>
@@ -5645,18 +6322,12 @@
             <a:r>
               <a:rPr sz="900" b="1">
                 <a:solidFill>
-                  <a:srgbClr val="5F6F82"/>
-                </a:solidFill>
-                <a:latin typeface="微软雅黑" panose="020B0503020204020204" charset="-122"/>
+                  <a:srgbClr val="5C6B7E"/>
+                </a:solidFill>
+                <a:latin typeface="Microsoft YaHei"/>
               </a:rPr>
-              <a:t>COMPARISON</a:t>
-            </a:r>
-            <a:endParaRPr sz="900" b="1">
-              <a:solidFill>
-                <a:srgbClr val="5F6F82"/>
-              </a:solidFill>
-              <a:latin typeface="微软雅黑" panose="020B0503020204020204" charset="-122"/>
-            </a:endParaRPr>
+              <a:t>IMAGE FEATURES</a:t>
+            </a:r>
           </a:p>
         </p:txBody>
       </p:sp>
@@ -5668,8 +6339,8 @@
         </p:nvSpPr>
         <p:spPr>
           <a:xfrm>
-            <a:off x="502920" y="502920"/>
-            <a:ext cx="10424160" cy="502920"/>
+            <a:off x="502920" y="530352"/>
+            <a:ext cx="10881360" cy="502920"/>
           </a:xfrm>
           <a:prstGeom prst="rect">
             <a:avLst/>
@@ -5677,7 +6348,7 @@
           <a:noFill/>
         </p:spPr>
         <p:txBody>
-          <a:bodyPr wrap="none">
+          <a:bodyPr wrap="square">
             <a:spAutoFit/>
           </a:bodyPr>
           <a:lstStyle/>
@@ -5685,39 +6356,120 @@
             <a:r>
               <a:rPr sz="2400" b="1">
                 <a:solidFill>
-                  <a:srgbClr val="1E2328"/>
-                </a:solidFill>
-                <a:latin typeface="微软雅黑" panose="020B0503020204020204" charset="-122"/>
+                  <a:srgbClr val="1A1F24"/>
+                </a:solidFill>
+                <a:latin typeface="Microsoft YaHei"/>
               </a:rPr>
-              <a:t>模型对比：TwoLayerNet 在 raw pixels 上领先</a:t>
-            </a:r>
-            <a:endParaRPr sz="2400" b="1">
-              <a:solidFill>
-                <a:srgbClr val="1E2328"/>
-              </a:solidFill>
-              <a:latin typeface="微软雅黑" panose="020B0503020204020204" charset="-122"/>
-            </a:endParaRPr>
+              <a:t>补充实验：HOG + Color Histogram</a:t>
+            </a:r>
+          </a:p>
+        </p:txBody>
+      </p:sp>
+      <p:sp>
+        <p:nvSpPr>
+          <p:cNvPr id="4" name="TextBox 3"/>
+          <p:cNvSpPr txBox="1"/>
+          <p:nvPr/>
+        </p:nvSpPr>
+        <p:spPr>
+          <a:xfrm>
+            <a:off x="685800" y="1234440"/>
+            <a:ext cx="4937760" cy="4023360"/>
+          </a:xfrm>
+          <a:prstGeom prst="rect">
+            <a:avLst/>
+          </a:prstGeom>
+          <a:noFill/>
+        </p:spPr>
+        <p:txBody>
+          <a:bodyPr wrap="square">
+            <a:spAutoFit/>
+          </a:bodyPr>
+          <a:lstStyle/>
+          <a:p>
+            <a:pPr>
+              <a:spcAft>
+                <a:spcPts val="800"/>
+              </a:spcAft>
+              <a:defRPr sz="1700">
+                <a:solidFill>
+                  <a:srgbClr val="2A2E34"/>
+                </a:solidFill>
+                <a:latin typeface="Microsoft YaHei"/>
+              </a:defRPr>
+            </a:pPr>
+            <a:r>
+              <a:t>HOG：统计局部梯度方向，突出边缘与轮廓</a:t>
+            </a:r>
+          </a:p>
+          <a:p>
+            <a:pPr>
+              <a:spcAft>
+                <a:spcPts val="800"/>
+              </a:spcAft>
+              <a:defRPr sz="1700">
+                <a:solidFill>
+                  <a:srgbClr val="2A2E34"/>
+                </a:solidFill>
+                <a:latin typeface="Microsoft YaHei"/>
+              </a:defRPr>
+            </a:pPr>
+            <a:r>
+              <a:t>HSV color histogram：统计颜色分布，补充颜色语义</a:t>
+            </a:r>
+          </a:p>
+          <a:p>
+            <a:pPr>
+              <a:spcAft>
+                <a:spcPts val="800"/>
+              </a:spcAft>
+              <a:defRPr sz="1700">
+                <a:solidFill>
+                  <a:srgbClr val="2A2E34"/>
+                </a:solidFill>
+                <a:latin typeface="Microsoft YaHei"/>
+              </a:defRPr>
+            </a:pPr>
+            <a:r>
+              <a:t>提取后特征维度为 154，远小于 raw pixels 的 3072 维</a:t>
+            </a:r>
+          </a:p>
+          <a:p>
+            <a:pPr>
+              <a:spcAft>
+                <a:spcPts val="800"/>
+              </a:spcAft>
+              <a:defRPr sz="1700">
+                <a:solidFill>
+                  <a:srgbClr val="2A2E34"/>
+                </a:solidFill>
+                <a:latin typeface="Microsoft YaHei"/>
+              </a:defRPr>
+            </a:pPr>
+            <a:r>
+              <a:t>这一步的核心不是换分类器，而是换输入表示</a:t>
+            </a:r>
           </a:p>
         </p:txBody>
       </p:sp>
       <p:pic>
         <p:nvPicPr>
-          <p:cNvPr id="4" name="Picture 3" descr="model_test_accuracy_comparison.png"/>
+          <p:cNvPr id="5" name="Picture 4" descr="feature_vs_raw_accuracy.png"/>
           <p:cNvPicPr>
             <a:picLocks noChangeAspect="1"/>
           </p:cNvPicPr>
           <p:nvPr/>
         </p:nvPicPr>
         <p:blipFill>
-          <a:blip r:embed="rId1"/>
+          <a:blip r:embed="rId2"/>
           <a:stretch>
             <a:fillRect/>
           </a:stretch>
         </p:blipFill>
         <p:spPr>
           <a:xfrm>
-            <a:off x="822960" y="1143000"/>
-            <a:ext cx="10607040" cy="4572000"/>
+            <a:off x="5806440" y="1143000"/>
+            <a:ext cx="5486400" cy="3886200"/>
           </a:xfrm>
           <a:prstGeom prst="rect">
             <a:avLst/>
@@ -5733,7 +6485,7 @@
 </file>
 
 <file path=ppt/slides/slide8.xml><?xml version="1.0" encoding="utf-8"?>
-<p:sld xmlns:a="http://schemas.openxmlformats.org/drawingml/2006/main" xmlns:r="http://schemas.openxmlformats.org/officeDocument/2006/relationships" xmlns:p="http://schemas.openxmlformats.org/presentationml/2006/main">
+<p:sld xmlns:a="http://schemas.openxmlformats.org/drawingml/2006/main" xmlns:p="http://schemas.openxmlformats.org/presentationml/2006/main" xmlns:r="http://schemas.openxmlformats.org/officeDocument/2006/relationships">
   <p:cSld>
     <p:bg>
       <p:bgPr>
@@ -5758,8 +6510,8 @@
         </p:nvSpPr>
         <p:spPr>
           <a:xfrm>
-            <a:off x="502920" y="256032"/>
-            <a:ext cx="2286000" cy="237744"/>
+            <a:off x="502920" y="228600"/>
+            <a:ext cx="3017520" cy="256032"/>
           </a:xfrm>
           <a:prstGeom prst="rect">
             <a:avLst/>
@@ -5767,7 +6519,7 @@
           <a:noFill/>
         </p:spPr>
         <p:txBody>
-          <a:bodyPr wrap="none">
+          <a:bodyPr wrap="square">
             <a:spAutoFit/>
           </a:bodyPr>
           <a:lstStyle/>
@@ -5775,18 +6527,12 @@
             <a:r>
               <a:rPr sz="900" b="1">
                 <a:solidFill>
-                  <a:srgbClr val="5F6F82"/>
-                </a:solidFill>
-                <a:latin typeface="微软雅黑" panose="020B0503020204020204" charset="-122"/>
+                  <a:srgbClr val="5C6B7E"/>
+                </a:solidFill>
+                <a:latin typeface="Microsoft YaHei"/>
               </a:rPr>
-              <a:t>SCALE EFFECT</a:t>
-            </a:r>
-            <a:endParaRPr sz="900" b="1">
-              <a:solidFill>
-                <a:srgbClr val="5F6F82"/>
-              </a:solidFill>
-              <a:latin typeface="微软雅黑" panose="020B0503020204020204" charset="-122"/>
-            </a:endParaRPr>
+              <a:t>FEATURE RESULTS</a:t>
+            </a:r>
           </a:p>
         </p:txBody>
       </p:sp>
@@ -5798,8 +6544,8 @@
         </p:nvSpPr>
         <p:spPr>
           <a:xfrm>
-            <a:off x="502920" y="502920"/>
-            <a:ext cx="10424160" cy="502920"/>
+            <a:off x="502920" y="530352"/>
+            <a:ext cx="10881360" cy="502920"/>
           </a:xfrm>
           <a:prstGeom prst="rect">
             <a:avLst/>
@@ -5807,7 +6553,7 @@
           <a:noFill/>
         </p:spPr>
         <p:txBody>
-          <a:bodyPr wrap="none">
+          <a:bodyPr wrap="square">
             <a:spAutoFit/>
           </a:bodyPr>
           <a:lstStyle/>
@@ -5815,45 +6561,513 @@
             <a:r>
               <a:rPr sz="2400" b="1">
                 <a:solidFill>
-                  <a:srgbClr val="1E2328"/>
-                </a:solidFill>
-                <a:latin typeface="微软雅黑" panose="020B0503020204020204" charset="-122"/>
+                  <a:srgbClr val="1A1F24"/>
+                </a:solidFill>
+                <a:latin typeface="Microsoft YaHei"/>
               </a:rPr>
-              <a:t>数据规模影响：线性与非线性模型更能利用更多数据</a:t>
-            </a:r>
-            <a:endParaRPr sz="2400" b="1">
-              <a:solidFill>
-                <a:srgbClr val="1E2328"/>
-              </a:solidFill>
-              <a:latin typeface="微软雅黑" panose="020B0503020204020204" charset="-122"/>
-            </a:endParaRPr>
-          </a:p>
-        </p:txBody>
-      </p:sp>
-      <p:pic>
-        <p:nvPicPr>
-          <p:cNvPr id="4" name="Picture 3" descr="data_scale_effect.png"/>
-          <p:cNvPicPr>
-            <a:picLocks noChangeAspect="1"/>
-          </p:cNvPicPr>
+              <a:t>Raw pixels vs Image Features</a:t>
+            </a:r>
+          </a:p>
+        </p:txBody>
+      </p:sp>
+      <p:graphicFrame>
+        <p:nvGraphicFramePr>
+          <p:cNvPr id="4" name="Table 3"/>
+          <p:cNvGraphicFramePr>
+            <a:graphicFrameLocks noGrp="1"/>
+          </p:cNvGraphicFramePr>
           <p:nvPr/>
-        </p:nvPicPr>
-        <p:blipFill>
-          <a:blip r:embed="rId1"/>
-          <a:stretch>
-            <a:fillRect/>
-          </a:stretch>
-        </p:blipFill>
-        <p:spPr>
-          <a:xfrm>
-            <a:off x="685800" y="1097280"/>
-            <a:ext cx="6492240" cy="4297680"/>
-          </a:xfrm>
-          <a:prstGeom prst="rect">
-            <a:avLst/>
-          </a:prstGeom>
-        </p:spPr>
-      </p:pic>
+        </p:nvGraphicFramePr>
+        <p:xfrm>
+          <a:off x="731520" y="1188720"/>
+          <a:ext cx="10698480" cy="2468880"/>
+        </p:xfrm>
+        <a:graphic>
+          <a:graphicData uri="http://schemas.openxmlformats.org/drawingml/2006/table">
+            <a:tbl>
+              <a:tblPr firstRow="1" bandRow="1">
+                <a:tableStyleId>{5C22544A-7EE6-4342-B048-85BDC9FD1C3A}</a:tableStyleId>
+              </a:tblPr>
+              <a:tblGrid>
+                <a:gridCol w="2674620"/>
+                <a:gridCol w="2674620"/>
+                <a:gridCol w="2674620"/>
+                <a:gridCol w="2674620"/>
+              </a:tblGrid>
+              <a:tr h="493776">
+                <a:tc>
+                  <a:txBody>
+                    <a:bodyPr/>
+                    <a:lstStyle/>
+                    <a:p>
+                      <a:pPr algn="ctr"/>
+                      <a:r>
+                        <a:rPr sz="1200" b="1">
+                          <a:solidFill>
+                            <a:srgbClr val="23282E"/>
+                          </a:solidFill>
+                          <a:latin typeface="Microsoft YaHei"/>
+                        </a:rPr>
+                        <a:t>输入表示</a:t>
+                      </a:r>
+                    </a:p>
+                  </a:txBody>
+                  <a:tcPr>
+                    <a:solidFill>
+                      <a:srgbClr val="EBEFEC"/>
+                    </a:solidFill>
+                  </a:tcPr>
+                </a:tc>
+                <a:tc>
+                  <a:txBody>
+                    <a:bodyPr/>
+                    <a:lstStyle/>
+                    <a:p>
+                      <a:pPr algn="ctr"/>
+                      <a:r>
+                        <a:rPr sz="1200" b="1">
+                          <a:solidFill>
+                            <a:srgbClr val="23282E"/>
+                          </a:solidFill>
+                          <a:latin typeface="Microsoft YaHei"/>
+                        </a:rPr>
+                        <a:t>模型</a:t>
+                      </a:r>
+                    </a:p>
+                  </a:txBody>
+                  <a:tcPr>
+                    <a:solidFill>
+                      <a:srgbClr val="EBEFEC"/>
+                    </a:solidFill>
+                  </a:tcPr>
+                </a:tc>
+                <a:tc>
+                  <a:txBody>
+                    <a:bodyPr/>
+                    <a:lstStyle/>
+                    <a:p>
+                      <a:pPr algn="ctr"/>
+                      <a:r>
+                        <a:rPr sz="1200" b="1">
+                          <a:solidFill>
+                            <a:srgbClr val="23282E"/>
+                          </a:solidFill>
+                          <a:latin typeface="Microsoft YaHei"/>
+                        </a:rPr>
+                        <a:t>Val Acc</a:t>
+                      </a:r>
+                    </a:p>
+                  </a:txBody>
+                  <a:tcPr>
+                    <a:solidFill>
+                      <a:srgbClr val="EBEFEC"/>
+                    </a:solidFill>
+                  </a:tcPr>
+                </a:tc>
+                <a:tc>
+                  <a:txBody>
+                    <a:bodyPr/>
+                    <a:lstStyle/>
+                    <a:p>
+                      <a:pPr algn="ctr"/>
+                      <a:r>
+                        <a:rPr sz="1200" b="1">
+                          <a:solidFill>
+                            <a:srgbClr val="23282E"/>
+                          </a:solidFill>
+                          <a:latin typeface="Microsoft YaHei"/>
+                        </a:rPr>
+                        <a:t>Test Acc</a:t>
+                      </a:r>
+                    </a:p>
+                  </a:txBody>
+                  <a:tcPr>
+                    <a:solidFill>
+                      <a:srgbClr val="EBEFEC"/>
+                    </a:solidFill>
+                  </a:tcPr>
+                </a:tc>
+              </a:tr>
+              <a:tr h="493776">
+                <a:tc>
+                  <a:txBody>
+                    <a:bodyPr/>
+                    <a:lstStyle/>
+                    <a:p>
+                      <a:pPr algn="ctr"/>
+                      <a:r>
+                        <a:rPr sz="1200" b="0">
+                          <a:solidFill>
+                            <a:srgbClr val="23282E"/>
+                          </a:solidFill>
+                          <a:latin typeface="Microsoft YaHei"/>
+                        </a:rPr>
+                        <a:t>raw pixels</a:t>
+                      </a:r>
+                    </a:p>
+                  </a:txBody>
+                  <a:tcPr>
+                    <a:solidFill>
+                      <a:srgbClr val="FFFFFF"/>
+                    </a:solidFill>
+                  </a:tcPr>
+                </a:tc>
+                <a:tc>
+                  <a:txBody>
+                    <a:bodyPr/>
+                    <a:lstStyle/>
+                    <a:p>
+                      <a:pPr algn="ctr"/>
+                      <a:r>
+                        <a:rPr sz="1200" b="0">
+                          <a:solidFill>
+                            <a:srgbClr val="23282E"/>
+                          </a:solidFill>
+                          <a:latin typeface="Microsoft YaHei"/>
+                        </a:rPr>
+                        <a:t>Softmax</a:t>
+                      </a:r>
+                    </a:p>
+                  </a:txBody>
+                  <a:tcPr>
+                    <a:solidFill>
+                      <a:srgbClr val="FFFFFF"/>
+                    </a:solidFill>
+                  </a:tcPr>
+                </a:tc>
+                <a:tc>
+                  <a:txBody>
+                    <a:bodyPr/>
+                    <a:lstStyle/>
+                    <a:p>
+                      <a:pPr algn="ctr"/>
+                      <a:r>
+                        <a:rPr sz="1200" b="0">
+                          <a:solidFill>
+                            <a:srgbClr val="23282E"/>
+                          </a:solidFill>
+                          <a:latin typeface="Microsoft YaHei"/>
+                        </a:rPr>
+                        <a:t>0.383</a:t>
+                      </a:r>
+                    </a:p>
+                  </a:txBody>
+                  <a:tcPr>
+                    <a:solidFill>
+                      <a:srgbClr val="FFFFFF"/>
+                    </a:solidFill>
+                  </a:tcPr>
+                </a:tc>
+                <a:tc>
+                  <a:txBody>
+                    <a:bodyPr/>
+                    <a:lstStyle/>
+                    <a:p>
+                      <a:pPr algn="ctr"/>
+                      <a:r>
+                        <a:rPr sz="1200" b="0">
+                          <a:solidFill>
+                            <a:srgbClr val="23282E"/>
+                          </a:solidFill>
+                          <a:latin typeface="Microsoft YaHei"/>
+                        </a:rPr>
+                        <a:t>0.359</a:t>
+                      </a:r>
+                    </a:p>
+                  </a:txBody>
+                  <a:tcPr>
+                    <a:solidFill>
+                      <a:srgbClr val="FFFFFF"/>
+                    </a:solidFill>
+                  </a:tcPr>
+                </a:tc>
+              </a:tr>
+              <a:tr h="493776">
+                <a:tc>
+                  <a:txBody>
+                    <a:bodyPr/>
+                    <a:lstStyle/>
+                    <a:p>
+                      <a:pPr algn="ctr"/>
+                      <a:r>
+                        <a:rPr sz="1200" b="0">
+                          <a:solidFill>
+                            <a:srgbClr val="23282E"/>
+                          </a:solidFill>
+                          <a:latin typeface="Microsoft YaHei"/>
+                        </a:rPr>
+                        <a:t>HOG + color hist</a:t>
+                      </a:r>
+                    </a:p>
+                  </a:txBody>
+                  <a:tcPr>
+                    <a:solidFill>
+                      <a:srgbClr val="FFFFFF"/>
+                    </a:solidFill>
+                  </a:tcPr>
+                </a:tc>
+                <a:tc>
+                  <a:txBody>
+                    <a:bodyPr/>
+                    <a:lstStyle/>
+                    <a:p>
+                      <a:pPr algn="ctr"/>
+                      <a:r>
+                        <a:rPr sz="1200" b="0">
+                          <a:solidFill>
+                            <a:srgbClr val="23282E"/>
+                          </a:solidFill>
+                          <a:latin typeface="Microsoft YaHei"/>
+                        </a:rPr>
+                        <a:t>Softmax</a:t>
+                      </a:r>
+                    </a:p>
+                  </a:txBody>
+                  <a:tcPr>
+                    <a:solidFill>
+                      <a:srgbClr val="FFFFFF"/>
+                    </a:solidFill>
+                  </a:tcPr>
+                </a:tc>
+                <a:tc>
+                  <a:txBody>
+                    <a:bodyPr/>
+                    <a:lstStyle/>
+                    <a:p>
+                      <a:pPr algn="ctr"/>
+                      <a:r>
+                        <a:rPr sz="1200" b="0">
+                          <a:solidFill>
+                            <a:srgbClr val="23282E"/>
+                          </a:solidFill>
+                          <a:latin typeface="Microsoft YaHei"/>
+                        </a:rPr>
+                        <a:t>0.417</a:t>
+                      </a:r>
+                    </a:p>
+                  </a:txBody>
+                  <a:tcPr>
+                    <a:solidFill>
+                      <a:srgbClr val="FFFFFF"/>
+                    </a:solidFill>
+                  </a:tcPr>
+                </a:tc>
+                <a:tc>
+                  <a:txBody>
+                    <a:bodyPr/>
+                    <a:lstStyle/>
+                    <a:p>
+                      <a:pPr algn="ctr"/>
+                      <a:r>
+                        <a:rPr sz="1200" b="0">
+                          <a:solidFill>
+                            <a:srgbClr val="23282E"/>
+                          </a:solidFill>
+                          <a:latin typeface="Microsoft YaHei"/>
+                        </a:rPr>
+                        <a:t>0.420</a:t>
+                      </a:r>
+                    </a:p>
+                  </a:txBody>
+                  <a:tcPr>
+                    <a:solidFill>
+                      <a:srgbClr val="FFFFFF"/>
+                    </a:solidFill>
+                  </a:tcPr>
+                </a:tc>
+              </a:tr>
+              <a:tr h="493776">
+                <a:tc>
+                  <a:txBody>
+                    <a:bodyPr/>
+                    <a:lstStyle/>
+                    <a:p>
+                      <a:pPr algn="ctr"/>
+                      <a:r>
+                        <a:rPr sz="1200" b="0">
+                          <a:solidFill>
+                            <a:srgbClr val="23282E"/>
+                          </a:solidFill>
+                          <a:latin typeface="Microsoft YaHei"/>
+                        </a:rPr>
+                        <a:t>raw pixels</a:t>
+                      </a:r>
+                    </a:p>
+                  </a:txBody>
+                  <a:tcPr>
+                    <a:solidFill>
+                      <a:srgbClr val="FFFFFF"/>
+                    </a:solidFill>
+                  </a:tcPr>
+                </a:tc>
+                <a:tc>
+                  <a:txBody>
+                    <a:bodyPr/>
+                    <a:lstStyle/>
+                    <a:p>
+                      <a:pPr algn="ctr"/>
+                      <a:r>
+                        <a:rPr sz="1200" b="0">
+                          <a:solidFill>
+                            <a:srgbClr val="23282E"/>
+                          </a:solidFill>
+                          <a:latin typeface="Microsoft YaHei"/>
+                        </a:rPr>
+                        <a:t>TwoLayerNet</a:t>
+                      </a:r>
+                    </a:p>
+                  </a:txBody>
+                  <a:tcPr>
+                    <a:solidFill>
+                      <a:srgbClr val="FFFFFF"/>
+                    </a:solidFill>
+                  </a:tcPr>
+                </a:tc>
+                <a:tc>
+                  <a:txBody>
+                    <a:bodyPr/>
+                    <a:lstStyle/>
+                    <a:p>
+                      <a:pPr algn="ctr"/>
+                      <a:r>
+                        <a:rPr sz="1200" b="0">
+                          <a:solidFill>
+                            <a:srgbClr val="23282E"/>
+                          </a:solidFill>
+                          <a:latin typeface="Microsoft YaHei"/>
+                        </a:rPr>
+                        <a:t>0.515</a:t>
+                      </a:r>
+                    </a:p>
+                  </a:txBody>
+                  <a:tcPr>
+                    <a:solidFill>
+                      <a:srgbClr val="FFFFFF"/>
+                    </a:solidFill>
+                  </a:tcPr>
+                </a:tc>
+                <a:tc>
+                  <a:txBody>
+                    <a:bodyPr/>
+                    <a:lstStyle/>
+                    <a:p>
+                      <a:pPr algn="ctr"/>
+                      <a:r>
+                        <a:rPr sz="1200" b="0">
+                          <a:solidFill>
+                            <a:srgbClr val="23282E"/>
+                          </a:solidFill>
+                          <a:latin typeface="Microsoft YaHei"/>
+                        </a:rPr>
+                        <a:t>0.493</a:t>
+                      </a:r>
+                    </a:p>
+                  </a:txBody>
+                  <a:tcPr>
+                    <a:solidFill>
+                      <a:srgbClr val="FFFFFF"/>
+                    </a:solidFill>
+                  </a:tcPr>
+                </a:tc>
+              </a:tr>
+              <a:tr h="493776">
+                <a:tc>
+                  <a:txBody>
+                    <a:bodyPr/>
+                    <a:lstStyle/>
+                    <a:p>
+                      <a:pPr algn="ctr"/>
+                      <a:r>
+                        <a:rPr sz="1200" b="0">
+                          <a:solidFill>
+                            <a:srgbClr val="23282E"/>
+                          </a:solidFill>
+                          <a:latin typeface="Microsoft YaHei"/>
+                        </a:rPr>
+                        <a:t>HOG + color hist</a:t>
+                      </a:r>
+                    </a:p>
+                  </a:txBody>
+                  <a:tcPr>
+                    <a:solidFill>
+                      <a:srgbClr val="FFFFFF"/>
+                    </a:solidFill>
+                  </a:tcPr>
+                </a:tc>
+                <a:tc>
+                  <a:txBody>
+                    <a:bodyPr/>
+                    <a:lstStyle/>
+                    <a:p>
+                      <a:pPr algn="ctr"/>
+                      <a:r>
+                        <a:rPr sz="1200" b="0">
+                          <a:solidFill>
+                            <a:srgbClr val="23282E"/>
+                          </a:solidFill>
+                          <a:latin typeface="Microsoft YaHei"/>
+                        </a:rPr>
+                        <a:t>TwoLayerNet</a:t>
+                      </a:r>
+                    </a:p>
+                  </a:txBody>
+                  <a:tcPr>
+                    <a:solidFill>
+                      <a:srgbClr val="FFFFFF"/>
+                    </a:solidFill>
+                  </a:tcPr>
+                </a:tc>
+                <a:tc>
+                  <a:txBody>
+                    <a:bodyPr/>
+                    <a:lstStyle/>
+                    <a:p>
+                      <a:pPr algn="ctr"/>
+                      <a:r>
+                        <a:rPr sz="1200" b="0">
+                          <a:solidFill>
+                            <a:srgbClr val="23282E"/>
+                          </a:solidFill>
+                          <a:latin typeface="Microsoft YaHei"/>
+                        </a:rPr>
+                        <a:t>0.605</a:t>
+                      </a:r>
+                    </a:p>
+                  </a:txBody>
+                  <a:tcPr>
+                    <a:solidFill>
+                      <a:srgbClr val="FFFFFF"/>
+                    </a:solidFill>
+                  </a:tcPr>
+                </a:tc>
+                <a:tc>
+                  <a:txBody>
+                    <a:bodyPr/>
+                    <a:lstStyle/>
+                    <a:p>
+                      <a:pPr algn="ctr"/>
+                      <a:r>
+                        <a:rPr sz="1200" b="0">
+                          <a:solidFill>
+                            <a:srgbClr val="23282E"/>
+                          </a:solidFill>
+                          <a:latin typeface="Microsoft YaHei"/>
+                        </a:rPr>
+                        <a:t>0.576</a:t>
+                      </a:r>
+                    </a:p>
+                  </a:txBody>
+                  <a:tcPr>
+                    <a:solidFill>
+                      <a:srgbClr val="FFFFFF"/>
+                    </a:solidFill>
+                  </a:tcPr>
+                </a:tc>
+              </a:tr>
+            </a:tbl>
+          </a:graphicData>
+        </a:graphic>
+      </p:graphicFrame>
       <p:sp>
         <p:nvSpPr>
           <p:cNvPr id="5" name="TextBox 4"/>
@@ -5862,8 +7076,8 @@
         </p:nvSpPr>
         <p:spPr>
           <a:xfrm>
-            <a:off x="7498079" y="1325880"/>
-            <a:ext cx="3840480" cy="4389120"/>
+            <a:off x="822960" y="4206240"/>
+            <a:ext cx="10241280" cy="502920"/>
           </a:xfrm>
           <a:prstGeom prst="rect">
             <a:avLst/>
@@ -5871,60 +7085,19 @@
           <a:noFill/>
         </p:spPr>
         <p:txBody>
-          <a:bodyPr wrap="none">
+          <a:bodyPr wrap="square">
             <a:spAutoFit/>
           </a:bodyPr>
           <a:lstStyle/>
           <a:p>
-            <a:pPr>
-              <a:spcAft>
-                <a:spcPts val="800"/>
-              </a:spcAft>
-              <a:defRPr sz="1500">
-                <a:latin typeface="微软雅黑" panose="020B0503020204020204" charset="-122"/>
-              </a:defRPr>
-            </a:pPr>
-            <a:r>
-              <a:t>kNN：提升有限，瓶颈在像素距离</a:t>
-            </a:r>
-          </a:p>
-          <a:p>
-            <a:pPr>
-              <a:spcAft>
-                <a:spcPts val="800"/>
-              </a:spcAft>
-              <a:defRPr sz="1500">
-                <a:latin typeface="微软雅黑" panose="020B0503020204020204" charset="-122"/>
-              </a:defRPr>
-            </a:pPr>
-            <a:r>
-              <a:t>Softmax：更多数据带来稳定小幅提升</a:t>
-            </a:r>
-          </a:p>
-          <a:p>
-            <a:pPr>
-              <a:spcAft>
-                <a:spcPts val="800"/>
-              </a:spcAft>
-              <a:defRPr sz="1500">
-                <a:latin typeface="微软雅黑" panose="020B0503020204020204" charset="-122"/>
-              </a:defRPr>
-            </a:pPr>
-            <a:r>
-              <a:t>TwoLayerNet：49k 后突破 0.5 附近</a:t>
-            </a:r>
-          </a:p>
-          <a:p>
-            <a:pPr>
-              <a:spcAft>
-                <a:spcPts val="800"/>
-              </a:spcAft>
-              <a:defRPr sz="1500">
-                <a:latin typeface="微软雅黑" panose="020B0503020204020204" charset="-122"/>
-              </a:defRPr>
-            </a:pPr>
-            <a:r>
-              <a:t>测试集波动不替代验证集选模</a:t>
+            <a:r>
+              <a:rPr sz="1900" b="1">
+                <a:solidFill>
+                  <a:srgbClr val="4F8968"/>
+                </a:solidFill>
+                <a:latin typeface="Microsoft YaHei"/>
+              </a:rPr>
+              <a:t>结论：TwoLayerNet + image features 的测试准确率达到 0.576，比 raw pixels 提升 0.083。</a:t>
             </a:r>
           </a:p>
         </p:txBody>
@@ -5938,7 +7111,7 @@
 </file>
 
 <file path=ppt/slides/slide9.xml><?xml version="1.0" encoding="utf-8"?>
-<p:sld xmlns:a="http://schemas.openxmlformats.org/drawingml/2006/main" xmlns:r="http://schemas.openxmlformats.org/officeDocument/2006/relationships" xmlns:p="http://schemas.openxmlformats.org/presentationml/2006/main">
+<p:sld xmlns:a="http://schemas.openxmlformats.org/drawingml/2006/main" xmlns:p="http://schemas.openxmlformats.org/presentationml/2006/main" xmlns:r="http://schemas.openxmlformats.org/officeDocument/2006/relationships">
   <p:cSld>
     <p:bg>
       <p:bgPr>
@@ -5963,8 +7136,8 @@
         </p:nvSpPr>
         <p:spPr>
           <a:xfrm>
-            <a:off x="502920" y="256032"/>
-            <a:ext cx="2286000" cy="237744"/>
+            <a:off x="502920" y="228600"/>
+            <a:ext cx="3017520" cy="256032"/>
           </a:xfrm>
           <a:prstGeom prst="rect">
             <a:avLst/>
@@ -5972,7 +7145,7 @@
           <a:noFill/>
         </p:spPr>
         <p:txBody>
-          <a:bodyPr wrap="none">
+          <a:bodyPr wrap="square">
             <a:spAutoFit/>
           </a:bodyPr>
           <a:lstStyle/>
@@ -5980,18 +7153,12 @@
             <a:r>
               <a:rPr sz="900" b="1">
                 <a:solidFill>
-                  <a:srgbClr val="5F6F82"/>
-                </a:solidFill>
-                <a:latin typeface="微软雅黑" panose="020B0503020204020204" charset="-122"/>
+                  <a:srgbClr val="5C6B7E"/>
+                </a:solidFill>
+                <a:latin typeface="Microsoft YaHei"/>
               </a:rPr>
-              <a:t>DIAGNOSTICS</a:t>
-            </a:r>
-            <a:endParaRPr sz="900" b="1">
-              <a:solidFill>
-                <a:srgbClr val="5F6F82"/>
-              </a:solidFill>
-              <a:latin typeface="微软雅黑" panose="020B0503020204020204" charset="-122"/>
-            </a:endParaRPr>
+              <a:t>SOFTMAX TUNING</a:t>
+            </a:r>
           </a:p>
         </p:txBody>
       </p:sp>
@@ -6003,8 +7170,8 @@
         </p:nvSpPr>
         <p:spPr>
           <a:xfrm>
-            <a:off x="502920" y="502920"/>
-            <a:ext cx="10424160" cy="502920"/>
+            <a:off x="502920" y="530352"/>
+            <a:ext cx="10881360" cy="502920"/>
           </a:xfrm>
           <a:prstGeom prst="rect">
             <a:avLst/>
@@ -6012,7 +7179,7 @@
           <a:noFill/>
         </p:spPr>
         <p:txBody>
-          <a:bodyPr wrap="none">
+          <a:bodyPr wrap="square">
             <a:spAutoFit/>
           </a:bodyPr>
           <a:lstStyle/>
@@ -6020,49 +7187,18 @@
             <a:r>
               <a:rPr sz="2400" b="1">
                 <a:solidFill>
-                  <a:srgbClr val="1E2328"/>
-                </a:solidFill>
-                <a:latin typeface="微软雅黑" panose="020B0503020204020204" charset="-122"/>
+                  <a:srgbClr val="1A1F24"/>
+                </a:solidFill>
+                <a:latin typeface="Microsoft YaHei"/>
               </a:rPr>
-              <a:t>诊断图：loss 下降与类别混淆</a:t>
-            </a:r>
-            <a:endParaRPr sz="2400" b="1">
-              <a:solidFill>
-                <a:srgbClr val="1E2328"/>
-              </a:solidFill>
-              <a:latin typeface="微软雅黑" panose="020B0503020204020204" charset="-122"/>
-            </a:endParaRPr>
+              <a:t>Softmax on Features：学习率与正则化搜索</a:t>
+            </a:r>
           </a:p>
         </p:txBody>
       </p:sp>
       <p:pic>
         <p:nvPicPr>
-          <p:cNvPr id="4" name="Picture 3" descr="two_layer_loss_curve.png"/>
-          <p:cNvPicPr>
-            <a:picLocks noChangeAspect="1"/>
-          </p:cNvPicPr>
-          <p:nvPr/>
-        </p:nvPicPr>
-        <p:blipFill>
-          <a:blip r:embed="rId1"/>
-          <a:srcRect t="7168" r="-732"/>
-          <a:stretch>
-            <a:fillRect/>
-          </a:stretch>
-        </p:blipFill>
-        <p:spPr>
-          <a:xfrm>
-            <a:off x="685800" y="1219200"/>
-            <a:ext cx="5242560" cy="2804160"/>
-          </a:xfrm>
-          <a:prstGeom prst="rect">
-            <a:avLst/>
-          </a:prstGeom>
-        </p:spPr>
-      </p:pic>
-      <p:pic>
-        <p:nvPicPr>
-          <p:cNvPr id="5" name="Picture 4" descr="confusion_matrix_best_model.png"/>
+          <p:cNvPr id="4" name="Picture 3" descr="features_softmax_hyperparam_heatmap.png"/>
           <p:cNvPicPr>
             <a:picLocks noChangeAspect="1"/>
           </p:cNvPicPr>
@@ -6070,15 +7206,14 @@
         </p:nvPicPr>
         <p:blipFill>
           <a:blip r:embed="rId2"/>
-          <a:srcRect t="6147" r="-1768"/>
           <a:stretch>
             <a:fillRect/>
           </a:stretch>
         </p:blipFill>
         <p:spPr>
           <a:xfrm>
-            <a:off x="6126480" y="1178560"/>
-            <a:ext cx="5118100" cy="4033520"/>
+            <a:off x="777240" y="1097280"/>
+            <a:ext cx="6400800" cy="4389120"/>
           </a:xfrm>
           <a:prstGeom prst="rect">
             <a:avLst/>
@@ -6087,14 +7222,14 @@
       </p:pic>
       <p:sp>
         <p:nvSpPr>
-          <p:cNvPr id="6" name="文本框 5"/>
+          <p:cNvPr id="5" name="TextBox 4"/>
           <p:cNvSpPr txBox="1"/>
           <p:nvPr/>
         </p:nvSpPr>
         <p:spPr>
           <a:xfrm>
-            <a:off x="685800" y="4115435"/>
-            <a:ext cx="4064000" cy="368300"/>
+            <a:off x="7543800" y="1417320"/>
+            <a:ext cx="3749039" cy="3749039"/>
           </a:xfrm>
           <a:prstGeom prst="rect">
             <a:avLst/>
@@ -6102,118 +7237,89 @@
           <a:noFill/>
         </p:spPr>
         <p:txBody>
-          <a:bodyPr wrap="square" rtlCol="0">
+          <a:bodyPr wrap="square">
             <a:spAutoFit/>
           </a:bodyPr>
-          <a:p>
-            <a:r>
-              <a:rPr b="1">
-                <a:solidFill>
-                  <a:srgbClr val="1E2328"/>
-                </a:solidFill>
-                <a:latin typeface="微软雅黑" panose="020B0503020204020204" charset="-122"/>
-                <a:sym typeface="+mn-ea"/>
-              </a:rPr>
-              <a:t>TwoLayerNet</a:t>
-            </a:r>
-            <a:r>
-              <a:rPr lang="en-US" b="1">
-                <a:solidFill>
-                  <a:srgbClr val="1E2328"/>
-                </a:solidFill>
-                <a:latin typeface="微软雅黑" panose="020B0503020204020204" charset="-122"/>
-                <a:sym typeface="+mn-ea"/>
-              </a:rPr>
-              <a:t>-N49000 loss</a:t>
-            </a:r>
-            <a:r>
-              <a:rPr lang="zh-CN" altLang="en-US" b="1">
-                <a:solidFill>
-                  <a:srgbClr val="1E2328"/>
-                </a:solidFill>
-                <a:latin typeface="微软雅黑" panose="020B0503020204020204" charset="-122"/>
-                <a:sym typeface="+mn-ea"/>
-              </a:rPr>
-              <a:t>变化</a:t>
-            </a:r>
-            <a:endParaRPr lang="zh-CN" altLang="en-US" b="1">
-              <a:solidFill>
-                <a:srgbClr val="1E2328"/>
-              </a:solidFill>
-              <a:latin typeface="微软雅黑" panose="020B0503020204020204" charset="-122"/>
-              <a:sym typeface="+mn-ea"/>
-            </a:endParaRPr>
-          </a:p>
-        </p:txBody>
-      </p:sp>
-      <p:sp>
-        <p:nvSpPr>
-          <p:cNvPr id="7" name="文本框 6"/>
-          <p:cNvSpPr txBox="1"/>
-          <p:nvPr/>
-        </p:nvSpPr>
-        <p:spPr>
-          <a:xfrm>
-            <a:off x="6193155" y="5394325"/>
-            <a:ext cx="4064000" cy="368300"/>
-          </a:xfrm>
-          <a:prstGeom prst="rect">
-            <a:avLst/>
-          </a:prstGeom>
-          <a:noFill/>
-        </p:spPr>
-        <p:txBody>
-          <a:bodyPr wrap="square" rtlCol="0">
-            <a:spAutoFit/>
-          </a:bodyPr>
-          <a:p>
-            <a:r>
-              <a:rPr b="1">
-                <a:solidFill>
-                  <a:srgbClr val="1E2328"/>
-                </a:solidFill>
-                <a:latin typeface="微软雅黑" panose="020B0503020204020204" charset="-122"/>
-                <a:sym typeface="+mn-ea"/>
-              </a:rPr>
-              <a:t>TwoLayerNet</a:t>
-            </a:r>
-            <a:r>
-              <a:rPr lang="en-US" b="1">
-                <a:solidFill>
-                  <a:srgbClr val="1E2328"/>
-                </a:solidFill>
-                <a:latin typeface="微软雅黑" panose="020B0503020204020204" charset="-122"/>
-                <a:sym typeface="+mn-ea"/>
-              </a:rPr>
-              <a:t>-1000 </a:t>
-            </a:r>
-            <a:r>
-              <a:rPr lang="zh-CN" altLang="en-US" b="1">
-                <a:solidFill>
-                  <a:srgbClr val="1E2328"/>
-                </a:solidFill>
-                <a:latin typeface="微软雅黑" panose="020B0503020204020204" charset="-122"/>
-                <a:sym typeface="+mn-ea"/>
-              </a:rPr>
-              <a:t>混淆</a:t>
-            </a:r>
-            <a:r>
-              <a:rPr lang="zh-CN" altLang="en-US" b="1">
-                <a:solidFill>
-                  <a:srgbClr val="1E2328"/>
-                </a:solidFill>
-                <a:latin typeface="微软雅黑" panose="020B0503020204020204" charset="-122"/>
-                <a:sym typeface="+mn-ea"/>
-              </a:rPr>
-              <a:t>矩阵</a:t>
-            </a:r>
-            <a:endParaRPr lang="zh-CN" altLang="en-US" b="1">
-              <a:solidFill>
-                <a:srgbClr val="1E2328"/>
-              </a:solidFill>
-              <a:latin typeface="微软雅黑" panose="020B0503020204020204" charset="-122"/>
-              <a:sym typeface="+mn-ea"/>
-            </a:endParaRPr>
+          <a:lstStyle/>
+          <a:p>
+            <a:pPr>
+              <a:spcAft>
+                <a:spcPts val="800"/>
+              </a:spcAft>
+              <a:defRPr sz="1700">
+                <a:solidFill>
+                  <a:srgbClr val="2A2E34"/>
+                </a:solidFill>
+                <a:latin typeface="Microsoft YaHei"/>
+              </a:defRPr>
+            </a:pPr>
+            <a:r>
+              <a:t>最佳 lr=5.0e-07</a:t>
+            </a:r>
+          </a:p>
+          <a:p>
+            <a:pPr>
+              <a:spcAft>
+                <a:spcPts val="800"/>
+              </a:spcAft>
+              <a:defRPr sz="1700">
+                <a:solidFill>
+                  <a:srgbClr val="2A2E34"/>
+                </a:solidFill>
+                <a:latin typeface="Microsoft YaHei"/>
+              </a:defRPr>
+            </a:pPr>
+            <a:r>
+              <a:t>最佳 reg=5000</a:t>
+            </a:r>
+          </a:p>
+          <a:p>
+            <a:pPr>
+              <a:spcAft>
+                <a:spcPts val="800"/>
+              </a:spcAft>
+              <a:defRPr sz="1700">
+                <a:solidFill>
+                  <a:srgbClr val="2A2E34"/>
+                </a:solidFill>
+                <a:latin typeface="Microsoft YaHei"/>
+              </a:defRPr>
+            </a:pPr>
+            <a:r>
+              <a:t>Val Acc=0.417</a:t>
+            </a:r>
+          </a:p>
+          <a:p>
+            <a:pPr>
+              <a:spcAft>
+                <a:spcPts val="800"/>
+              </a:spcAft>
+              <a:defRPr sz="1700">
+                <a:solidFill>
+                  <a:srgbClr val="2A2E34"/>
+                </a:solidFill>
+                <a:latin typeface="Microsoft YaHei"/>
+              </a:defRPr>
+            </a:pPr>
+            <a:r>
+              <a:t>Test Acc=0.420</a:t>
+            </a:r>
+          </a:p>
+          <a:p>
+            <a:pPr>
+              <a:spcAft>
+                <a:spcPts val="800"/>
+              </a:spcAft>
+              <a:defRPr sz="1700">
+                <a:solidFill>
+                  <a:srgbClr val="2A2E34"/>
+                </a:solidFill>
+                <a:latin typeface="Microsoft YaHei"/>
+              </a:defRPr>
+            </a:pPr>
+            <a:r>
+              <a:t>线性模型也能受益于更好的图像表示</a:t>
+            </a:r>
           </a:p>
         </p:txBody>
       </p:sp>
@@ -6541,10 +7647,6 @@
       </a:style>
     </a:lnDef>
   </a:objectDefaults>
-  <a:extLst>
-    <a:ext uri="{05A4C25C-085E-4340-85A3-A5531E510DB2}">
-      <thm15:themeFamily xmlns:thm15="http://schemas.microsoft.com/office/thememl/2012/main" name="Office Theme" id="{62F939B6-93AF-4DB8-9C6B-D6C7DFDC589F}" vid="{4A3C46E8-61CC-4603-A589-7422A47A8E4A}"/>
-    </a:ext>
-  </a:extLst>
+  <a:extraClrSchemeLst/>
 </a:theme>
 </file>